--- a/COURSE MATERIALS/Module3_CSE2503.pptx
+++ b/COURSE MATERIALS/Module3_CSE2503.pptx
@@ -225,7 +225,7 @@
   </p:defaultTextStyle>
   <p:extLst>
     <p:ext uri="{EFAFB233-063F-42B5-8137-9DF3F51BA10A}">
-      <p15:sldGuideLst xmlns:p15="http://schemas.microsoft.com/office/powerpoint/2012/main" xmlns="">
+      <p15:sldGuideLst xmlns:p15="http://schemas.microsoft.com/office/powerpoint/2012/main">
         <p15:guide id="1" orient="horz" pos="2160">
           <p15:clr>
             <a:srgbClr val="A4A3A4"/>
@@ -325,7 +325,7 @@
             <a:fld id="{1D5163DD-12C9-4B8E-91F3-BECE4B548A1F}" type="datetimeFigureOut">
               <a:rPr lang="en-US" smtClean="0"/>
               <a:pPr/>
-              <a:t>2/18/2026</a:t>
+              <a:t>3/4/2026</a:t>
             </a:fld>
             <a:endParaRPr lang="en-US"/>
           </a:p>
@@ -504,7 +504,7 @@
               <a:pPr>
                 <a:defRPr/>
               </a:pPr>
-              <a:t>2/18/2026</a:t>
+              <a:t>3/4/2026</a:t>
             </a:fld>
             <a:endParaRPr lang="en-US"/>
           </a:p>
@@ -1069,7 +1069,7 @@
               <a:pPr>
                 <a:defRPr/>
               </a:pPr>
-              <a:t>2/18/2026</a:t>
+              <a:t>3/4/2026</a:t>
             </a:fld>
             <a:endParaRPr lang="en-US"/>
           </a:p>
@@ -1266,7 +1266,7 @@
               <a:pPr>
                 <a:defRPr/>
               </a:pPr>
-              <a:t>2/18/2026</a:t>
+              <a:t>3/4/2026</a:t>
             </a:fld>
             <a:endParaRPr lang="en-US"/>
           </a:p>
@@ -1473,7 +1473,7 @@
               <a:pPr>
                 <a:defRPr/>
               </a:pPr>
-              <a:t>2/18/2026</a:t>
+              <a:t>3/4/2026</a:t>
             </a:fld>
             <a:endParaRPr lang="en-US"/>
           </a:p>
@@ -1670,7 +1670,7 @@
               <a:pPr>
                 <a:defRPr/>
               </a:pPr>
-              <a:t>2/18/2026</a:t>
+              <a:t>3/4/2026</a:t>
             </a:fld>
             <a:endParaRPr lang="en-US"/>
           </a:p>
@@ -1943,7 +1943,7 @@
               <a:pPr>
                 <a:defRPr/>
               </a:pPr>
-              <a:t>2/18/2026</a:t>
+              <a:t>3/4/2026</a:t>
             </a:fld>
             <a:endParaRPr lang="en-US"/>
           </a:p>
@@ -2202,7 +2202,7 @@
               <a:pPr>
                 <a:defRPr/>
               </a:pPr>
-              <a:t>2/18/2026</a:t>
+              <a:t>3/4/2026</a:t>
             </a:fld>
             <a:endParaRPr lang="en-US"/>
           </a:p>
@@ -2596,7 +2596,7 @@
               <a:pPr>
                 <a:defRPr/>
               </a:pPr>
-              <a:t>2/18/2026</a:t>
+              <a:t>3/4/2026</a:t>
             </a:fld>
             <a:endParaRPr lang="en-US"/>
           </a:p>
@@ -2741,7 +2741,7 @@
               <a:pPr>
                 <a:defRPr/>
               </a:pPr>
-              <a:t>2/18/2026</a:t>
+              <a:t>3/4/2026</a:t>
             </a:fld>
             <a:endParaRPr lang="en-US"/>
           </a:p>
@@ -2863,7 +2863,7 @@
               <a:pPr>
                 <a:defRPr/>
               </a:pPr>
-              <a:t>2/18/2026</a:t>
+              <a:t>3/4/2026</a:t>
             </a:fld>
             <a:endParaRPr lang="en-US"/>
           </a:p>
@@ -3167,7 +3167,7 @@
               <a:pPr>
                 <a:defRPr/>
               </a:pPr>
-              <a:t>2/18/2026</a:t>
+              <a:t>3/4/2026</a:t>
             </a:fld>
             <a:endParaRPr lang="en-US"/>
           </a:p>
@@ -3454,7 +3454,7 @@
               <a:pPr>
                 <a:defRPr/>
               </a:pPr>
-              <a:t>2/18/2026</a:t>
+              <a:t>3/4/2026</a:t>
             </a:fld>
             <a:endParaRPr lang="en-US"/>
           </a:p>
@@ -3739,7 +3739,7 @@
               <a:pPr>
                 <a:defRPr/>
               </a:pPr>
-              <a:t>2/18/2026</a:t>
+              <a:t>3/4/2026</a:t>
             </a:fld>
             <a:endParaRPr lang="en-US"/>
           </a:p>
@@ -5908,6 +5908,13 @@
   <p:clrMapOvr>
     <a:masterClrMapping/>
   </p:clrMapOvr>
+  <p:timing>
+    <p:tnLst>
+      <p:par>
+        <p:cTn id="1" dur="indefinite" restart="never" nodeType="tmRoot"/>
+      </p:par>
+    </p:tnLst>
+  </p:timing>
 </p:sld>
 </file>
 
@@ -6179,9 +6186,27 @@
                 <a:tableStyleId>{5C22544A-7EE6-4342-B048-85BDC9FD1C3A}</a:tableStyleId>
               </a:tblPr>
               <a:tblGrid>
-                <a:gridCol w="639500"/>
-                <a:gridCol w="5409173"/>
-                <a:gridCol w="4897760"/>
+                <a:gridCol w="639500">
+                  <a:extLst>
+                    <a:ext uri="{9D8B030D-6E8A-4147-A177-3AD203B41FA5}">
+                      <a16:colId xmlns:a16="http://schemas.microsoft.com/office/drawing/2014/main" val="20000"/>
+                    </a:ext>
+                  </a:extLst>
+                </a:gridCol>
+                <a:gridCol w="5409173">
+                  <a:extLst>
+                    <a:ext uri="{9D8B030D-6E8A-4147-A177-3AD203B41FA5}">
+                      <a16:colId xmlns:a16="http://schemas.microsoft.com/office/drawing/2014/main" val="20001"/>
+                    </a:ext>
+                  </a:extLst>
+                </a:gridCol>
+                <a:gridCol w="4897760">
+                  <a:extLst>
+                    <a:ext uri="{9D8B030D-6E8A-4147-A177-3AD203B41FA5}">
+                      <a16:colId xmlns:a16="http://schemas.microsoft.com/office/drawing/2014/main" val="20002"/>
+                    </a:ext>
+                  </a:extLst>
+                </a:gridCol>
               </a:tblGrid>
               <a:tr h="480246">
                 <a:tc>
@@ -6244,6 +6269,11 @@
                   </a:txBody>
                   <a:tcPr marL="114300" marR="114300" marT="114300" marB="114300" anchor="ctr"/>
                 </a:tc>
+                <a:extLst>
+                  <a:ext uri="{0D108BD9-81ED-4DB2-BD59-A6C34878D82A}">
+                    <a16:rowId xmlns:a16="http://schemas.microsoft.com/office/drawing/2014/main" val="10000"/>
+                  </a:ext>
+                </a:extLst>
               </a:tr>
               <a:tr h="459301">
                 <a:tc>
@@ -6306,6 +6336,11 @@
                   </a:txBody>
                   <a:tcPr marL="76200" marR="76200" marT="76200" marB="76200" anchor="ctr"/>
                 </a:tc>
+                <a:extLst>
+                  <a:ext uri="{0D108BD9-81ED-4DB2-BD59-A6C34878D82A}">
+                    <a16:rowId xmlns:a16="http://schemas.microsoft.com/office/drawing/2014/main" val="10001"/>
+                  </a:ext>
+                </a:extLst>
               </a:tr>
               <a:tr h="669433">
                 <a:tc>
@@ -6368,6 +6403,11 @@
                   </a:txBody>
                   <a:tcPr marL="76200" marR="76200" marT="76200" marB="76200" anchor="ctr"/>
                 </a:tc>
+                <a:extLst>
+                  <a:ext uri="{0D108BD9-81ED-4DB2-BD59-A6C34878D82A}">
+                    <a16:rowId xmlns:a16="http://schemas.microsoft.com/office/drawing/2014/main" val="10002"/>
+                  </a:ext>
+                </a:extLst>
               </a:tr>
               <a:tr h="669433">
                 <a:tc>
@@ -6430,6 +6470,11 @@
                   </a:txBody>
                   <a:tcPr marL="76200" marR="76200" marT="76200" marB="76200" anchor="ctr"/>
                 </a:tc>
+                <a:extLst>
+                  <a:ext uri="{0D108BD9-81ED-4DB2-BD59-A6C34878D82A}">
+                    <a16:rowId xmlns:a16="http://schemas.microsoft.com/office/drawing/2014/main" val="10003"/>
+                  </a:ext>
+                </a:extLst>
               </a:tr>
               <a:tr h="931385">
                 <a:tc>
@@ -6492,6 +6537,11 @@
                   </a:txBody>
                   <a:tcPr marL="76200" marR="76200" marT="76200" marB="76200" anchor="ctr"/>
                 </a:tc>
+                <a:extLst>
+                  <a:ext uri="{0D108BD9-81ED-4DB2-BD59-A6C34878D82A}">
+                    <a16:rowId xmlns:a16="http://schemas.microsoft.com/office/drawing/2014/main" val="10004"/>
+                  </a:ext>
+                </a:extLst>
               </a:tr>
               <a:tr h="931385">
                 <a:tc>
@@ -6554,6 +6604,11 @@
                   </a:txBody>
                   <a:tcPr marL="76200" marR="76200" marT="76200" marB="76200" anchor="ctr"/>
                 </a:tc>
+                <a:extLst>
+                  <a:ext uri="{0D108BD9-81ED-4DB2-BD59-A6C34878D82A}">
+                    <a16:rowId xmlns:a16="http://schemas.microsoft.com/office/drawing/2014/main" val="10005"/>
+                  </a:ext>
+                </a:extLst>
               </a:tr>
               <a:tr h="931385">
                 <a:tc>
@@ -6616,6 +6671,11 @@
                   </a:txBody>
                   <a:tcPr marL="76200" marR="76200" marT="76200" marB="76200" anchor="ctr"/>
                 </a:tc>
+                <a:extLst>
+                  <a:ext uri="{0D108BD9-81ED-4DB2-BD59-A6C34878D82A}">
+                    <a16:rowId xmlns:a16="http://schemas.microsoft.com/office/drawing/2014/main" val="10006"/>
+                  </a:ext>
+                </a:extLst>
               </a:tr>
             </a:tbl>
           </a:graphicData>
@@ -6764,9 +6824,27 @@
                 <a:tableStyleId>{5C22544A-7EE6-4342-B048-85BDC9FD1C3A}</a:tableStyleId>
               </a:tblPr>
               <a:tblGrid>
-                <a:gridCol w="639429"/>
-                <a:gridCol w="4905187"/>
-                <a:gridCol w="5400600"/>
+                <a:gridCol w="639429">
+                  <a:extLst>
+                    <a:ext uri="{9D8B030D-6E8A-4147-A177-3AD203B41FA5}">
+                      <a16:colId xmlns:a16="http://schemas.microsoft.com/office/drawing/2014/main" val="20000"/>
+                    </a:ext>
+                  </a:extLst>
+                </a:gridCol>
+                <a:gridCol w="4905187">
+                  <a:extLst>
+                    <a:ext uri="{9D8B030D-6E8A-4147-A177-3AD203B41FA5}">
+                      <a16:colId xmlns:a16="http://schemas.microsoft.com/office/drawing/2014/main" val="20001"/>
+                    </a:ext>
+                  </a:extLst>
+                </a:gridCol>
+                <a:gridCol w="5400600">
+                  <a:extLst>
+                    <a:ext uri="{9D8B030D-6E8A-4147-A177-3AD203B41FA5}">
+                      <a16:colId xmlns:a16="http://schemas.microsoft.com/office/drawing/2014/main" val="20002"/>
+                    </a:ext>
+                  </a:extLst>
+                </a:gridCol>
               </a:tblGrid>
               <a:tr h="502994">
                 <a:tc>
@@ -6829,6 +6907,11 @@
                   </a:txBody>
                   <a:tcPr marL="114300" marR="114300" marT="114300" marB="114300" anchor="ctr"/>
                 </a:tc>
+                <a:extLst>
+                  <a:ext uri="{0D108BD9-81ED-4DB2-BD59-A6C34878D82A}">
+                    <a16:rowId xmlns:a16="http://schemas.microsoft.com/office/drawing/2014/main" val="10000"/>
+                  </a:ext>
+                </a:extLst>
               </a:tr>
               <a:tr h="701142">
                 <a:tc>
@@ -6891,6 +6974,11 @@
                   </a:txBody>
                   <a:tcPr marL="76200" marR="76200" marT="76200" marB="76200" anchor="ctr"/>
                 </a:tc>
+                <a:extLst>
+                  <a:ext uri="{0D108BD9-81ED-4DB2-BD59-A6C34878D82A}">
+                    <a16:rowId xmlns:a16="http://schemas.microsoft.com/office/drawing/2014/main" val="10001"/>
+                  </a:ext>
+                </a:extLst>
               </a:tr>
               <a:tr h="701142">
                 <a:tc>
@@ -6953,6 +7041,11 @@
                   </a:txBody>
                   <a:tcPr marL="76200" marR="76200" marT="76200" marB="76200" anchor="ctr"/>
                 </a:tc>
+                <a:extLst>
+                  <a:ext uri="{0D108BD9-81ED-4DB2-BD59-A6C34878D82A}">
+                    <a16:rowId xmlns:a16="http://schemas.microsoft.com/office/drawing/2014/main" val="10002"/>
+                  </a:ext>
+                </a:extLst>
               </a:tr>
               <a:tr h="426782">
                 <a:tc>
@@ -7015,6 +7108,11 @@
                   </a:txBody>
                   <a:tcPr marL="76200" marR="76200" marT="76200" marB="76200" anchor="ctr"/>
                 </a:tc>
+                <a:extLst>
+                  <a:ext uri="{0D108BD9-81ED-4DB2-BD59-A6C34878D82A}">
+                    <a16:rowId xmlns:a16="http://schemas.microsoft.com/office/drawing/2014/main" val="10003"/>
+                  </a:ext>
+                </a:extLst>
               </a:tr>
               <a:tr h="701142">
                 <a:tc>
@@ -7077,6 +7175,11 @@
                   </a:txBody>
                   <a:tcPr marL="76200" marR="76200" marT="76200" marB="76200" anchor="ctr"/>
                 </a:tc>
+                <a:extLst>
+                  <a:ext uri="{0D108BD9-81ED-4DB2-BD59-A6C34878D82A}">
+                    <a16:rowId xmlns:a16="http://schemas.microsoft.com/office/drawing/2014/main" val="10004"/>
+                  </a:ext>
+                </a:extLst>
               </a:tr>
               <a:tr h="426782">
                 <a:tc>
@@ -7139,6 +7242,11 @@
                   </a:txBody>
                   <a:tcPr marL="76200" marR="76200" marT="76200" marB="76200" anchor="ctr"/>
                 </a:tc>
+                <a:extLst>
+                  <a:ext uri="{0D108BD9-81ED-4DB2-BD59-A6C34878D82A}">
+                    <a16:rowId xmlns:a16="http://schemas.microsoft.com/office/drawing/2014/main" val="10005"/>
+                  </a:ext>
+                </a:extLst>
               </a:tr>
               <a:tr h="426782">
                 <a:tc>
@@ -7201,6 +7309,11 @@
                   </a:txBody>
                   <a:tcPr marL="76200" marR="76200" marT="76200" marB="76200" anchor="ctr"/>
                 </a:tc>
+                <a:extLst>
+                  <a:ext uri="{0D108BD9-81ED-4DB2-BD59-A6C34878D82A}">
+                    <a16:rowId xmlns:a16="http://schemas.microsoft.com/office/drawing/2014/main" val="10006"/>
+                  </a:ext>
+                </a:extLst>
               </a:tr>
               <a:tr h="975503">
                 <a:tc>
@@ -7263,6 +7376,11 @@
                   </a:txBody>
                   <a:tcPr marL="76200" marR="76200" marT="76200" marB="76200" anchor="ctr"/>
                 </a:tc>
+                <a:extLst>
+                  <a:ext uri="{0D108BD9-81ED-4DB2-BD59-A6C34878D82A}">
+                    <a16:rowId xmlns:a16="http://schemas.microsoft.com/office/drawing/2014/main" val="10007"/>
+                  </a:ext>
+                </a:extLst>
               </a:tr>
               <a:tr h="426782">
                 <a:tc>
@@ -7325,6 +7443,11 @@
                   </a:txBody>
                   <a:tcPr marL="76200" marR="76200" marT="76200" marB="76200" anchor="ctr"/>
                 </a:tc>
+                <a:extLst>
+                  <a:ext uri="{0D108BD9-81ED-4DB2-BD59-A6C34878D82A}">
+                    <a16:rowId xmlns:a16="http://schemas.microsoft.com/office/drawing/2014/main" val="10008"/>
+                  </a:ext>
+                </a:extLst>
               </a:tr>
             </a:tbl>
           </a:graphicData>
@@ -7799,9 +7922,27 @@
                 <a:tableStyleId>{5C22544A-7EE6-4342-B048-85BDC9FD1C3A}</a:tableStyleId>
               </a:tblPr>
               <a:tblGrid>
-                <a:gridCol w="912119"/>
-                <a:gridCol w="3648479"/>
-                <a:gridCol w="5817223"/>
+                <a:gridCol w="912119">
+                  <a:extLst>
+                    <a:ext uri="{9D8B030D-6E8A-4147-A177-3AD203B41FA5}">
+                      <a16:colId xmlns:a16="http://schemas.microsoft.com/office/drawing/2014/main" val="20000"/>
+                    </a:ext>
+                  </a:extLst>
+                </a:gridCol>
+                <a:gridCol w="3648479">
+                  <a:extLst>
+                    <a:ext uri="{9D8B030D-6E8A-4147-A177-3AD203B41FA5}">
+                      <a16:colId xmlns:a16="http://schemas.microsoft.com/office/drawing/2014/main" val="20001"/>
+                    </a:ext>
+                  </a:extLst>
+                </a:gridCol>
+                <a:gridCol w="5817223">
+                  <a:extLst>
+                    <a:ext uri="{9D8B030D-6E8A-4147-A177-3AD203B41FA5}">
+                      <a16:colId xmlns:a16="http://schemas.microsoft.com/office/drawing/2014/main" val="20002"/>
+                    </a:ext>
+                  </a:extLst>
+                </a:gridCol>
               </a:tblGrid>
               <a:tr h="549851">
                 <a:tc>
@@ -7864,6 +8005,11 @@
                   </a:txBody>
                   <a:tcPr marL="114300" marR="114300" marT="114300" marB="114300" anchor="ctr"/>
                 </a:tc>
+                <a:extLst>
+                  <a:ext uri="{0D108BD9-81ED-4DB2-BD59-A6C34878D82A}">
+                    <a16:rowId xmlns:a16="http://schemas.microsoft.com/office/drawing/2014/main" val="10000"/>
+                  </a:ext>
+                </a:extLst>
               </a:tr>
               <a:tr h="868305">
                 <a:tc>
@@ -7946,6 +8092,11 @@
                   </a:txBody>
                   <a:tcPr marL="76200" marR="76200" marT="76200" marB="76200" anchor="ctr"/>
                 </a:tc>
+                <a:extLst>
+                  <a:ext uri="{0D108BD9-81ED-4DB2-BD59-A6C34878D82A}">
+                    <a16:rowId xmlns:a16="http://schemas.microsoft.com/office/drawing/2014/main" val="10001"/>
+                  </a:ext>
+                </a:extLst>
               </a:tr>
               <a:tr h="868305">
                 <a:tc>
@@ -8008,6 +8159,11 @@
                   </a:txBody>
                   <a:tcPr marL="76200" marR="76200" marT="76200" marB="76200" anchor="ctr"/>
                 </a:tc>
+                <a:extLst>
+                  <a:ext uri="{0D108BD9-81ED-4DB2-BD59-A6C34878D82A}">
+                    <a16:rowId xmlns:a16="http://schemas.microsoft.com/office/drawing/2014/main" val="10002"/>
+                  </a:ext>
+                </a:extLst>
               </a:tr>
               <a:tr h="868305">
                 <a:tc>
@@ -8107,6 +8263,11 @@
                   </a:txBody>
                   <a:tcPr marL="76200" marR="76200" marT="76200" marB="76200" anchor="ctr"/>
                 </a:tc>
+                <a:extLst>
+                  <a:ext uri="{0D108BD9-81ED-4DB2-BD59-A6C34878D82A}">
+                    <a16:rowId xmlns:a16="http://schemas.microsoft.com/office/drawing/2014/main" val="10003"/>
+                  </a:ext>
+                </a:extLst>
               </a:tr>
             </a:tbl>
           </a:graphicData>
@@ -8821,6 +8982,13 @@
   <p:clrMapOvr>
     <a:masterClrMapping/>
   </p:clrMapOvr>
+  <p:timing>
+    <p:tnLst>
+      <p:par>
+        <p:cTn id="1" dur="indefinite" restart="never" nodeType="tmRoot"/>
+      </p:par>
+    </p:tnLst>
+  </p:timing>
 </p:sld>
 </file>
 
@@ -11592,7 +11760,7 @@
         <p:spPr>
           <a:xfrm>
             <a:off x="5622268" y="248915"/>
-            <a:ext cx="5976664" cy="5909310"/>
+            <a:ext cx="5976664" cy="6186309"/>
           </a:xfrm>
           <a:prstGeom prst="rect">
             <a:avLst/>
@@ -11848,6 +12016,10 @@
               </a:rPr>
               <a:t>  //creating arraylist  </a:t>
             </a:r>
+            <a:endParaRPr lang="en-US" dirty="0" smtClean="0">
+              <a:latin typeface="Cambria" panose="02040503050406030204" pitchFamily="18" charset="0"/>
+              <a:ea typeface="Cambria" panose="02040503050406030204" pitchFamily="18" charset="0"/>
+            </a:endParaRPr>
           </a:p>
           <a:p>
             <a:pPr>
@@ -11857,25 +12029,87 @@
               <a:buNone/>
             </a:pPr>
             <a:r>
+              <a:rPr lang="en-US" dirty="0" smtClean="0">
+                <a:latin typeface="Cambria" panose="02040503050406030204" pitchFamily="18" charset="0"/>
+                <a:ea typeface="Cambria" panose="02040503050406030204" pitchFamily="18" charset="0"/>
+              </a:rPr>
+              <a:t>List&lt;Student&gt; l=new </a:t>
+            </a:r>
+            <a:r>
+              <a:rPr lang="en-US" dirty="0" err="1" smtClean="0">
+                <a:latin typeface="Cambria" panose="02040503050406030204" pitchFamily="18" charset="0"/>
+                <a:ea typeface="Cambria" panose="02040503050406030204" pitchFamily="18" charset="0"/>
+              </a:rPr>
+              <a:t>ArrayList</a:t>
+            </a:r>
+            <a:r>
+              <a:rPr lang="en-US" dirty="0" smtClean="0">
+                <a:latin typeface="Cambria" panose="02040503050406030204" pitchFamily="18" charset="0"/>
+                <a:ea typeface="Cambria" panose="02040503050406030204" pitchFamily="18" charset="0"/>
+              </a:rPr>
+              <a:t>&lt;Student&gt;(); or</a:t>
+            </a:r>
+            <a:endParaRPr lang="en-US" dirty="0">
+              <a:latin typeface="Cambria" panose="02040503050406030204" pitchFamily="18" charset="0"/>
+              <a:ea typeface="Cambria" panose="02040503050406030204" pitchFamily="18" charset="0"/>
+            </a:endParaRPr>
+          </a:p>
+          <a:p>
+            <a:pPr>
+              <a:spcBef>
+                <a:spcPts val="0"/>
+              </a:spcBef>
+              <a:buNone/>
+            </a:pPr>
+            <a:r>
               <a:rPr lang="en-US" dirty="0">
                 <a:latin typeface="Cambria" panose="02040503050406030204" pitchFamily="18" charset="0"/>
                 <a:ea typeface="Cambria" panose="02040503050406030204" pitchFamily="18" charset="0"/>
               </a:rPr>
-              <a:t>  ArrayList&lt;Student&gt; al=</a:t>
-            </a:r>
-            <a:r>
-              <a:rPr lang="en-US" b="1" dirty="0">
-                <a:latin typeface="Cambria" panose="02040503050406030204" pitchFamily="18" charset="0"/>
-                <a:ea typeface="Cambria" panose="02040503050406030204" pitchFamily="18" charset="0"/>
-              </a:rPr>
-              <a:t>new</a:t>
-            </a:r>
+              <a:t>   </a:t>
+            </a:r>
+          </a:p>
+          <a:p>
+            <a:pPr>
+              <a:spcBef>
+                <a:spcPts val="0"/>
+              </a:spcBef>
+              <a:buNone/>
+            </a:pPr>
             <a:r>
               <a:rPr lang="en-US" dirty="0">
                 <a:latin typeface="Cambria" panose="02040503050406030204" pitchFamily="18" charset="0"/>
                 <a:ea typeface="Cambria" panose="02040503050406030204" pitchFamily="18" charset="0"/>
               </a:rPr>
-              <a:t> ArrayList&lt;Student&gt;();  </a:t>
+              <a:t>  </a:t>
+            </a:r>
+            <a:r>
+              <a:rPr lang="en-US" dirty="0" err="1">
+                <a:latin typeface="Cambria" panose="02040503050406030204" pitchFamily="18" charset="0"/>
+                <a:ea typeface="Cambria" panose="02040503050406030204" pitchFamily="18" charset="0"/>
+              </a:rPr>
+              <a:t>l</a:t>
+            </a:r>
+            <a:r>
+              <a:rPr lang="en-US" dirty="0" err="1" smtClean="0">
+                <a:latin typeface="Cambria" panose="02040503050406030204" pitchFamily="18" charset="0"/>
+                <a:ea typeface="Cambria" panose="02040503050406030204" pitchFamily="18" charset="0"/>
+              </a:rPr>
+              <a:t>.add</a:t>
+            </a:r>
+            <a:r>
+              <a:rPr lang="en-US" dirty="0" smtClean="0">
+                <a:latin typeface="Cambria" panose="02040503050406030204" pitchFamily="18" charset="0"/>
+                <a:ea typeface="Cambria" panose="02040503050406030204" pitchFamily="18" charset="0"/>
+              </a:rPr>
+              <a:t>(s1</a:t>
+            </a:r>
+            <a:r>
+              <a:rPr lang="en-US" dirty="0">
+                <a:latin typeface="Cambria" panose="02040503050406030204" pitchFamily="18" charset="0"/>
+                <a:ea typeface="Cambria" panose="02040503050406030204" pitchFamily="18" charset="0"/>
+              </a:rPr>
+              <a:t>);//adding Student class object  </a:t>
             </a:r>
           </a:p>
           <a:p>
@@ -11890,7 +12124,35 @@
                 <a:latin typeface="Cambria" panose="02040503050406030204" pitchFamily="18" charset="0"/>
                 <a:ea typeface="Cambria" panose="02040503050406030204" pitchFamily="18" charset="0"/>
               </a:rPr>
-              <a:t>  al.add(s1);//adding Student class object  </a:t>
+              <a:t>  </a:t>
+            </a:r>
+            <a:r>
+              <a:rPr lang="en-US" dirty="0" err="1">
+                <a:latin typeface="Cambria" panose="02040503050406030204" pitchFamily="18" charset="0"/>
+                <a:ea typeface="Cambria" panose="02040503050406030204" pitchFamily="18" charset="0"/>
+              </a:rPr>
+              <a:t>l</a:t>
+            </a:r>
+            <a:r>
+              <a:rPr lang="en-US" dirty="0" err="1" smtClean="0">
+                <a:latin typeface="Cambria" panose="02040503050406030204" pitchFamily="18" charset="0"/>
+                <a:ea typeface="Cambria" panose="02040503050406030204" pitchFamily="18" charset="0"/>
+              </a:rPr>
+              <a:t>.add</a:t>
+            </a:r>
+            <a:r>
+              <a:rPr lang="en-US" dirty="0" smtClean="0">
+                <a:latin typeface="Cambria" panose="02040503050406030204" pitchFamily="18" charset="0"/>
+                <a:ea typeface="Cambria" panose="02040503050406030204" pitchFamily="18" charset="0"/>
+              </a:rPr>
+              <a:t>(s2</a:t>
+            </a:r>
+            <a:r>
+              <a:rPr lang="en-US" dirty="0">
+                <a:latin typeface="Cambria" panose="02040503050406030204" pitchFamily="18" charset="0"/>
+                <a:ea typeface="Cambria" panose="02040503050406030204" pitchFamily="18" charset="0"/>
+              </a:rPr>
+              <a:t>);  </a:t>
             </a:r>
           </a:p>
           <a:p>
@@ -11905,7 +12167,35 @@
                 <a:latin typeface="Cambria" panose="02040503050406030204" pitchFamily="18" charset="0"/>
                 <a:ea typeface="Cambria" panose="02040503050406030204" pitchFamily="18" charset="0"/>
               </a:rPr>
-              <a:t>  al.add(s2);  </a:t>
+              <a:t>  </a:t>
+            </a:r>
+            <a:r>
+              <a:rPr lang="en-US" dirty="0" err="1">
+                <a:latin typeface="Cambria" panose="02040503050406030204" pitchFamily="18" charset="0"/>
+                <a:ea typeface="Cambria" panose="02040503050406030204" pitchFamily="18" charset="0"/>
+              </a:rPr>
+              <a:t>l</a:t>
+            </a:r>
+            <a:r>
+              <a:rPr lang="en-US" dirty="0" err="1" smtClean="0">
+                <a:latin typeface="Cambria" panose="02040503050406030204" pitchFamily="18" charset="0"/>
+                <a:ea typeface="Cambria" panose="02040503050406030204" pitchFamily="18" charset="0"/>
+              </a:rPr>
+              <a:t>.add</a:t>
+            </a:r>
+            <a:r>
+              <a:rPr lang="en-US" dirty="0" smtClean="0">
+                <a:latin typeface="Cambria" panose="02040503050406030204" pitchFamily="18" charset="0"/>
+                <a:ea typeface="Cambria" panose="02040503050406030204" pitchFamily="18" charset="0"/>
+              </a:rPr>
+              <a:t>(s3</a:t>
+            </a:r>
+            <a:r>
+              <a:rPr lang="en-US" dirty="0">
+                <a:latin typeface="Cambria" panose="02040503050406030204" pitchFamily="18" charset="0"/>
+                <a:ea typeface="Cambria" panose="02040503050406030204" pitchFamily="18" charset="0"/>
+              </a:rPr>
+              <a:t>);  </a:t>
             </a:r>
           </a:p>
           <a:p>
@@ -11920,7 +12210,7 @@
                 <a:latin typeface="Cambria" panose="02040503050406030204" pitchFamily="18" charset="0"/>
                 <a:ea typeface="Cambria" panose="02040503050406030204" pitchFamily="18" charset="0"/>
               </a:rPr>
-              <a:t>  al.add(s3);  </a:t>
+              <a:t>  //Getting Iterator  </a:t>
             </a:r>
           </a:p>
           <a:p>
@@ -11935,22 +12225,49 @@
                 <a:latin typeface="Cambria" panose="02040503050406030204" pitchFamily="18" charset="0"/>
                 <a:ea typeface="Cambria" panose="02040503050406030204" pitchFamily="18" charset="0"/>
               </a:rPr>
-              <a:t>  //Getting Iterator  </a:t>
-            </a:r>
-          </a:p>
-          <a:p>
-            <a:pPr>
-              <a:spcBef>
-                <a:spcPts val="0"/>
-              </a:spcBef>
-              <a:buNone/>
-            </a:pPr>
+              <a:t>  </a:t>
+            </a:r>
+            <a:r>
+              <a:rPr lang="en-US" dirty="0" err="1" smtClean="0">
+                <a:latin typeface="Cambria" panose="02040503050406030204" pitchFamily="18" charset="0"/>
+                <a:ea typeface="Cambria" panose="02040503050406030204" pitchFamily="18" charset="0"/>
+              </a:rPr>
+              <a:t>ListIterator</a:t>
+            </a:r>
             <a:r>
               <a:rPr lang="en-US" dirty="0">
                 <a:latin typeface="Cambria" panose="02040503050406030204" pitchFamily="18" charset="0"/>
                 <a:ea typeface="Cambria" panose="02040503050406030204" pitchFamily="18" charset="0"/>
               </a:rPr>
-              <a:t>  Iterator itr=al.iterator();  </a:t>
+              <a:t> </a:t>
+            </a:r>
+            <a:r>
+              <a:rPr lang="en-US" dirty="0" err="1" smtClean="0">
+                <a:latin typeface="Cambria" panose="02040503050406030204" pitchFamily="18" charset="0"/>
+                <a:ea typeface="Cambria" panose="02040503050406030204" pitchFamily="18" charset="0"/>
+              </a:rPr>
+              <a:t>itr</a:t>
+            </a:r>
+            <a:r>
+              <a:rPr lang="en-US" dirty="0" smtClean="0">
+                <a:latin typeface="Cambria" panose="02040503050406030204" pitchFamily="18" charset="0"/>
+                <a:ea typeface="Cambria" panose="02040503050406030204" pitchFamily="18" charset="0"/>
+              </a:rPr>
+              <a:t>=</a:t>
+            </a:r>
+            <a:r>
+              <a:rPr lang="en-US" dirty="0" err="1" smtClean="0">
+                <a:latin typeface="Cambria" panose="02040503050406030204" pitchFamily="18" charset="0"/>
+                <a:ea typeface="Cambria" panose="02040503050406030204" pitchFamily="18" charset="0"/>
+              </a:rPr>
+              <a:t>l.listIterator</a:t>
+            </a:r>
+            <a:r>
+              <a:rPr lang="en-US" dirty="0">
+                <a:latin typeface="Cambria" panose="02040503050406030204" pitchFamily="18" charset="0"/>
+                <a:ea typeface="Cambria" panose="02040503050406030204" pitchFamily="18" charset="0"/>
+              </a:rPr>
+              <a:t>();  </a:t>
             </a:r>
           </a:p>
           <a:p>
@@ -12306,6 +12623,13 @@
   <p:clrMapOvr>
     <a:masterClrMapping/>
   </p:clrMapOvr>
+  <p:timing>
+    <p:tnLst>
+      <p:par>
+        <p:cTn id="1" dur="indefinite" restart="never" nodeType="tmRoot"/>
+      </p:par>
+    </p:tnLst>
+  </p:timing>
 </p:sld>
 </file>
 
@@ -12392,8 +12716,20 @@
                 <a:tableStyleId>{5C22544A-7EE6-4342-B048-85BDC9FD1C3A}</a:tableStyleId>
               </a:tblPr>
               <a:tblGrid>
-                <a:gridCol w="5200668"/>
-                <a:gridCol w="5200668"/>
+                <a:gridCol w="5200668">
+                  <a:extLst>
+                    <a:ext uri="{9D8B030D-6E8A-4147-A177-3AD203B41FA5}">
+                      <a16:colId xmlns:a16="http://schemas.microsoft.com/office/drawing/2014/main" val="20000"/>
+                    </a:ext>
+                  </a:extLst>
+                </a:gridCol>
+                <a:gridCol w="5200668">
+                  <a:extLst>
+                    <a:ext uri="{9D8B030D-6E8A-4147-A177-3AD203B41FA5}">
+                      <a16:colId xmlns:a16="http://schemas.microsoft.com/office/drawing/2014/main" val="20001"/>
+                    </a:ext>
+                  </a:extLst>
+                </a:gridCol>
               </a:tblGrid>
               <a:tr h="594031">
                 <a:tc>
@@ -12443,6 +12779,11 @@
                   </a:txBody>
                   <a:tcPr marL="114300" marR="114300" marT="114300" marB="114300"/>
                 </a:tc>
+                <a:extLst>
+                  <a:ext uri="{0D108BD9-81ED-4DB2-BD59-A6C34878D82A}">
+                    <a16:rowId xmlns:a16="http://schemas.microsoft.com/office/drawing/2014/main" val="10000"/>
+                  </a:ext>
+                </a:extLst>
               </a:tr>
               <a:tr h="504026">
                 <a:tc>
@@ -12525,6 +12866,11 @@
                   </a:txBody>
                   <a:tcPr marL="76200" marR="76200" marT="76200" marB="76200"/>
                 </a:tc>
+                <a:extLst>
+                  <a:ext uri="{0D108BD9-81ED-4DB2-BD59-A6C34878D82A}">
+                    <a16:rowId xmlns:a16="http://schemas.microsoft.com/office/drawing/2014/main" val="10001"/>
+                  </a:ext>
+                </a:extLst>
               </a:tr>
               <a:tr h="828043">
                 <a:tc>
@@ -12627,6 +12973,11 @@
                   </a:txBody>
                   <a:tcPr marL="76200" marR="76200" marT="76200" marB="76200"/>
                 </a:tc>
+                <a:extLst>
+                  <a:ext uri="{0D108BD9-81ED-4DB2-BD59-A6C34878D82A}">
+                    <a16:rowId xmlns:a16="http://schemas.microsoft.com/office/drawing/2014/main" val="10002"/>
+                  </a:ext>
+                </a:extLst>
               </a:tr>
               <a:tr h="1476076">
                 <a:tc>
@@ -12729,6 +13080,11 @@
                   </a:txBody>
                   <a:tcPr marL="76200" marR="76200" marT="76200" marB="76200"/>
                 </a:tc>
+                <a:extLst>
+                  <a:ext uri="{0D108BD9-81ED-4DB2-BD59-A6C34878D82A}">
+                    <a16:rowId xmlns:a16="http://schemas.microsoft.com/office/drawing/2014/main" val="10003"/>
+                  </a:ext>
+                </a:extLst>
               </a:tr>
               <a:tr h="828043">
                 <a:tc>
@@ -12831,6 +13187,11 @@
                   </a:txBody>
                   <a:tcPr marL="76200" marR="76200" marT="76200" marB="76200"/>
                 </a:tc>
+                <a:extLst>
+                  <a:ext uri="{0D108BD9-81ED-4DB2-BD59-A6C34878D82A}">
+                    <a16:rowId xmlns:a16="http://schemas.microsoft.com/office/drawing/2014/main" val="10004"/>
+                  </a:ext>
+                </a:extLst>
               </a:tr>
             </a:tbl>
           </a:graphicData>
@@ -12881,6 +13242,13 @@
   <p:clrMapOvr>
     <a:masterClrMapping/>
   </p:clrMapOvr>
+  <p:timing>
+    <p:tnLst>
+      <p:par>
+        <p:cTn id="1" dur="indefinite" restart="never" nodeType="tmRoot"/>
+      </p:par>
+    </p:tnLst>
+  </p:timing>
 </p:sld>
 </file>
 
@@ -13149,6 +13517,13 @@
   <p:clrMapOvr>
     <a:masterClrMapping/>
   </p:clrMapOvr>
+  <p:timing>
+    <p:tnLst>
+      <p:par>
+        <p:cTn id="1" dur="indefinite" restart="never" nodeType="tmRoot"/>
+      </p:par>
+    </p:tnLst>
+  </p:timing>
 </p:sld>
 </file>
 
@@ -13502,6 +13877,13 @@
   <p:clrMapOvr>
     <a:masterClrMapping/>
   </p:clrMapOvr>
+  <p:timing>
+    <p:tnLst>
+      <p:par>
+        <p:cTn id="1" dur="indefinite" restart="never" nodeType="tmRoot"/>
+      </p:par>
+    </p:tnLst>
+  </p:timing>
 </p:sld>
 </file>
 
@@ -13688,6 +14070,13 @@
   <p:clrMapOvr>
     <a:masterClrMapping/>
   </p:clrMapOvr>
+  <p:timing>
+    <p:tnLst>
+      <p:par>
+        <p:cTn id="1" dur="indefinite" restart="never" nodeType="tmRoot"/>
+      </p:par>
+    </p:tnLst>
+  </p:timing>
 </p:sld>
 </file>
 
@@ -14453,6 +14842,13 @@
   <p:clrMapOvr>
     <a:masterClrMapping/>
   </p:clrMapOvr>
+  <p:timing>
+    <p:tnLst>
+      <p:par>
+        <p:cTn id="1" dur="indefinite" restart="never" nodeType="tmRoot"/>
+      </p:par>
+    </p:tnLst>
+  </p:timing>
 </p:sld>
 </file>
 
@@ -15085,6 +15481,13 @@
   <p:clrMapOvr>
     <a:masterClrMapping/>
   </p:clrMapOvr>
+  <p:timing>
+    <p:tnLst>
+      <p:par>
+        <p:cTn id="1" dur="indefinite" restart="never" nodeType="tmRoot"/>
+      </p:par>
+    </p:tnLst>
+  </p:timing>
 </p:sld>
 </file>
 
@@ -17450,6 +17853,13 @@
   <p:clrMapOvr>
     <a:masterClrMapping/>
   </p:clrMapOvr>
+  <p:timing>
+    <p:tnLst>
+      <p:par>
+        <p:cTn id="1" dur="indefinite" restart="never" nodeType="tmRoot"/>
+      </p:par>
+    </p:tnLst>
+  </p:timing>
 </p:sld>
 </file>
 
@@ -18044,6 +18454,13 @@
   <p:clrMapOvr>
     <a:masterClrMapping/>
   </p:clrMapOvr>
+  <p:timing>
+    <p:tnLst>
+      <p:par>
+        <p:cTn id="1" dur="indefinite" restart="never" nodeType="tmRoot"/>
+      </p:par>
+    </p:tnLst>
+  </p:timing>
 </p:sld>
 </file>
 
@@ -18339,6 +18756,13 @@
   <p:clrMapOvr>
     <a:masterClrMapping/>
   </p:clrMapOvr>
+  <p:timing>
+    <p:tnLst>
+      <p:par>
+        <p:cTn id="1" dur="indefinite" restart="never" nodeType="tmRoot"/>
+      </p:par>
+    </p:tnLst>
+  </p:timing>
 </p:sld>
 </file>
 
@@ -18709,6 +19133,13 @@
   <p:clrMapOvr>
     <a:masterClrMapping/>
   </p:clrMapOvr>
+  <p:timing>
+    <p:tnLst>
+      <p:par>
+        <p:cTn id="1" dur="indefinite" restart="never" nodeType="tmRoot"/>
+      </p:par>
+    </p:tnLst>
+  </p:timing>
 </p:sld>
 </file>
 
@@ -19342,6 +19773,13 @@
   <p:clrMapOvr>
     <a:masterClrMapping/>
   </p:clrMapOvr>
+  <p:timing>
+    <p:tnLst>
+      <p:par>
+        <p:cTn id="1" dur="indefinite" restart="never" nodeType="tmRoot"/>
+      </p:par>
+    </p:tnLst>
+  </p:timing>
 </p:sld>
 </file>
 
@@ -19810,6 +20248,13 @@
   <p:clrMapOvr>
     <a:masterClrMapping/>
   </p:clrMapOvr>
+  <p:timing>
+    <p:tnLst>
+      <p:par>
+        <p:cTn id="1" dur="indefinite" restart="never" nodeType="tmRoot"/>
+      </p:par>
+    </p:tnLst>
+  </p:timing>
 </p:sld>
 </file>
 
@@ -20603,6 +21048,13 @@
   <p:clrMapOvr>
     <a:masterClrMapping/>
   </p:clrMapOvr>
+  <p:timing>
+    <p:tnLst>
+      <p:par>
+        <p:cTn id="1" dur="indefinite" restart="never" nodeType="tmRoot"/>
+      </p:par>
+    </p:tnLst>
+  </p:timing>
 </p:sld>
 </file>
 
@@ -20838,6 +21290,13 @@
   <p:clrMapOvr>
     <a:masterClrMapping/>
   </p:clrMapOvr>
+  <p:timing>
+    <p:tnLst>
+      <p:par>
+        <p:cTn id="1" dur="indefinite" restart="never" nodeType="tmRoot"/>
+      </p:par>
+    </p:tnLst>
+  </p:timing>
 </p:sld>
 </file>
 
@@ -21032,6 +21491,13 @@
   <p:clrMapOvr>
     <a:masterClrMapping/>
   </p:clrMapOvr>
+  <p:timing>
+    <p:tnLst>
+      <p:par>
+        <p:cTn id="1" dur="indefinite" restart="never" nodeType="tmRoot"/>
+      </p:par>
+    </p:tnLst>
+  </p:timing>
 </p:sld>
 </file>
 
@@ -22629,6 +23095,13 @@
   <p:clrMapOvr>
     <a:masterClrMapping/>
   </p:clrMapOvr>
+  <p:timing>
+    <p:tnLst>
+      <p:par>
+        <p:cTn id="1" dur="indefinite" restart="never" nodeType="tmRoot"/>
+      </p:par>
+    </p:tnLst>
+  </p:timing>
 </p:sld>
 </file>
 
@@ -22904,6 +23377,13 @@
   <p:clrMapOvr>
     <a:masterClrMapping/>
   </p:clrMapOvr>
+  <p:timing>
+    <p:tnLst>
+      <p:par>
+        <p:cTn id="1" dur="indefinite" restart="never" nodeType="tmRoot"/>
+      </p:par>
+    </p:tnLst>
+  </p:timing>
 </p:sld>
 </file>
 
@@ -26646,6 +27126,13 @@
   <p:clrMapOvr>
     <a:masterClrMapping/>
   </p:clrMapOvr>
+  <p:timing>
+    <p:tnLst>
+      <p:par>
+        <p:cTn id="1" dur="indefinite" restart="never" nodeType="tmRoot"/>
+      </p:par>
+    </p:tnLst>
+  </p:timing>
 </p:sld>
 </file>
 
@@ -30663,6 +31150,13 @@
   <p:clrMapOvr>
     <a:masterClrMapping/>
   </p:clrMapOvr>
+  <p:timing>
+    <p:tnLst>
+      <p:par>
+        <p:cTn id="1" dur="indefinite" restart="never" nodeType="tmRoot"/>
+      </p:par>
+    </p:tnLst>
+  </p:timing>
 </p:sld>
 </file>
 
@@ -34164,6 +34658,13 @@
   <p:clrMapOvr>
     <a:masterClrMapping/>
   </p:clrMapOvr>
+  <p:timing>
+    <p:tnLst>
+      <p:par>
+        <p:cTn id="1" dur="indefinite" restart="never" nodeType="tmRoot"/>
+      </p:par>
+    </p:tnLst>
+  </p:timing>
 </p:sld>
 </file>
 
@@ -38215,6 +38716,13 @@
   <p:clrMapOvr>
     <a:masterClrMapping/>
   </p:clrMapOvr>
+  <p:timing>
+    <p:tnLst>
+      <p:par>
+        <p:cTn id="1" dur="indefinite" restart="never" nodeType="tmRoot"/>
+      </p:par>
+    </p:tnLst>
+  </p:timing>
 </p:sld>
 </file>
 
@@ -40681,6 +41189,13 @@
   <p:clrMapOvr>
     <a:masterClrMapping/>
   </p:clrMapOvr>
+  <p:timing>
+    <p:tnLst>
+      <p:par>
+        <p:cTn id="1" dur="indefinite" restart="never" nodeType="tmRoot"/>
+      </p:par>
+    </p:tnLst>
+  </p:timing>
 </p:sld>
 </file>
 
@@ -40939,7 +41454,7 @@
   <a:extraClrSchemeLst/>
   <a:extLst>
     <a:ext uri="{05A4C25C-085E-4340-85A3-A5531E510DB2}">
-      <thm15:themeFamily xmlns:thm15="http://schemas.microsoft.com/office/thememl/2012/main" xmlns="" name="Office Theme" id="{62F939B6-93AF-4DB8-9C6B-D6C7DFDC589F}" vid="{4A3C46E8-61CC-4603-A589-7422A47A8E4A}"/>
+      <thm15:themeFamily xmlns:thm15="http://schemas.microsoft.com/office/thememl/2012/main" name="Office Theme" id="{62F939B6-93AF-4DB8-9C6B-D6C7DFDC589F}" vid="{4A3C46E8-61CC-4603-A589-7422A47A8E4A}"/>
     </a:ext>
   </a:extLst>
 </a:theme>
@@ -41485,7 +42000,7 @@
   <a:extraClrSchemeLst/>
   <a:extLst>
     <a:ext uri="{05A4C25C-085E-4340-85A3-A5531E510DB2}">
-      <thm15:themeFamily xmlns:thm15="http://schemas.microsoft.com/office/thememl/2012/main" xmlns="" name="Office Theme" id="{62F939B6-93AF-4DB8-9C6B-D6C7DFDC589F}" vid="{4A3C46E8-61CC-4603-A589-7422A47A8E4A}"/>
+      <thm15:themeFamily xmlns:thm15="http://schemas.microsoft.com/office/thememl/2012/main" name="Office Theme" id="{62F939B6-93AF-4DB8-9C6B-D6C7DFDC589F}" vid="{4A3C46E8-61CC-4603-A589-7422A47A8E4A}"/>
     </a:ext>
   </a:extLst>
 </a:theme>

--- a/COURSE MATERIALS/Module3_CSE2503.pptx
+++ b/COURSE MATERIALS/Module3_CSE2503.pptx
@@ -5,10 +5,10 @@
     <p:sldMasterId id="2147483805" r:id="rId1"/>
   </p:sldMasterIdLst>
   <p:notesMasterIdLst>
-    <p:notesMasterId r:id="rId87"/>
+    <p:notesMasterId r:id="rId88"/>
   </p:notesMasterIdLst>
   <p:handoutMasterIdLst>
-    <p:handoutMasterId r:id="rId88"/>
+    <p:handoutMasterId r:id="rId89"/>
   </p:handoutMasterIdLst>
   <p:sldIdLst>
     <p:sldId id="520" r:id="rId2"/>
@@ -86,16 +86,17 @@
     <p:sldId id="896" r:id="rId74"/>
     <p:sldId id="897" r:id="rId75"/>
     <p:sldId id="754" r:id="rId76"/>
-    <p:sldId id="755" r:id="rId77"/>
-    <p:sldId id="756" r:id="rId78"/>
-    <p:sldId id="757" r:id="rId79"/>
-    <p:sldId id="758" r:id="rId80"/>
-    <p:sldId id="759" r:id="rId81"/>
-    <p:sldId id="760" r:id="rId82"/>
-    <p:sldId id="761" r:id="rId83"/>
-    <p:sldId id="762" r:id="rId84"/>
-    <p:sldId id="763" r:id="rId85"/>
-    <p:sldId id="883" r:id="rId86"/>
+    <p:sldId id="900" r:id="rId77"/>
+    <p:sldId id="755" r:id="rId78"/>
+    <p:sldId id="756" r:id="rId79"/>
+    <p:sldId id="757" r:id="rId80"/>
+    <p:sldId id="758" r:id="rId81"/>
+    <p:sldId id="759" r:id="rId82"/>
+    <p:sldId id="760" r:id="rId83"/>
+    <p:sldId id="761" r:id="rId84"/>
+    <p:sldId id="762" r:id="rId85"/>
+    <p:sldId id="763" r:id="rId86"/>
+    <p:sldId id="883" r:id="rId87"/>
   </p:sldIdLst>
   <p:sldSz cx="12192000" cy="6858000"/>
   <p:notesSz cx="6858000" cy="9144000"/>
@@ -326,7 +327,7 @@
             <a:fld id="{1D5163DD-12C9-4B8E-91F3-BECE4B548A1F}" type="datetimeFigureOut">
               <a:rPr lang="en-US" smtClean="0"/>
               <a:pPr/>
-              <a:t>3/16/2026</a:t>
+              <a:t>3/30/2026</a:t>
             </a:fld>
             <a:endParaRPr lang="en-US"/>
           </a:p>
@@ -505,7 +506,7 @@
               <a:pPr>
                 <a:defRPr/>
               </a:pPr>
-              <a:t>3/16/2026</a:t>
+              <a:t>3/30/2026</a:t>
             </a:fld>
             <a:endParaRPr lang="en-US"/>
           </a:p>
@@ -1070,7 +1071,7 @@
               <a:pPr>
                 <a:defRPr/>
               </a:pPr>
-              <a:t>3/16/2026</a:t>
+              <a:t>3/30/2026</a:t>
             </a:fld>
             <a:endParaRPr lang="en-US"/>
           </a:p>
@@ -1267,7 +1268,7 @@
               <a:pPr>
                 <a:defRPr/>
               </a:pPr>
-              <a:t>3/16/2026</a:t>
+              <a:t>3/30/2026</a:t>
             </a:fld>
             <a:endParaRPr lang="en-US"/>
           </a:p>
@@ -1474,7 +1475,7 @@
               <a:pPr>
                 <a:defRPr/>
               </a:pPr>
-              <a:t>3/16/2026</a:t>
+              <a:t>3/30/2026</a:t>
             </a:fld>
             <a:endParaRPr lang="en-US"/>
           </a:p>
@@ -1671,7 +1672,7 @@
               <a:pPr>
                 <a:defRPr/>
               </a:pPr>
-              <a:t>3/16/2026</a:t>
+              <a:t>3/30/2026</a:t>
             </a:fld>
             <a:endParaRPr lang="en-US"/>
           </a:p>
@@ -1944,7 +1945,7 @@
               <a:pPr>
                 <a:defRPr/>
               </a:pPr>
-              <a:t>3/16/2026</a:t>
+              <a:t>3/30/2026</a:t>
             </a:fld>
             <a:endParaRPr lang="en-US"/>
           </a:p>
@@ -2203,7 +2204,7 @@
               <a:pPr>
                 <a:defRPr/>
               </a:pPr>
-              <a:t>3/16/2026</a:t>
+              <a:t>3/30/2026</a:t>
             </a:fld>
             <a:endParaRPr lang="en-US"/>
           </a:p>
@@ -2597,7 +2598,7 @@
               <a:pPr>
                 <a:defRPr/>
               </a:pPr>
-              <a:t>3/16/2026</a:t>
+              <a:t>3/30/2026</a:t>
             </a:fld>
             <a:endParaRPr lang="en-US"/>
           </a:p>
@@ -2742,7 +2743,7 @@
               <a:pPr>
                 <a:defRPr/>
               </a:pPr>
-              <a:t>3/16/2026</a:t>
+              <a:t>3/30/2026</a:t>
             </a:fld>
             <a:endParaRPr lang="en-US"/>
           </a:p>
@@ -2864,7 +2865,7 @@
               <a:pPr>
                 <a:defRPr/>
               </a:pPr>
-              <a:t>3/16/2026</a:t>
+              <a:t>3/30/2026</a:t>
             </a:fld>
             <a:endParaRPr lang="en-US"/>
           </a:p>
@@ -3168,7 +3169,7 @@
               <a:pPr>
                 <a:defRPr/>
               </a:pPr>
-              <a:t>3/16/2026</a:t>
+              <a:t>3/30/2026</a:t>
             </a:fld>
             <a:endParaRPr lang="en-US"/>
           </a:p>
@@ -3455,7 +3456,7 @@
               <a:pPr>
                 <a:defRPr/>
               </a:pPr>
-              <a:t>3/16/2026</a:t>
+              <a:t>3/30/2026</a:t>
             </a:fld>
             <a:endParaRPr lang="en-US"/>
           </a:p>
@@ -3740,7 +3741,7 @@
               <a:pPr>
                 <a:defRPr/>
               </a:pPr>
-              <a:t>3/16/2026</a:t>
+              <a:t>3/30/2026</a:t>
             </a:fld>
             <a:endParaRPr lang="en-US"/>
           </a:p>
@@ -23627,35 +23628,21 @@
                 <a:latin typeface="Cambria" panose="02040503050406030204" pitchFamily="18" charset="0"/>
                 <a:ea typeface="Cambria" panose="02040503050406030204" pitchFamily="18" charset="0"/>
               </a:rPr>
-              <a:t>    </a:t>
+              <a:t>    Map&lt;</a:t>
+            </a:r>
+            <a:r>
+              <a:rPr lang="en-US" sz="2000" dirty="0" err="1" smtClean="0">
+                <a:latin typeface="Cambria" panose="02040503050406030204" pitchFamily="18" charset="0"/>
+                <a:ea typeface="Cambria" panose="02040503050406030204" pitchFamily="18" charset="0"/>
+              </a:rPr>
+              <a:t>Integer,String</a:t>
             </a:r>
             <a:r>
               <a:rPr lang="en-US" sz="2000" dirty="0" smtClean="0">
                 <a:latin typeface="Cambria" panose="02040503050406030204" pitchFamily="18" charset="0"/>
                 <a:ea typeface="Cambria" panose="02040503050406030204" pitchFamily="18" charset="0"/>
               </a:rPr>
-              <a:t>Map&lt;</a:t>
-            </a:r>
-            <a:r>
-              <a:rPr lang="en-US" sz="2000" dirty="0" err="1" smtClean="0">
-                <a:latin typeface="Cambria" panose="02040503050406030204" pitchFamily="18" charset="0"/>
-                <a:ea typeface="Cambria" panose="02040503050406030204" pitchFamily="18" charset="0"/>
-              </a:rPr>
-              <a:t>Integer,String</a:t>
-            </a:r>
-            <a:r>
-              <a:rPr lang="en-US" sz="2000" dirty="0" smtClean="0">
-                <a:latin typeface="Cambria" panose="02040503050406030204" pitchFamily="18" charset="0"/>
-                <a:ea typeface="Cambria" panose="02040503050406030204" pitchFamily="18" charset="0"/>
-              </a:rPr>
-              <a:t>&gt;</a:t>
-            </a:r>
-            <a:r>
-              <a:rPr lang="en-US" sz="2000" dirty="0" smtClean="0">
-                <a:latin typeface="Cambria" panose="02040503050406030204" pitchFamily="18" charset="0"/>
-                <a:ea typeface="Cambria" panose="02040503050406030204" pitchFamily="18" charset="0"/>
-              </a:rPr>
-              <a:t> map=</a:t>
+              <a:t>&gt; map=</a:t>
             </a:r>
             <a:r>
               <a:rPr lang="en-US" sz="2000" b="1" dirty="0" smtClean="0">
@@ -29743,21 +29730,7 @@
                 <a:latin typeface="Cambria" panose="02040503050406030204" pitchFamily="18" charset="0"/>
                 <a:ea typeface="Cambria" panose="02040503050406030204" pitchFamily="18" charset="0"/>
               </a:rPr>
-              <a:t>() method of Statement interface is used to execute queries to the database. This method </a:t>
-            </a:r>
-            <a:r>
-              <a:rPr lang="en-GB" smtClean="0">
-                <a:latin typeface="Cambria" panose="02040503050406030204" pitchFamily="18" charset="0"/>
-                <a:ea typeface="Cambria" panose="02040503050406030204" pitchFamily="18" charset="0"/>
-              </a:rPr>
-              <a:t>returns an </a:t>
-            </a:r>
-            <a:r>
-              <a:rPr lang="en-GB" dirty="0" smtClean="0">
-                <a:latin typeface="Cambria" panose="02040503050406030204" pitchFamily="18" charset="0"/>
-                <a:ea typeface="Cambria" panose="02040503050406030204" pitchFamily="18" charset="0"/>
-              </a:rPr>
-              <a:t>object of ResultSet that can be used to get all the records of a table.</a:t>
+              <a:t>() method of Statement interface is used to execute queries to the database. This method returns an object of ResultSet that can be used to get all the records of a table.</a:t>
             </a:r>
           </a:p>
           <a:p>
@@ -31627,7 +31600,7 @@
                   <a:spcPct val="0"/>
                 </a:spcBef>
               </a:pPr>
-              <a:t>3/16/2026</a:t>
+              <a:t>3/30/2026</a:t>
             </a:fld>
             <a:endParaRPr lang="en-US" altLang="en-US" sz="1400"/>
           </a:p>
@@ -32202,13 +32175,7 @@
               <a:rPr lang="en-US" dirty="0" smtClean="0">
                 <a:latin typeface="+mn-lt"/>
               </a:rPr>
-              <a:t>. </a:t>
-            </a:r>
-            <a:r>
-              <a:rPr lang="en-US" dirty="0" smtClean="0">
-                <a:latin typeface="+mn-lt"/>
-              </a:rPr>
-              <a:t>Create Statement Object</a:t>
+              <a:t>. Create Statement Object</a:t>
             </a:r>
             <a:endParaRPr lang="en-IN" dirty="0">
               <a:latin typeface="+mn-lt"/>
@@ -32254,13 +32221,7 @@
               <a:rPr lang="en-US" dirty="0" smtClean="0">
                 <a:latin typeface="+mn-lt"/>
               </a:rPr>
-              <a:t>. </a:t>
-            </a:r>
-            <a:r>
-              <a:rPr lang="en-US" dirty="0" smtClean="0">
-                <a:latin typeface="+mn-lt"/>
-              </a:rPr>
-              <a:t>close the connection</a:t>
+              <a:t>. close the connection</a:t>
             </a:r>
             <a:endParaRPr lang="en-IN" dirty="0">
               <a:latin typeface="+mn-lt"/>
@@ -32328,13 +32289,7 @@
               <a:rPr lang="en-US" dirty="0" smtClean="0">
                 <a:latin typeface="+mn-lt"/>
               </a:rPr>
-              <a:t> 4. </a:t>
-            </a:r>
-            <a:r>
-              <a:rPr lang="en-US" dirty="0" smtClean="0">
-                <a:latin typeface="+mn-lt"/>
-              </a:rPr>
-              <a:t>Execute the Query</a:t>
+              <a:t> 4. Execute the Query</a:t>
             </a:r>
             <a:endParaRPr lang="en-IN" dirty="0">
               <a:latin typeface="+mn-lt"/>
@@ -36470,13 +36425,27 @@
                 <a:latin typeface="Cambria" panose="02040503050406030204" pitchFamily="18" charset="0"/>
                 <a:ea typeface="Cambria" panose="02040503050406030204" pitchFamily="18" charset="0"/>
               </a:rPr>
-              <a:t>Statement stmt=</a:t>
+              <a:t>Statement </a:t>
             </a:r>
             <a:r>
               <a:rPr lang="en-US" sz="2000" dirty="0" err="1" smtClean="0">
                 <a:latin typeface="Cambria" panose="02040503050406030204" pitchFamily="18" charset="0"/>
                 <a:ea typeface="Cambria" panose="02040503050406030204" pitchFamily="18" charset="0"/>
               </a:rPr>
+              <a:t>stmt</a:t>
+            </a:r>
+            <a:r>
+              <a:rPr lang="en-US" sz="2000" dirty="0" smtClean="0">
+                <a:latin typeface="Cambria" panose="02040503050406030204" pitchFamily="18" charset="0"/>
+                <a:ea typeface="Cambria" panose="02040503050406030204" pitchFamily="18" charset="0"/>
+              </a:rPr>
+              <a:t>=</a:t>
+            </a:r>
+            <a:r>
+              <a:rPr lang="en-US" sz="2000" dirty="0" err="1" smtClean="0">
+                <a:latin typeface="Cambria" panose="02040503050406030204" pitchFamily="18" charset="0"/>
+                <a:ea typeface="Cambria" panose="02040503050406030204" pitchFamily="18" charset="0"/>
+              </a:rPr>
               <a:t>con.createStatement</a:t>
             </a:r>
             <a:r>
@@ -36484,21 +36453,14 @@
                 <a:latin typeface="Cambria" panose="02040503050406030204" pitchFamily="18" charset="0"/>
                 <a:ea typeface="Cambria" panose="02040503050406030204" pitchFamily="18" charset="0"/>
               </a:rPr>
-              <a:t>(</a:t>
-            </a:r>
-            <a:r>
-              <a:rPr lang="en-US" sz="2000" dirty="0" err="1" smtClean="0">
-                <a:latin typeface="Cambria" panose="02040503050406030204" pitchFamily="18" charset="0"/>
-                <a:ea typeface="Cambria" panose="02040503050406030204" pitchFamily="18" charset="0"/>
-              </a:rPr>
-              <a:t>ResultSet.TYPE_SCROLL_SENSITIVE,ResultSet.CONCUR_UPDATABLE</a:t>
+              <a:t>();</a:t>
             </a:r>
             <a:r>
               <a:rPr lang="en-US" sz="2000" dirty="0" smtClean="0">
                 <a:latin typeface="Cambria" panose="02040503050406030204" pitchFamily="18" charset="0"/>
                 <a:ea typeface="Cambria" panose="02040503050406030204" pitchFamily="18" charset="0"/>
               </a:rPr>
-              <a:t>);  </a:t>
+              <a:t>  </a:t>
             </a:r>
           </a:p>
           <a:p>
@@ -36818,14 +36780,14 @@
               <a:buNone/>
             </a:pPr>
             <a:r>
-              <a:rPr lang="en-US" sz="2000" b="1" dirty="0" smtClean="0">
+              <a:rPr lang="en-US" sz="1800" b="1" dirty="0" smtClean="0">
                 <a:latin typeface="Cambria" panose="02040503050406030204" pitchFamily="18" charset="0"/>
                 <a:ea typeface="Cambria" panose="02040503050406030204" pitchFamily="18" charset="0"/>
               </a:rPr>
               <a:t>import</a:t>
             </a:r>
             <a:r>
-              <a:rPr lang="en-US" sz="2000" dirty="0" smtClean="0">
+              <a:rPr lang="en-US" sz="1800" dirty="0" smtClean="0">
                 <a:latin typeface="Cambria" panose="02040503050406030204" pitchFamily="18" charset="0"/>
                 <a:ea typeface="Cambria" panose="02040503050406030204" pitchFamily="18" charset="0"/>
               </a:rPr>
@@ -36840,28 +36802,28 @@
               <a:buNone/>
             </a:pPr>
             <a:r>
-              <a:rPr lang="en-US" sz="2000" b="1" dirty="0" smtClean="0">
+              <a:rPr lang="en-US" sz="1800" b="1" dirty="0" smtClean="0">
                 <a:latin typeface="Cambria" panose="02040503050406030204" pitchFamily="18" charset="0"/>
                 <a:ea typeface="Cambria" panose="02040503050406030204" pitchFamily="18" charset="0"/>
               </a:rPr>
               <a:t>class</a:t>
             </a:r>
             <a:r>
-              <a:rPr lang="en-US" sz="2000" dirty="0" smtClean="0">
+              <a:rPr lang="en-US" sz="1800" dirty="0" smtClean="0">
                 <a:latin typeface="Cambria" panose="02040503050406030204" pitchFamily="18" charset="0"/>
                 <a:ea typeface="Cambria" panose="02040503050406030204" pitchFamily="18" charset="0"/>
               </a:rPr>
               <a:t> </a:t>
             </a:r>
             <a:r>
-              <a:rPr lang="en-US" sz="2000" dirty="0" err="1" smtClean="0">
+              <a:rPr lang="en-US" sz="1800" dirty="0" err="1" smtClean="0">
                 <a:latin typeface="Cambria" panose="02040503050406030204" pitchFamily="18" charset="0"/>
                 <a:ea typeface="Cambria" panose="02040503050406030204" pitchFamily="18" charset="0"/>
               </a:rPr>
               <a:t>InsertPrepared</a:t>
             </a:r>
             <a:r>
-              <a:rPr lang="en-US" sz="2000" dirty="0" smtClean="0">
+              <a:rPr lang="en-US" sz="1800" dirty="0" smtClean="0">
                 <a:latin typeface="Cambria" panose="02040503050406030204" pitchFamily="18" charset="0"/>
                 <a:ea typeface="Cambria" panose="02040503050406030204" pitchFamily="18" charset="0"/>
               </a:rPr>
@@ -36876,56 +36838,56 @@
               <a:buNone/>
             </a:pPr>
             <a:r>
-              <a:rPr lang="en-US" sz="2000" b="1" dirty="0" smtClean="0">
+              <a:rPr lang="en-US" sz="1800" b="1" dirty="0" smtClean="0">
                 <a:latin typeface="Cambria" panose="02040503050406030204" pitchFamily="18" charset="0"/>
                 <a:ea typeface="Cambria" panose="02040503050406030204" pitchFamily="18" charset="0"/>
               </a:rPr>
               <a:t>public</a:t>
             </a:r>
             <a:r>
-              <a:rPr lang="en-US" sz="2000" dirty="0" smtClean="0">
+              <a:rPr lang="en-US" sz="1800" dirty="0" smtClean="0">
                 <a:latin typeface="Cambria" panose="02040503050406030204" pitchFamily="18" charset="0"/>
                 <a:ea typeface="Cambria" panose="02040503050406030204" pitchFamily="18" charset="0"/>
               </a:rPr>
               <a:t> </a:t>
             </a:r>
             <a:r>
-              <a:rPr lang="en-US" sz="2000" b="1" dirty="0" smtClean="0">
+              <a:rPr lang="en-US" sz="1800" b="1" dirty="0" smtClean="0">
                 <a:latin typeface="Cambria" panose="02040503050406030204" pitchFamily="18" charset="0"/>
                 <a:ea typeface="Cambria" panose="02040503050406030204" pitchFamily="18" charset="0"/>
               </a:rPr>
               <a:t>static</a:t>
             </a:r>
             <a:r>
-              <a:rPr lang="en-US" sz="2000" dirty="0" smtClean="0">
+              <a:rPr lang="en-US" sz="1800" dirty="0" smtClean="0">
                 <a:latin typeface="Cambria" panose="02040503050406030204" pitchFamily="18" charset="0"/>
                 <a:ea typeface="Cambria" panose="02040503050406030204" pitchFamily="18" charset="0"/>
               </a:rPr>
               <a:t> </a:t>
             </a:r>
             <a:r>
-              <a:rPr lang="en-US" sz="2000" b="1" dirty="0" smtClean="0">
+              <a:rPr lang="en-US" sz="1800" b="1" dirty="0" smtClean="0">
                 <a:latin typeface="Cambria" panose="02040503050406030204" pitchFamily="18" charset="0"/>
                 <a:ea typeface="Cambria" panose="02040503050406030204" pitchFamily="18" charset="0"/>
               </a:rPr>
               <a:t>void</a:t>
             </a:r>
             <a:r>
-              <a:rPr lang="en-US" sz="2000" dirty="0" smtClean="0">
+              <a:rPr lang="en-US" sz="1800" dirty="0" smtClean="0">
                 <a:latin typeface="Cambria" panose="02040503050406030204" pitchFamily="18" charset="0"/>
                 <a:ea typeface="Cambria" panose="02040503050406030204" pitchFamily="18" charset="0"/>
               </a:rPr>
               <a:t> main(String </a:t>
             </a:r>
             <a:r>
-              <a:rPr lang="en-US" sz="2000" dirty="0" err="1" smtClean="0">
+              <a:rPr lang="en-US" sz="1800" dirty="0" err="1" smtClean="0">
                 <a:latin typeface="Cambria" panose="02040503050406030204" pitchFamily="18" charset="0"/>
                 <a:ea typeface="Cambria" panose="02040503050406030204" pitchFamily="18" charset="0"/>
               </a:rPr>
               <a:t>args</a:t>
             </a:r>
             <a:r>
-              <a:rPr lang="en-US" sz="2000" dirty="0" smtClean="0">
+              <a:rPr lang="en-US" sz="1800" dirty="0" smtClean="0">
                 <a:latin typeface="Cambria" panose="02040503050406030204" pitchFamily="18" charset="0"/>
                 <a:ea typeface="Cambria" panose="02040503050406030204" pitchFamily="18" charset="0"/>
               </a:rPr>
@@ -36940,14 +36902,14 @@
               <a:buNone/>
             </a:pPr>
             <a:r>
-              <a:rPr lang="en-US" sz="2000" b="1" dirty="0" smtClean="0">
+              <a:rPr lang="en-US" sz="1800" b="1" dirty="0" smtClean="0">
                 <a:latin typeface="Cambria" panose="02040503050406030204" pitchFamily="18" charset="0"/>
                 <a:ea typeface="Cambria" panose="02040503050406030204" pitchFamily="18" charset="0"/>
               </a:rPr>
               <a:t>try</a:t>
             </a:r>
             <a:r>
-              <a:rPr lang="en-US" sz="2000" dirty="0" smtClean="0">
+              <a:rPr lang="en-US" sz="1800" dirty="0" smtClean="0">
                 <a:latin typeface="Cambria" panose="02040503050406030204" pitchFamily="18" charset="0"/>
                 <a:ea typeface="Cambria" panose="02040503050406030204" pitchFamily="18" charset="0"/>
               </a:rPr>
@@ -36962,28 +36924,28 @@
               <a:buNone/>
             </a:pPr>
             <a:r>
-              <a:rPr lang="en-US" sz="2000" dirty="0" err="1" smtClean="0">
+              <a:rPr lang="en-US" sz="1800" dirty="0" err="1" smtClean="0">
                 <a:latin typeface="Cambria" panose="02040503050406030204" pitchFamily="18" charset="0"/>
                 <a:ea typeface="Cambria" panose="02040503050406030204" pitchFamily="18" charset="0"/>
               </a:rPr>
               <a:t>Class.forName</a:t>
             </a:r>
             <a:r>
-              <a:rPr lang="en-US" sz="2000" dirty="0" smtClean="0">
+              <a:rPr lang="en-US" sz="1800" dirty="0" smtClean="0">
                 <a:latin typeface="Cambria" panose="02040503050406030204" pitchFamily="18" charset="0"/>
                 <a:ea typeface="Cambria" panose="02040503050406030204" pitchFamily="18" charset="0"/>
               </a:rPr>
               <a:t>("</a:t>
             </a:r>
             <a:r>
-              <a:rPr lang="en-US" sz="2000" dirty="0" err="1" smtClean="0">
+              <a:rPr lang="en-US" sz="1800" dirty="0" err="1" smtClean="0">
                 <a:latin typeface="Cambria" panose="02040503050406030204" pitchFamily="18" charset="0"/>
                 <a:ea typeface="Cambria" panose="02040503050406030204" pitchFamily="18" charset="0"/>
               </a:rPr>
               <a:t>oracle.jdbc.driver.OracleDriver</a:t>
             </a:r>
             <a:r>
-              <a:rPr lang="en-US" sz="2000" dirty="0" smtClean="0">
+              <a:rPr lang="en-US" sz="1800" dirty="0" smtClean="0">
                 <a:latin typeface="Cambria" panose="02040503050406030204" pitchFamily="18" charset="0"/>
                 <a:ea typeface="Cambria" panose="02040503050406030204" pitchFamily="18" charset="0"/>
               </a:rPr>
@@ -36998,11 +36960,18 @@
               <a:buNone/>
             </a:pPr>
             <a:r>
-              <a:rPr lang="en-US" sz="2000" dirty="0" smtClean="0">
-                <a:latin typeface="Cambria" panose="02040503050406030204" pitchFamily="18" charset="0"/>
-                <a:ea typeface="Cambria" panose="02040503050406030204" pitchFamily="18" charset="0"/>
-              </a:rPr>
-              <a:t>Connection con=DriverManager.getConnection("jdbc:oracle:thin:@localhost:1521:xe","system","oacle"); </a:t>
+              <a:rPr lang="en-US" sz="1800" dirty="0" smtClean="0">
+                <a:latin typeface="Cambria" panose="02040503050406030204" pitchFamily="18" charset="0"/>
+                <a:ea typeface="Cambria" panose="02040503050406030204" pitchFamily="18" charset="0"/>
+              </a:rPr>
+              <a:t>Connection con=DriverManager.getConnection("jdbc:oracle:thin:@localhost:1521:xe","system","</a:t>
+            </a:r>
+            <a:r>
+              <a:rPr lang="en-US" sz="1800" dirty="0" smtClean="0">
+                <a:latin typeface="Cambria" panose="02040503050406030204" pitchFamily="18" charset="0"/>
+                <a:ea typeface="Cambria" panose="02040503050406030204" pitchFamily="18" charset="0"/>
+              </a:rPr>
+              <a:t>oracle"); </a:t>
             </a:r>
           </a:p>
           <a:p>
@@ -37010,11 +36979,64 @@
               <a:spcBef>
                 <a:spcPts val="0"/>
               </a:spcBef>
-            </a:pPr>
-            <a:endParaRPr lang="en-US" sz="2000" dirty="0" smtClean="0">
-              <a:latin typeface="Cambria" panose="02040503050406030204" pitchFamily="18" charset="0"/>
-              <a:ea typeface="Cambria" panose="02040503050406030204" pitchFamily="18" charset="0"/>
-            </a:endParaRPr>
+              <a:buNone/>
+            </a:pPr>
+            <a:r>
+              <a:rPr lang="en-US" sz="1800" dirty="0" err="1" smtClean="0">
+                <a:latin typeface="Cambria" panose="02040503050406030204" pitchFamily="18" charset="0"/>
+                <a:ea typeface="Cambria" panose="02040503050406030204" pitchFamily="18" charset="0"/>
+              </a:rPr>
+              <a:t>PreparedStatement</a:t>
+            </a:r>
+            <a:r>
+              <a:rPr lang="en-US" sz="1800" dirty="0" smtClean="0">
+                <a:latin typeface="Cambria" panose="02040503050406030204" pitchFamily="18" charset="0"/>
+                <a:ea typeface="Cambria" panose="02040503050406030204" pitchFamily="18" charset="0"/>
+              </a:rPr>
+              <a:t> </a:t>
+            </a:r>
+            <a:r>
+              <a:rPr lang="en-US" sz="1800" dirty="0" err="1" smtClean="0">
+                <a:latin typeface="Cambria" panose="02040503050406030204" pitchFamily="18" charset="0"/>
+                <a:ea typeface="Cambria" panose="02040503050406030204" pitchFamily="18" charset="0"/>
+              </a:rPr>
+              <a:t>stmt</a:t>
+            </a:r>
+            <a:r>
+              <a:rPr lang="en-US" sz="1800" dirty="0" smtClean="0">
+                <a:latin typeface="Cambria" panose="02040503050406030204" pitchFamily="18" charset="0"/>
+                <a:ea typeface="Cambria" panose="02040503050406030204" pitchFamily="18" charset="0"/>
+              </a:rPr>
+              <a:t>=</a:t>
+            </a:r>
+            <a:r>
+              <a:rPr lang="en-US" sz="1800" dirty="0" err="1" smtClean="0">
+                <a:latin typeface="Cambria" panose="02040503050406030204" pitchFamily="18" charset="0"/>
+                <a:ea typeface="Cambria" panose="02040503050406030204" pitchFamily="18" charset="0"/>
+              </a:rPr>
+              <a:t>con.prepareStatement</a:t>
+            </a:r>
+            <a:r>
+              <a:rPr lang="en-US" sz="1800" dirty="0" smtClean="0">
+                <a:latin typeface="Cambria" panose="02040503050406030204" pitchFamily="18" charset="0"/>
+                <a:ea typeface="Cambria" panose="02040503050406030204" pitchFamily="18" charset="0"/>
+              </a:rPr>
+              <a:t>("insert into </a:t>
+            </a:r>
+            <a:r>
+              <a:rPr lang="en-US" sz="1800" dirty="0" err="1" smtClean="0">
+                <a:latin typeface="Cambria" panose="02040503050406030204" pitchFamily="18" charset="0"/>
+                <a:ea typeface="Cambria" panose="02040503050406030204" pitchFamily="18" charset="0"/>
+              </a:rPr>
+              <a:t>Emp</a:t>
+            </a:r>
+            <a:r>
+              <a:rPr lang="en-US" sz="1800" dirty="0" smtClean="0">
+                <a:latin typeface="Cambria" panose="02040503050406030204" pitchFamily="18" charset="0"/>
+                <a:ea typeface="Cambria" panose="02040503050406030204" pitchFamily="18" charset="0"/>
+              </a:rPr>
+              <a:t> values(?,?)");  </a:t>
+            </a:r>
           </a:p>
           <a:p>
             <a:pPr>
@@ -37024,46 +37046,25 @@
               <a:buNone/>
             </a:pPr>
             <a:r>
-              <a:rPr lang="en-US" sz="2000" dirty="0" err="1" smtClean="0">
-                <a:latin typeface="Cambria" panose="02040503050406030204" pitchFamily="18" charset="0"/>
-                <a:ea typeface="Cambria" panose="02040503050406030204" pitchFamily="18" charset="0"/>
-              </a:rPr>
-              <a:t>PreparedStatement</a:t>
-            </a:r>
-            <a:r>
-              <a:rPr lang="en-US" sz="2000" dirty="0" smtClean="0">
-                <a:latin typeface="Cambria" panose="02040503050406030204" pitchFamily="18" charset="0"/>
-                <a:ea typeface="Cambria" panose="02040503050406030204" pitchFamily="18" charset="0"/>
-              </a:rPr>
-              <a:t> stmt=</a:t>
-            </a:r>
-            <a:r>
-              <a:rPr lang="en-US" sz="2000" dirty="0" err="1" smtClean="0">
-                <a:latin typeface="Cambria" panose="02040503050406030204" pitchFamily="18" charset="0"/>
-                <a:ea typeface="Cambria" panose="02040503050406030204" pitchFamily="18" charset="0"/>
-              </a:rPr>
-              <a:t>con.prepareStatement</a:t>
-            </a:r>
-            <a:r>
-              <a:rPr lang="en-US" sz="2000" dirty="0" smtClean="0">
-                <a:latin typeface="Cambria" panose="02040503050406030204" pitchFamily="18" charset="0"/>
-                <a:ea typeface="Cambria" panose="02040503050406030204" pitchFamily="18" charset="0"/>
-              </a:rPr>
-              <a:t>("insert into </a:t>
-            </a:r>
-            <a:r>
-              <a:rPr lang="en-US" sz="2000" dirty="0" err="1" smtClean="0">
-                <a:latin typeface="Cambria" panose="02040503050406030204" pitchFamily="18" charset="0"/>
-                <a:ea typeface="Cambria" panose="02040503050406030204" pitchFamily="18" charset="0"/>
-              </a:rPr>
-              <a:t>Emp</a:t>
-            </a:r>
-            <a:r>
-              <a:rPr lang="en-US" sz="2000" dirty="0" smtClean="0">
-                <a:latin typeface="Cambria" panose="02040503050406030204" pitchFamily="18" charset="0"/>
-                <a:ea typeface="Cambria" panose="02040503050406030204" pitchFamily="18" charset="0"/>
-              </a:rPr>
-              <a:t> values(?,?)");  </a:t>
+              <a:rPr lang="en-US" sz="1800" dirty="0" err="1" smtClean="0">
+                <a:latin typeface="Cambria" panose="02040503050406030204" pitchFamily="18" charset="0"/>
+                <a:ea typeface="Cambria" panose="02040503050406030204" pitchFamily="18" charset="0"/>
+              </a:rPr>
+              <a:t>stmt.setInt</a:t>
+            </a:r>
+            <a:r>
+              <a:rPr lang="en-US" sz="1800" dirty="0" smtClean="0">
+                <a:latin typeface="Cambria" panose="02040503050406030204" pitchFamily="18" charset="0"/>
+                <a:ea typeface="Cambria" panose="02040503050406030204" pitchFamily="18" charset="0"/>
+              </a:rPr>
+              <a:t>(1,101</a:t>
+            </a:r>
+            <a:r>
+              <a:rPr lang="en-US" sz="1800" dirty="0" smtClean="0">
+                <a:latin typeface="Cambria" panose="02040503050406030204" pitchFamily="18" charset="0"/>
+                <a:ea typeface="Cambria" panose="02040503050406030204" pitchFamily="18" charset="0"/>
+              </a:rPr>
+              <a:t>);//1 specifies the first parameter in the query  </a:t>
             </a:r>
           </a:p>
           <a:p>
@@ -37074,18 +37075,18 @@
               <a:buNone/>
             </a:pPr>
             <a:r>
-              <a:rPr lang="en-US" sz="2000" dirty="0" err="1" smtClean="0">
-                <a:latin typeface="Cambria" panose="02040503050406030204" pitchFamily="18" charset="0"/>
-                <a:ea typeface="Cambria" panose="02040503050406030204" pitchFamily="18" charset="0"/>
-              </a:rPr>
-              <a:t>stmt.setInt</a:t>
-            </a:r>
-            <a:r>
-              <a:rPr lang="en-US" sz="2000" dirty="0" smtClean="0">
-                <a:latin typeface="Cambria" panose="02040503050406030204" pitchFamily="18" charset="0"/>
-                <a:ea typeface="Cambria" panose="02040503050406030204" pitchFamily="18" charset="0"/>
-              </a:rPr>
-              <a:t>(1,101);//1 specifies the first parameter in the query  </a:t>
+              <a:rPr lang="en-US" sz="1800" dirty="0" err="1" smtClean="0">
+                <a:latin typeface="Cambria" panose="02040503050406030204" pitchFamily="18" charset="0"/>
+                <a:ea typeface="Cambria" panose="02040503050406030204" pitchFamily="18" charset="0"/>
+              </a:rPr>
+              <a:t>stmt.setString</a:t>
+            </a:r>
+            <a:r>
+              <a:rPr lang="en-US" sz="1800" dirty="0" smtClean="0">
+                <a:latin typeface="Cambria" panose="02040503050406030204" pitchFamily="18" charset="0"/>
+                <a:ea typeface="Cambria" panose="02040503050406030204" pitchFamily="18" charset="0"/>
+              </a:rPr>
+              <a:t>(2,"Ratan");  </a:t>
             </a:r>
           </a:p>
           <a:p>
@@ -37096,18 +37097,11 @@
               <a:buNone/>
             </a:pPr>
             <a:r>
-              <a:rPr lang="en-US" sz="2000" dirty="0" err="1" smtClean="0">
-                <a:latin typeface="Cambria" panose="02040503050406030204" pitchFamily="18" charset="0"/>
-                <a:ea typeface="Cambria" panose="02040503050406030204" pitchFamily="18" charset="0"/>
-              </a:rPr>
-              <a:t>stmt.setString</a:t>
-            </a:r>
-            <a:r>
-              <a:rPr lang="en-US" sz="2000" dirty="0" smtClean="0">
-                <a:latin typeface="Cambria" panose="02040503050406030204" pitchFamily="18" charset="0"/>
-                <a:ea typeface="Cambria" panose="02040503050406030204" pitchFamily="18" charset="0"/>
-              </a:rPr>
-              <a:t>(2,"Ratan");  </a:t>
+              <a:rPr lang="en-US" sz="1800" dirty="0" smtClean="0">
+                <a:latin typeface="Cambria" panose="02040503050406030204" pitchFamily="18" charset="0"/>
+                <a:ea typeface="Cambria" panose="02040503050406030204" pitchFamily="18" charset="0"/>
+              </a:rPr>
+              <a:t>  </a:t>
             </a:r>
           </a:p>
           <a:p>
@@ -37118,11 +37112,46 @@
               <a:buNone/>
             </a:pPr>
             <a:r>
-              <a:rPr lang="en-US" sz="2000" dirty="0" smtClean="0">
-                <a:latin typeface="Cambria" panose="02040503050406030204" pitchFamily="18" charset="0"/>
-                <a:ea typeface="Cambria" panose="02040503050406030204" pitchFamily="18" charset="0"/>
-              </a:rPr>
-              <a:t>  </a:t>
+              <a:rPr lang="en-US" sz="1800" b="1" dirty="0" err="1" smtClean="0">
+                <a:latin typeface="Cambria" panose="02040503050406030204" pitchFamily="18" charset="0"/>
+                <a:ea typeface="Cambria" panose="02040503050406030204" pitchFamily="18" charset="0"/>
+              </a:rPr>
+              <a:t>int</a:t>
+            </a:r>
+            <a:r>
+              <a:rPr lang="en-US" sz="1800" dirty="0" smtClean="0">
+                <a:latin typeface="Cambria" panose="02040503050406030204" pitchFamily="18" charset="0"/>
+                <a:ea typeface="Cambria" panose="02040503050406030204" pitchFamily="18" charset="0"/>
+              </a:rPr>
+              <a:t> </a:t>
+            </a:r>
+            <a:r>
+              <a:rPr lang="en-US" sz="1800" dirty="0" err="1" smtClean="0">
+                <a:latin typeface="Cambria" panose="02040503050406030204" pitchFamily="18" charset="0"/>
+                <a:ea typeface="Cambria" panose="02040503050406030204" pitchFamily="18" charset="0"/>
+              </a:rPr>
+              <a:t>i</a:t>
+            </a:r>
+            <a:r>
+              <a:rPr lang="en-US" sz="1800" dirty="0" smtClean="0">
+                <a:latin typeface="Cambria" panose="02040503050406030204" pitchFamily="18" charset="0"/>
+                <a:ea typeface="Cambria" panose="02040503050406030204" pitchFamily="18" charset="0"/>
+              </a:rPr>
+              <a:t>=</a:t>
+            </a:r>
+            <a:r>
+              <a:rPr lang="en-US" sz="1800" dirty="0" err="1" smtClean="0">
+                <a:latin typeface="Cambria" panose="02040503050406030204" pitchFamily="18" charset="0"/>
+                <a:ea typeface="Cambria" panose="02040503050406030204" pitchFamily="18" charset="0"/>
+              </a:rPr>
+              <a:t>stmt.executeUpdate</a:t>
+            </a:r>
+            <a:r>
+              <a:rPr lang="en-US" sz="1800" dirty="0" smtClean="0">
+                <a:latin typeface="Cambria" panose="02040503050406030204" pitchFamily="18" charset="0"/>
+                <a:ea typeface="Cambria" panose="02040503050406030204" pitchFamily="18" charset="0"/>
+              </a:rPr>
+              <a:t>();  </a:t>
             </a:r>
           </a:p>
           <a:p>
@@ -37133,46 +37162,32 @@
               <a:buNone/>
             </a:pPr>
             <a:r>
-              <a:rPr lang="en-US" sz="2000" b="1" dirty="0" err="1" smtClean="0">
-                <a:latin typeface="Cambria" panose="02040503050406030204" pitchFamily="18" charset="0"/>
-                <a:ea typeface="Cambria" panose="02040503050406030204" pitchFamily="18" charset="0"/>
-              </a:rPr>
-              <a:t>int</a:t>
-            </a:r>
-            <a:r>
-              <a:rPr lang="en-US" sz="2000" dirty="0" smtClean="0">
-                <a:latin typeface="Cambria" panose="02040503050406030204" pitchFamily="18" charset="0"/>
-                <a:ea typeface="Cambria" panose="02040503050406030204" pitchFamily="18" charset="0"/>
-              </a:rPr>
-              <a:t> </a:t>
-            </a:r>
-            <a:r>
-              <a:rPr lang="en-US" sz="2000" dirty="0" err="1" smtClean="0">
+              <a:rPr lang="en-US" sz="1800" dirty="0" err="1" smtClean="0">
+                <a:latin typeface="Cambria" panose="02040503050406030204" pitchFamily="18" charset="0"/>
+                <a:ea typeface="Cambria" panose="02040503050406030204" pitchFamily="18" charset="0"/>
+              </a:rPr>
+              <a:t>System.out.println</a:t>
+            </a:r>
+            <a:r>
+              <a:rPr lang="en-US" sz="1800" dirty="0" smtClean="0">
+                <a:latin typeface="Cambria" panose="02040503050406030204" pitchFamily="18" charset="0"/>
+                <a:ea typeface="Cambria" panose="02040503050406030204" pitchFamily="18" charset="0"/>
+              </a:rPr>
+              <a:t>(</a:t>
+            </a:r>
+            <a:r>
+              <a:rPr lang="en-US" sz="1800" dirty="0" err="1" smtClean="0">
                 <a:latin typeface="Cambria" panose="02040503050406030204" pitchFamily="18" charset="0"/>
                 <a:ea typeface="Cambria" panose="02040503050406030204" pitchFamily="18" charset="0"/>
               </a:rPr>
               <a:t>i</a:t>
             </a:r>
             <a:r>
-              <a:rPr lang="en-US" sz="2000" dirty="0" smtClean="0">
-                <a:latin typeface="Cambria" panose="02040503050406030204" pitchFamily="18" charset="0"/>
-                <a:ea typeface="Cambria" panose="02040503050406030204" pitchFamily="18" charset="0"/>
-              </a:rPr>
-              <a:t>=</a:t>
-            </a:r>
-            <a:r>
-              <a:rPr lang="en-US" sz="2000" dirty="0" err="1" smtClean="0">
-                <a:latin typeface="Cambria" panose="02040503050406030204" pitchFamily="18" charset="0"/>
-                <a:ea typeface="Cambria" panose="02040503050406030204" pitchFamily="18" charset="0"/>
-              </a:rPr>
-              <a:t>stmt.executeUpdate</a:t>
-            </a:r>
-            <a:r>
-              <a:rPr lang="en-US" sz="2000" dirty="0" smtClean="0">
-                <a:latin typeface="Cambria" panose="02040503050406030204" pitchFamily="18" charset="0"/>
-                <a:ea typeface="Cambria" panose="02040503050406030204" pitchFamily="18" charset="0"/>
-              </a:rPr>
-              <a:t>();  </a:t>
+              <a:rPr lang="en-US" sz="1800" dirty="0" smtClean="0">
+                <a:latin typeface="Cambria" panose="02040503050406030204" pitchFamily="18" charset="0"/>
+                <a:ea typeface="Cambria" panose="02040503050406030204" pitchFamily="18" charset="0"/>
+              </a:rPr>
+              <a:t>+" records inserted");  </a:t>
             </a:r>
           </a:p>
           <a:p>
@@ -37183,32 +37198,11 @@
               <a:buNone/>
             </a:pPr>
             <a:r>
-              <a:rPr lang="en-US" sz="2000" dirty="0" err="1" smtClean="0">
-                <a:latin typeface="Cambria" panose="02040503050406030204" pitchFamily="18" charset="0"/>
-                <a:ea typeface="Cambria" panose="02040503050406030204" pitchFamily="18" charset="0"/>
-              </a:rPr>
-              <a:t>System.out.println</a:t>
-            </a:r>
-            <a:r>
-              <a:rPr lang="en-US" sz="2000" dirty="0" smtClean="0">
-                <a:latin typeface="Cambria" panose="02040503050406030204" pitchFamily="18" charset="0"/>
-                <a:ea typeface="Cambria" panose="02040503050406030204" pitchFamily="18" charset="0"/>
-              </a:rPr>
-              <a:t>(</a:t>
-            </a:r>
-            <a:r>
-              <a:rPr lang="en-US" sz="2000" dirty="0" err="1" smtClean="0">
-                <a:latin typeface="Cambria" panose="02040503050406030204" pitchFamily="18" charset="0"/>
-                <a:ea typeface="Cambria" panose="02040503050406030204" pitchFamily="18" charset="0"/>
-              </a:rPr>
-              <a:t>i</a:t>
-            </a:r>
-            <a:r>
-              <a:rPr lang="en-US" sz="2000" dirty="0" smtClean="0">
-                <a:latin typeface="Cambria" panose="02040503050406030204" pitchFamily="18" charset="0"/>
-                <a:ea typeface="Cambria" panose="02040503050406030204" pitchFamily="18" charset="0"/>
-              </a:rPr>
-              <a:t>+" records inserted");  </a:t>
+              <a:rPr lang="en-US" sz="1800" dirty="0" smtClean="0">
+                <a:latin typeface="Cambria" panose="02040503050406030204" pitchFamily="18" charset="0"/>
+                <a:ea typeface="Cambria" panose="02040503050406030204" pitchFamily="18" charset="0"/>
+              </a:rPr>
+              <a:t>con.close();    </a:t>
             </a:r>
           </a:p>
           <a:p>
@@ -37219,11 +37213,25 @@
               <a:buNone/>
             </a:pPr>
             <a:r>
-              <a:rPr lang="en-US" sz="2000" dirty="0" smtClean="0">
-                <a:latin typeface="Cambria" panose="02040503050406030204" pitchFamily="18" charset="0"/>
-                <a:ea typeface="Cambria" panose="02040503050406030204" pitchFamily="18" charset="0"/>
-              </a:rPr>
-              <a:t>con.close();    </a:t>
+              <a:rPr lang="en-US" sz="1800" dirty="0" smtClean="0">
+                <a:latin typeface="Cambria" panose="02040503050406030204" pitchFamily="18" charset="0"/>
+                <a:ea typeface="Cambria" panose="02040503050406030204" pitchFamily="18" charset="0"/>
+              </a:rPr>
+              <a:t>}</a:t>
+            </a:r>
+            <a:r>
+              <a:rPr lang="en-US" sz="1800" b="1" dirty="0" smtClean="0">
+                <a:latin typeface="Cambria" panose="02040503050406030204" pitchFamily="18" charset="0"/>
+                <a:ea typeface="Cambria" panose="02040503050406030204" pitchFamily="18" charset="0"/>
+              </a:rPr>
+              <a:t>catch</a:t>
+            </a:r>
+            <a:r>
+              <a:rPr lang="en-US" sz="1800" dirty="0" smtClean="0">
+                <a:latin typeface="Cambria" panose="02040503050406030204" pitchFamily="18" charset="0"/>
+                <a:ea typeface="Cambria" panose="02040503050406030204" pitchFamily="18" charset="0"/>
+              </a:rPr>
+              <a:t>(Exception e){ System.out.println(e);}    </a:t>
             </a:r>
           </a:p>
           <a:p>
@@ -37234,25 +37242,11 @@
               <a:buNone/>
             </a:pPr>
             <a:r>
-              <a:rPr lang="en-US" sz="2000" dirty="0" smtClean="0">
-                <a:latin typeface="Cambria" panose="02040503050406030204" pitchFamily="18" charset="0"/>
-                <a:ea typeface="Cambria" panose="02040503050406030204" pitchFamily="18" charset="0"/>
-              </a:rPr>
-              <a:t>}</a:t>
-            </a:r>
-            <a:r>
-              <a:rPr lang="en-US" sz="2000" b="1" dirty="0" smtClean="0">
-                <a:latin typeface="Cambria" panose="02040503050406030204" pitchFamily="18" charset="0"/>
-                <a:ea typeface="Cambria" panose="02040503050406030204" pitchFamily="18" charset="0"/>
-              </a:rPr>
-              <a:t>catch</a:t>
-            </a:r>
-            <a:r>
-              <a:rPr lang="en-US" sz="2000" dirty="0" smtClean="0">
-                <a:latin typeface="Cambria" panose="02040503050406030204" pitchFamily="18" charset="0"/>
-                <a:ea typeface="Cambria" panose="02040503050406030204" pitchFamily="18" charset="0"/>
-              </a:rPr>
-              <a:t>(Exception e){ System.out.println(e);}    </a:t>
+              <a:rPr lang="en-US" sz="1800" dirty="0" smtClean="0">
+                <a:latin typeface="Cambria" panose="02040503050406030204" pitchFamily="18" charset="0"/>
+                <a:ea typeface="Cambria" panose="02040503050406030204" pitchFamily="18" charset="0"/>
+              </a:rPr>
+              <a:t>}  </a:t>
             </a:r>
           </a:p>
           <a:p>
@@ -37263,7 +37257,7 @@
               <a:buNone/>
             </a:pPr>
             <a:r>
-              <a:rPr lang="en-US" sz="2000" dirty="0" smtClean="0">
+              <a:rPr lang="en-US" sz="1800" dirty="0" smtClean="0">
                 <a:latin typeface="Cambria" panose="02040503050406030204" pitchFamily="18" charset="0"/>
                 <a:ea typeface="Cambria" panose="02040503050406030204" pitchFamily="18" charset="0"/>
               </a:rPr>
@@ -37271,22 +37265,7 @@
             </a:r>
           </a:p>
           <a:p>
-            <a:pPr>
-              <a:spcBef>
-                <a:spcPts val="0"/>
-              </a:spcBef>
-              <a:buNone/>
-            </a:pPr>
-            <a:r>
-              <a:rPr lang="en-US" sz="2000" dirty="0" smtClean="0">
-                <a:latin typeface="Cambria" panose="02040503050406030204" pitchFamily="18" charset="0"/>
-                <a:ea typeface="Cambria" panose="02040503050406030204" pitchFamily="18" charset="0"/>
-              </a:rPr>
-              <a:t>}  </a:t>
-            </a:r>
-          </a:p>
-          <a:p>
-            <a:endParaRPr lang="en-US" dirty="0">
+            <a:endParaRPr lang="en-US" sz="1800" dirty="0">
               <a:latin typeface="Cambria" panose="02040503050406030204" pitchFamily="18" charset="0"/>
               <a:ea typeface="Cambria" panose="02040503050406030204" pitchFamily="18" charset="0"/>
             </a:endParaRPr>
@@ -37718,6 +37697,13 @@
   <p:clrMapOvr>
     <a:masterClrMapping/>
   </p:clrMapOvr>
+  <p:timing>
+    <p:tnLst>
+      <p:par>
+        <p:cTn id="1" dur="indefinite" restart="never" nodeType="tmRoot"/>
+      </p:par>
+    </p:tnLst>
+  </p:timing>
 </p:sld>
 </file>
 
@@ -37775,21 +37761,49 @@
           <a:lstStyle/>
           <a:p>
             <a:r>
-              <a:t>CREATE PROCEDURE getEmployeeByDept(IN dept_name VARCHAR(50))</a:t>
-            </a:r>
-          </a:p>
-          <a:p>
-            <a:r>
+              <a:rPr dirty="0"/>
+              <a:t>CREATE PROCEDURE </a:t>
+            </a:r>
+            <a:r>
+              <a:rPr dirty="0" err="1"/>
+              <a:t>getEmployeeByDept</a:t>
+            </a:r>
+            <a:r>
+              <a:rPr dirty="0"/>
+              <a:t>(IN </a:t>
+            </a:r>
+            <a:r>
+              <a:rPr dirty="0" err="1"/>
+              <a:t>dept_name</a:t>
+            </a:r>
+            <a:r>
+              <a:rPr dirty="0"/>
+              <a:t> VARCHAR(50))</a:t>
+            </a:r>
+          </a:p>
+          <a:p>
+            <a:r>
+              <a:rPr dirty="0"/>
               <a:t>BEGIN</a:t>
             </a:r>
           </a:p>
           <a:p>
             <a:r>
-              <a:t> SELECT * FROM employee WHERE department = dept_name;</a:t>
-            </a:r>
-          </a:p>
-          <a:p>
-            <a:r>
+              <a:rPr dirty="0"/>
+              <a:t> SELECT * FROM employee WHERE department = </a:t>
+            </a:r>
+            <a:r>
+              <a:rPr dirty="0" err="1"/>
+              <a:t>dept_name</a:t>
+            </a:r>
+            <a:r>
+              <a:rPr dirty="0"/>
+              <a:t>;</a:t>
+            </a:r>
+          </a:p>
+          <a:p>
+            <a:r>
+              <a:rPr dirty="0"/>
               <a:t>END;</a:t>
             </a:r>
           </a:p>
@@ -37805,6 +37819,13 @@
   <p:clrMapOvr>
     <a:masterClrMapping/>
   </p:clrMapOvr>
+  <p:timing>
+    <p:tnLst>
+      <p:par>
+        <p:cTn id="1" dur="indefinite" restart="never" nodeType="tmRoot"/>
+      </p:par>
+    </p:tnLst>
+  </p:timing>
 </p:sld>
 </file>
 
@@ -38032,17 +38053,72 @@
           <a:lstStyle/>
           <a:p>
             <a:r>
-              <a:t>CallableStatement cs = con.prepareCall("{call getEmployeeByDept(?)}");</a:t>
-            </a:r>
-          </a:p>
-          <a:p>
-            <a:r>
-              <a:t>cs.setString(1, "IT");</a:t>
-            </a:r>
-          </a:p>
-          <a:p>
-            <a:r>
-              <a:t>ResultSet rs = cs.executeQuery();</a:t>
+              <a:rPr dirty="0" err="1"/>
+              <a:t>CallableStatement</a:t>
+            </a:r>
+            <a:r>
+              <a:rPr dirty="0"/>
+              <a:t> </a:t>
+            </a:r>
+            <a:r>
+              <a:rPr dirty="0" err="1"/>
+              <a:t>cs</a:t>
+            </a:r>
+            <a:r>
+              <a:rPr dirty="0"/>
+              <a:t> = </a:t>
+            </a:r>
+            <a:r>
+              <a:rPr dirty="0" err="1"/>
+              <a:t>con.prepareCall</a:t>
+            </a:r>
+            <a:r>
+              <a:rPr dirty="0"/>
+              <a:t>("{call </a:t>
+            </a:r>
+            <a:r>
+              <a:rPr dirty="0" err="1"/>
+              <a:t>getEmployeeByDept</a:t>
+            </a:r>
+            <a:r>
+              <a:rPr dirty="0"/>
+              <a:t>(?)}");</a:t>
+            </a:r>
+          </a:p>
+          <a:p>
+            <a:r>
+              <a:rPr dirty="0" err="1"/>
+              <a:t>cs.setString</a:t>
+            </a:r>
+            <a:r>
+              <a:rPr dirty="0"/>
+              <a:t>(1, "IT");</a:t>
+            </a:r>
+          </a:p>
+          <a:p>
+            <a:r>
+              <a:rPr dirty="0" err="1"/>
+              <a:t>ResultSet</a:t>
+            </a:r>
+            <a:r>
+              <a:rPr dirty="0"/>
+              <a:t> </a:t>
+            </a:r>
+            <a:r>
+              <a:rPr dirty="0" err="1"/>
+              <a:t>rs</a:t>
+            </a:r>
+            <a:r>
+              <a:rPr dirty="0"/>
+              <a:t> = </a:t>
+            </a:r>
+            <a:r>
+              <a:rPr dirty="0" err="1"/>
+              <a:t>cs.executeQuery</a:t>
+            </a:r>
+            <a:r>
+              <a:rPr dirty="0"/>
+              <a:t>();</a:t>
             </a:r>
           </a:p>
         </p:txBody>
@@ -38057,6 +38133,13 @@
   <p:clrMapOvr>
     <a:masterClrMapping/>
   </p:clrMapOvr>
+  <p:timing>
+    <p:tnLst>
+      <p:par>
+        <p:cTn id="1" dur="indefinite" restart="never" nodeType="tmRoot"/>
+      </p:par>
+    </p:tnLst>
+  </p:timing>
 </p:sld>
 </file>
 
@@ -38413,6 +38496,13 @@
   <p:clrMapOvr>
     <a:masterClrMapping/>
   </p:clrMapOvr>
+  <p:timing>
+    <p:tnLst>
+      <p:par>
+        <p:cTn id="1" dur="indefinite" restart="never" nodeType="tmRoot"/>
+      </p:par>
+    </p:tnLst>
+  </p:timing>
 </p:sld>
 </file>
 
@@ -38522,11 +38612,18 @@
               <a:buNone/>
             </a:pPr>
             <a:r>
+              <a:rPr lang="en-US" sz="2000" b="1" dirty="0">
+                <a:latin typeface="Cambria" panose="02040503050406030204" pitchFamily="18" charset="0"/>
+                <a:ea typeface="Cambria" panose="02040503050406030204" pitchFamily="18" charset="0"/>
+              </a:rPr>
+              <a:t>p</a:t>
+            </a:r>
+            <a:r>
               <a:rPr lang="en-US" sz="2000" b="1" dirty="0" smtClean="0">
                 <a:latin typeface="Cambria" panose="02040503050406030204" pitchFamily="18" charset="0"/>
                 <a:ea typeface="Cambria" panose="02040503050406030204" pitchFamily="18" charset="0"/>
               </a:rPr>
-              <a:t>class</a:t>
+              <a:t>ublic class</a:t>
             </a:r>
             <a:r>
               <a:rPr lang="en-US" sz="2000" dirty="0" smtClean="0">
@@ -38648,7 +38745,42 @@
                 <a:latin typeface="Cambria" panose="02040503050406030204" pitchFamily="18" charset="0"/>
                 <a:ea typeface="Cambria" panose="02040503050406030204" pitchFamily="18" charset="0"/>
               </a:rPr>
-              <a:t>		Class.forName("oracle.jdbc.driver.OracleDriver");  </a:t>
+              <a:t>		</a:t>
+            </a:r>
+            <a:r>
+              <a:rPr lang="en-US" sz="2000" dirty="0" err="1" smtClean="0">
+                <a:latin typeface="Cambria" panose="02040503050406030204" pitchFamily="18" charset="0"/>
+                <a:ea typeface="Cambria" panose="02040503050406030204" pitchFamily="18" charset="0"/>
+              </a:rPr>
+              <a:t>Class.forName</a:t>
+            </a:r>
+            <a:r>
+              <a:rPr lang="en-US" sz="2000" dirty="0" smtClean="0">
+                <a:latin typeface="Cambria" panose="02040503050406030204" pitchFamily="18" charset="0"/>
+                <a:ea typeface="Cambria" panose="02040503050406030204" pitchFamily="18" charset="0"/>
+              </a:rPr>
+              <a:t>(“</a:t>
+            </a:r>
+            <a:r>
+              <a:rPr lang="en-US" sz="2000" dirty="0" err="1" smtClean="0">
+                <a:latin typeface="Cambria" panose="02040503050406030204" pitchFamily="18" charset="0"/>
+                <a:ea typeface="Cambria" panose="02040503050406030204" pitchFamily="18" charset="0"/>
+              </a:rPr>
+              <a:t>com.mysql.jdbc.Driver</a:t>
+            </a:r>
+            <a:r>
+              <a:rPr lang="en-US" sz="2000" dirty="0" smtClean="0">
+                <a:latin typeface="Cambria" panose="02040503050406030204" pitchFamily="18" charset="0"/>
+                <a:ea typeface="Cambria" panose="02040503050406030204" pitchFamily="18" charset="0"/>
+              </a:rPr>
+              <a:t>");</a:t>
+            </a:r>
+            <a:r>
+              <a:rPr lang="en-US" sz="2000" dirty="0" smtClean="0">
+                <a:latin typeface="Cambria" panose="02040503050406030204" pitchFamily="18" charset="0"/>
+                <a:ea typeface="Cambria" panose="02040503050406030204" pitchFamily="18" charset="0"/>
+              </a:rPr>
+              <a:t>  </a:t>
             </a:r>
           </a:p>
           <a:p>
@@ -38678,7 +38810,28 @@
                 <a:latin typeface="Cambria" panose="02040503050406030204" pitchFamily="18" charset="0"/>
                 <a:ea typeface="Cambria" panose="02040503050406030204" pitchFamily="18" charset="0"/>
               </a:rPr>
-              <a:t>		"jdbc:oracle:thin:@localhost:1521:xe","system","oracle");  </a:t>
+              <a:t>		"</a:t>
+            </a:r>
+            <a:r>
+              <a:rPr lang="en-US" sz="2000" dirty="0" err="1" smtClean="0">
+                <a:latin typeface="Cambria" panose="02040503050406030204" pitchFamily="18" charset="0"/>
+                <a:ea typeface="Cambria" panose="02040503050406030204" pitchFamily="18" charset="0"/>
+              </a:rPr>
+              <a:t>jdbc:mysql</a:t>
+            </a:r>
+            <a:r>
+              <a:rPr lang="en-US" sz="2000" dirty="0" smtClean="0">
+                <a:latin typeface="Cambria" panose="02040503050406030204" pitchFamily="18" charset="0"/>
+                <a:ea typeface="Cambria" panose="02040503050406030204" pitchFamily="18" charset="0"/>
+              </a:rPr>
+              <a:t>://@localhost:3306:EmployeeDB",“root",“root");</a:t>
+            </a:r>
+            <a:r>
+              <a:rPr lang="en-US" sz="2000" dirty="0" smtClean="0">
+                <a:latin typeface="Cambria" panose="02040503050406030204" pitchFamily="18" charset="0"/>
+                <a:ea typeface="Cambria" panose="02040503050406030204" pitchFamily="18" charset="0"/>
+              </a:rPr>
+              <a:t>  </a:t>
             </a:r>
           </a:p>
           <a:p>
@@ -38969,8 +39122,8 @@
         </p:nvSpPr>
         <p:spPr>
           <a:xfrm>
-            <a:off x="0" y="0"/>
-            <a:ext cx="4321696" cy="543595"/>
+            <a:off x="5245" y="-28291"/>
+            <a:ext cx="5154651" cy="720987"/>
           </a:xfrm>
         </p:spPr>
         <p:txBody>
@@ -38978,38 +39131,18 @@
           <a:lstStyle/>
           <a:p>
             <a:r>
-              <a:rPr lang="en-GB" sz="4000" b="1" dirty="0" smtClean="0">
-                <a:solidFill>
-                  <a:srgbClr val="FF0000"/>
-                </a:solidFill>
-                <a:latin typeface="Cambria" panose="02040503050406030204" pitchFamily="18" charset="0"/>
-                <a:ea typeface="Cambria" panose="02040503050406030204" pitchFamily="18" charset="0"/>
-              </a:rPr>
-              <a:t>Other </a:t>
-            </a:r>
-            <a:r>
-              <a:rPr lang="en-GB" sz="4000" b="1" dirty="0">
-                <a:solidFill>
-                  <a:srgbClr val="FF0000"/>
-                </a:solidFill>
-                <a:latin typeface="Cambria" panose="02040503050406030204" pitchFamily="18" charset="0"/>
-                <a:ea typeface="Cambria" panose="02040503050406030204" pitchFamily="18" charset="0"/>
-              </a:rPr>
-              <a:t>R</a:t>
-            </a:r>
-            <a:r>
-              <a:rPr lang="en-GB" sz="4000" b="1" dirty="0" smtClean="0">
-                <a:solidFill>
-                  <a:srgbClr val="FF0000"/>
-                </a:solidFill>
-                <a:latin typeface="Cambria" panose="02040503050406030204" pitchFamily="18" charset="0"/>
-                <a:ea typeface="Cambria" panose="02040503050406030204" pitchFamily="18" charset="0"/>
-              </a:rPr>
-              <a:t>eferences</a:t>
+              <a:rPr lang="en-US" sz="4000" b="1" dirty="0" smtClean="0">
+                <a:solidFill>
+                  <a:schemeClr val="accent1"/>
+                </a:solidFill>
+                <a:latin typeface="Cambria" panose="02040503050406030204" pitchFamily="18" charset="0"/>
+                <a:ea typeface="Cambria" panose="02040503050406030204" pitchFamily="18" charset="0"/>
+              </a:rPr>
+              <a:t>ResultSetMetaData</a:t>
             </a:r>
             <a:endParaRPr lang="en-US" sz="4000" b="1" dirty="0">
               <a:solidFill>
-                <a:srgbClr val="FF0000"/>
+                <a:schemeClr val="accent1"/>
               </a:solidFill>
               <a:latin typeface="Cambria" panose="02040503050406030204" pitchFamily="18" charset="0"/>
               <a:ea typeface="Cambria" panose="02040503050406030204" pitchFamily="18" charset="0"/>
@@ -39029,151 +39162,419 @@
         </p:nvSpPr>
         <p:spPr>
           <a:xfrm>
-            <a:off x="551384" y="620688"/>
-            <a:ext cx="10585176" cy="4680520"/>
+            <a:off x="479376" y="692696"/>
+            <a:ext cx="11161240" cy="5544616"/>
           </a:xfrm>
         </p:spPr>
         <p:txBody>
           <a:bodyPr/>
           <a:lstStyle/>
           <a:p>
-            <a:pPr algn="just"/>
-            <a:r>
-              <a:rPr lang="en-US" sz="2400" dirty="0" smtClean="0">
-                <a:latin typeface="Cambria" panose="02040503050406030204" pitchFamily="18" charset="0"/>
-                <a:ea typeface="Cambria" panose="02040503050406030204" pitchFamily="18" charset="0"/>
-                <a:hlinkClick r:id="rId2"/>
-              </a:rPr>
-              <a:t>https://www.javatpoint.com/DatabaseMetaData-interface</a:t>
-            </a:r>
-            <a:endParaRPr lang="en-US" sz="2400" dirty="0" smtClean="0">
-              <a:latin typeface="Cambria" panose="02040503050406030204" pitchFamily="18" charset="0"/>
-              <a:ea typeface="Cambria" panose="02040503050406030204" pitchFamily="18" charset="0"/>
-            </a:endParaRPr>
-          </a:p>
-          <a:p>
-            <a:pPr algn="just"/>
-            <a:r>
-              <a:rPr lang="en-US" sz="2400" dirty="0" smtClean="0">
-                <a:latin typeface="Cambria" panose="02040503050406030204" pitchFamily="18" charset="0"/>
-                <a:ea typeface="Cambria" panose="02040503050406030204" pitchFamily="18" charset="0"/>
-                <a:hlinkClick r:id="rId3"/>
-              </a:rPr>
-              <a:t>https://www.javatpoint.com/storing-image-in-oracle-database</a:t>
-            </a:r>
-            <a:endParaRPr lang="en-US" sz="2400" dirty="0" smtClean="0">
-              <a:latin typeface="Cambria" panose="02040503050406030204" pitchFamily="18" charset="0"/>
-              <a:ea typeface="Cambria" panose="02040503050406030204" pitchFamily="18" charset="0"/>
-            </a:endParaRPr>
-          </a:p>
-          <a:p>
-            <a:pPr algn="just"/>
-            <a:r>
-              <a:rPr lang="en-US" sz="2400" dirty="0" smtClean="0">
-                <a:latin typeface="Cambria" panose="02040503050406030204" pitchFamily="18" charset="0"/>
-                <a:ea typeface="Cambria" panose="02040503050406030204" pitchFamily="18" charset="0"/>
-                <a:hlinkClick r:id="rId3"/>
-              </a:rPr>
-              <a:t>https://www.javatpoint.com/storing-image-in-oracle-database</a:t>
-            </a:r>
-            <a:endParaRPr lang="en-US" sz="2400" dirty="0" smtClean="0">
-              <a:latin typeface="Cambria" panose="02040503050406030204" pitchFamily="18" charset="0"/>
-              <a:ea typeface="Cambria" panose="02040503050406030204" pitchFamily="18" charset="0"/>
-            </a:endParaRPr>
-          </a:p>
-          <a:p>
-            <a:pPr algn="just"/>
-            <a:r>
-              <a:rPr lang="en-US" sz="2400" dirty="0" smtClean="0">
-                <a:latin typeface="Cambria" panose="02040503050406030204" pitchFamily="18" charset="0"/>
-                <a:ea typeface="Cambria" panose="02040503050406030204" pitchFamily="18" charset="0"/>
-                <a:hlinkClick r:id="rId4"/>
-              </a:rPr>
-              <a:t>https://www.javatpoint.com/storing-file-in-oracle-database</a:t>
-            </a:r>
-            <a:endParaRPr lang="en-US" sz="2400" dirty="0" smtClean="0">
-              <a:latin typeface="Cambria" panose="02040503050406030204" pitchFamily="18" charset="0"/>
-              <a:ea typeface="Cambria" panose="02040503050406030204" pitchFamily="18" charset="0"/>
-            </a:endParaRPr>
-          </a:p>
-          <a:p>
-            <a:pPr algn="just"/>
-            <a:r>
-              <a:rPr lang="en-US" sz="2400" dirty="0" smtClean="0">
-                <a:latin typeface="Cambria" panose="02040503050406030204" pitchFamily="18" charset="0"/>
-                <a:ea typeface="Cambria" panose="02040503050406030204" pitchFamily="18" charset="0"/>
-                <a:hlinkClick r:id="rId5"/>
-              </a:rPr>
-              <a:t>https://www.javatpoint.com/retrieving-file-from-oracle-database</a:t>
-            </a:r>
-            <a:endParaRPr lang="en-US" sz="2400" dirty="0" smtClean="0">
-              <a:latin typeface="Cambria" panose="02040503050406030204" pitchFamily="18" charset="0"/>
-              <a:ea typeface="Cambria" panose="02040503050406030204" pitchFamily="18" charset="0"/>
-            </a:endParaRPr>
-          </a:p>
-          <a:p>
-            <a:pPr algn="just"/>
-            <a:r>
-              <a:rPr lang="en-US" sz="2400" dirty="0" smtClean="0">
-                <a:latin typeface="Cambria" panose="02040503050406030204" pitchFamily="18" charset="0"/>
-                <a:ea typeface="Cambria" panose="02040503050406030204" pitchFamily="18" charset="0"/>
-                <a:hlinkClick r:id="rId6"/>
-              </a:rPr>
-              <a:t>https://www.javatpoint.com/CallableStatement-interface</a:t>
-            </a:r>
-            <a:endParaRPr lang="en-US" sz="2400" dirty="0" smtClean="0">
-              <a:latin typeface="Cambria" panose="02040503050406030204" pitchFamily="18" charset="0"/>
-              <a:ea typeface="Cambria" panose="02040503050406030204" pitchFamily="18" charset="0"/>
-            </a:endParaRPr>
-          </a:p>
-          <a:p>
-            <a:pPr algn="just"/>
-            <a:r>
-              <a:rPr lang="en-US" sz="2400" dirty="0" smtClean="0">
-                <a:latin typeface="Cambria" panose="02040503050406030204" pitchFamily="18" charset="0"/>
-                <a:ea typeface="Cambria" panose="02040503050406030204" pitchFamily="18" charset="0"/>
-                <a:hlinkClick r:id="rId7"/>
-              </a:rPr>
-              <a:t>https://www.javatpoint.com/transaction-management-in-jdbc</a:t>
-            </a:r>
-            <a:endParaRPr lang="en-US" sz="2400" dirty="0" smtClean="0">
-              <a:latin typeface="Cambria" panose="02040503050406030204" pitchFamily="18" charset="0"/>
-              <a:ea typeface="Cambria" panose="02040503050406030204" pitchFamily="18" charset="0"/>
-            </a:endParaRPr>
-          </a:p>
-          <a:p>
-            <a:pPr algn="just"/>
-            <a:r>
-              <a:rPr lang="en-US" sz="2400" dirty="0" smtClean="0">
-                <a:latin typeface="Cambria" panose="02040503050406030204" pitchFamily="18" charset="0"/>
-                <a:ea typeface="Cambria" panose="02040503050406030204" pitchFamily="18" charset="0"/>
-                <a:hlinkClick r:id="rId8"/>
-              </a:rPr>
-              <a:t>https://www.javatpoint.com/batch-processing-in-jdbc</a:t>
-            </a:r>
-            <a:endParaRPr lang="en-US" sz="2400" dirty="0" smtClean="0">
-              <a:latin typeface="Cambria" panose="02040503050406030204" pitchFamily="18" charset="0"/>
-              <a:ea typeface="Cambria" panose="02040503050406030204" pitchFamily="18" charset="0"/>
-            </a:endParaRPr>
-          </a:p>
-          <a:p>
-            <a:pPr algn="just"/>
-            <a:r>
-              <a:rPr lang="en-US" sz="2400" dirty="0" smtClean="0">
-                <a:latin typeface="Cambria" panose="02040503050406030204" pitchFamily="18" charset="0"/>
-                <a:ea typeface="Cambria" panose="02040503050406030204" pitchFamily="18" charset="0"/>
-                <a:hlinkClick r:id="rId9"/>
-              </a:rPr>
-              <a:t>https://www.javatpoint.com/jdbc-rowset</a:t>
-            </a:r>
-            <a:endParaRPr lang="en-US" sz="2400" dirty="0" smtClean="0">
-              <a:latin typeface="Cambria" panose="02040503050406030204" pitchFamily="18" charset="0"/>
-              <a:ea typeface="Cambria" panose="02040503050406030204" pitchFamily="18" charset="0"/>
-            </a:endParaRPr>
-          </a:p>
-          <a:p>
-            <a:pPr algn="just"/>
-            <a:endParaRPr lang="en-US" sz="2400" dirty="0">
+            <a:pPr>
+              <a:spcBef>
+                <a:spcPts val="0"/>
+              </a:spcBef>
+              <a:buNone/>
+            </a:pPr>
+            <a:r>
+              <a:rPr lang="en-US" sz="2000" b="1" dirty="0" smtClean="0">
+                <a:latin typeface="Cambria" panose="02040503050406030204" pitchFamily="18" charset="0"/>
+                <a:ea typeface="Cambria" panose="02040503050406030204" pitchFamily="18" charset="0"/>
+              </a:rPr>
+              <a:t>import</a:t>
+            </a:r>
+            <a:r>
+              <a:rPr lang="en-US" sz="2000" dirty="0" smtClean="0">
+                <a:latin typeface="Cambria" panose="02040503050406030204" pitchFamily="18" charset="0"/>
+                <a:ea typeface="Cambria" panose="02040503050406030204" pitchFamily="18" charset="0"/>
+              </a:rPr>
+              <a:t> java.sql.*;  </a:t>
+            </a:r>
+          </a:p>
+          <a:p>
+            <a:pPr>
+              <a:spcBef>
+                <a:spcPts val="0"/>
+              </a:spcBef>
+              <a:buNone/>
+            </a:pPr>
+            <a:r>
+              <a:rPr lang="en-US" sz="2000" b="1">
+                <a:latin typeface="Cambria" panose="02040503050406030204" pitchFamily="18" charset="0"/>
+                <a:ea typeface="Cambria" panose="02040503050406030204" pitchFamily="18" charset="0"/>
+              </a:rPr>
+              <a:t>p</a:t>
+            </a:r>
+            <a:r>
+              <a:rPr lang="en-US" sz="2000" b="1" smtClean="0">
+                <a:latin typeface="Cambria" panose="02040503050406030204" pitchFamily="18" charset="0"/>
+                <a:ea typeface="Cambria" panose="02040503050406030204" pitchFamily="18" charset="0"/>
+              </a:rPr>
+              <a:t>ublic </a:t>
+            </a:r>
+            <a:r>
+              <a:rPr lang="en-US" sz="2000" b="1" dirty="0" smtClean="0">
+                <a:latin typeface="Cambria" panose="02040503050406030204" pitchFamily="18" charset="0"/>
+                <a:ea typeface="Cambria" panose="02040503050406030204" pitchFamily="18" charset="0"/>
+              </a:rPr>
+              <a:t>class</a:t>
+            </a:r>
+            <a:r>
+              <a:rPr lang="en-US" sz="2000" dirty="0" smtClean="0">
+                <a:latin typeface="Cambria" panose="02040503050406030204" pitchFamily="18" charset="0"/>
+                <a:ea typeface="Cambria" panose="02040503050406030204" pitchFamily="18" charset="0"/>
+              </a:rPr>
+              <a:t> </a:t>
+            </a:r>
+            <a:r>
+              <a:rPr lang="en-US" sz="2000" dirty="0" err="1" smtClean="0">
+                <a:latin typeface="Cambria" panose="02040503050406030204" pitchFamily="18" charset="0"/>
+                <a:ea typeface="Cambria" panose="02040503050406030204" pitchFamily="18" charset="0"/>
+              </a:rPr>
+              <a:t>Rsmd</a:t>
+            </a:r>
+            <a:r>
+              <a:rPr lang="en-US" sz="2000" dirty="0" smtClean="0">
+                <a:latin typeface="Cambria" panose="02040503050406030204" pitchFamily="18" charset="0"/>
+                <a:ea typeface="Cambria" panose="02040503050406030204" pitchFamily="18" charset="0"/>
+              </a:rPr>
+              <a:t>{  </a:t>
+            </a:r>
+          </a:p>
+          <a:p>
+            <a:pPr>
+              <a:spcBef>
+                <a:spcPts val="0"/>
+              </a:spcBef>
+              <a:buNone/>
+            </a:pPr>
+            <a:r>
+              <a:rPr lang="en-US" sz="2000" b="1" dirty="0" smtClean="0">
+                <a:latin typeface="Cambria" panose="02040503050406030204" pitchFamily="18" charset="0"/>
+                <a:ea typeface="Cambria" panose="02040503050406030204" pitchFamily="18" charset="0"/>
+              </a:rPr>
+              <a:t>public</a:t>
+            </a:r>
+            <a:r>
+              <a:rPr lang="en-US" sz="2000" dirty="0" smtClean="0">
+                <a:latin typeface="Cambria" panose="02040503050406030204" pitchFamily="18" charset="0"/>
+                <a:ea typeface="Cambria" panose="02040503050406030204" pitchFamily="18" charset="0"/>
+              </a:rPr>
+              <a:t> </a:t>
+            </a:r>
+            <a:r>
+              <a:rPr lang="en-US" sz="2000" b="1" dirty="0" smtClean="0">
+                <a:latin typeface="Cambria" panose="02040503050406030204" pitchFamily="18" charset="0"/>
+                <a:ea typeface="Cambria" panose="02040503050406030204" pitchFamily="18" charset="0"/>
+              </a:rPr>
+              <a:t>static</a:t>
+            </a:r>
+            <a:r>
+              <a:rPr lang="en-US" sz="2000" dirty="0" smtClean="0">
+                <a:latin typeface="Cambria" panose="02040503050406030204" pitchFamily="18" charset="0"/>
+                <a:ea typeface="Cambria" panose="02040503050406030204" pitchFamily="18" charset="0"/>
+              </a:rPr>
+              <a:t> </a:t>
+            </a:r>
+            <a:r>
+              <a:rPr lang="en-US" sz="2000" b="1" dirty="0" smtClean="0">
+                <a:latin typeface="Cambria" panose="02040503050406030204" pitchFamily="18" charset="0"/>
+                <a:ea typeface="Cambria" panose="02040503050406030204" pitchFamily="18" charset="0"/>
+              </a:rPr>
+              <a:t>void</a:t>
+            </a:r>
+            <a:r>
+              <a:rPr lang="en-US" sz="2000" dirty="0" smtClean="0">
+                <a:latin typeface="Cambria" panose="02040503050406030204" pitchFamily="18" charset="0"/>
+                <a:ea typeface="Cambria" panose="02040503050406030204" pitchFamily="18" charset="0"/>
+              </a:rPr>
+              <a:t> main(String </a:t>
+            </a:r>
+            <a:r>
+              <a:rPr lang="en-US" sz="2000" dirty="0" err="1" smtClean="0">
+                <a:latin typeface="Cambria" panose="02040503050406030204" pitchFamily="18" charset="0"/>
+                <a:ea typeface="Cambria" panose="02040503050406030204" pitchFamily="18" charset="0"/>
+              </a:rPr>
+              <a:t>args</a:t>
+            </a:r>
+            <a:r>
+              <a:rPr lang="en-US" sz="2000" dirty="0" smtClean="0">
+                <a:latin typeface="Cambria" panose="02040503050406030204" pitchFamily="18" charset="0"/>
+                <a:ea typeface="Cambria" panose="02040503050406030204" pitchFamily="18" charset="0"/>
+              </a:rPr>
+              <a:t>[]){  </a:t>
+            </a:r>
+          </a:p>
+          <a:p>
+            <a:pPr>
+              <a:spcBef>
+                <a:spcPts val="0"/>
+              </a:spcBef>
+              <a:buNone/>
+            </a:pPr>
+            <a:r>
+              <a:rPr lang="en-US" sz="2000" b="1" dirty="0" smtClean="0">
+                <a:latin typeface="Cambria" panose="02040503050406030204" pitchFamily="18" charset="0"/>
+                <a:ea typeface="Cambria" panose="02040503050406030204" pitchFamily="18" charset="0"/>
+              </a:rPr>
+              <a:t>	try</a:t>
+            </a:r>
+            <a:r>
+              <a:rPr lang="en-US" sz="2000" dirty="0" smtClean="0">
+                <a:latin typeface="Cambria" panose="02040503050406030204" pitchFamily="18" charset="0"/>
+                <a:ea typeface="Cambria" panose="02040503050406030204" pitchFamily="18" charset="0"/>
+              </a:rPr>
+              <a:t>{  </a:t>
+            </a:r>
+          </a:p>
+          <a:p>
+            <a:pPr>
+              <a:spcBef>
+                <a:spcPts val="0"/>
+              </a:spcBef>
+              <a:buNone/>
+            </a:pPr>
+            <a:r>
+              <a:rPr lang="en-US" sz="2000" dirty="0" smtClean="0">
+                <a:latin typeface="Cambria" panose="02040503050406030204" pitchFamily="18" charset="0"/>
+                <a:ea typeface="Cambria" panose="02040503050406030204" pitchFamily="18" charset="0"/>
+              </a:rPr>
+              <a:t>		Class.forName("oracle.jdbc.driver.OracleDriver");  </a:t>
+            </a:r>
+          </a:p>
+          <a:p>
+            <a:pPr>
+              <a:spcBef>
+                <a:spcPts val="0"/>
+              </a:spcBef>
+              <a:buNone/>
+            </a:pPr>
+            <a:r>
+              <a:rPr lang="en-US" sz="2000" dirty="0" smtClean="0">
+                <a:latin typeface="Cambria" panose="02040503050406030204" pitchFamily="18" charset="0"/>
+                <a:ea typeface="Cambria" panose="02040503050406030204" pitchFamily="18" charset="0"/>
+              </a:rPr>
+              <a:t>		Connection con=DriverManager.getConnection(  </a:t>
+            </a:r>
+          </a:p>
+          <a:p>
+            <a:pPr>
+              <a:spcBef>
+                <a:spcPts val="0"/>
+              </a:spcBef>
+              <a:buNone/>
+            </a:pPr>
+            <a:r>
+              <a:rPr lang="en-US" sz="2000" dirty="0" smtClean="0">
+                <a:latin typeface="Cambria" panose="02040503050406030204" pitchFamily="18" charset="0"/>
+                <a:ea typeface="Cambria" panose="02040503050406030204" pitchFamily="18" charset="0"/>
+              </a:rPr>
+              <a:t>		"jdbc:oracle:thin:@localhost:1521:xe","system","oracle");  </a:t>
+            </a:r>
+          </a:p>
+          <a:p>
+            <a:pPr>
+              <a:spcBef>
+                <a:spcPts val="0"/>
+              </a:spcBef>
+              <a:buNone/>
+            </a:pPr>
+            <a:r>
+              <a:rPr lang="en-US" sz="2000" dirty="0" smtClean="0">
+                <a:latin typeface="Cambria" panose="02040503050406030204" pitchFamily="18" charset="0"/>
+                <a:ea typeface="Cambria" panose="02040503050406030204" pitchFamily="18" charset="0"/>
+              </a:rPr>
+              <a:t>  </a:t>
+            </a:r>
+          </a:p>
+          <a:p>
+            <a:pPr>
+              <a:spcBef>
+                <a:spcPts val="0"/>
+              </a:spcBef>
+              <a:buNone/>
+            </a:pPr>
+            <a:r>
+              <a:rPr lang="en-US" sz="2000" dirty="0" smtClean="0">
+                <a:latin typeface="Cambria" panose="02040503050406030204" pitchFamily="18" charset="0"/>
+                <a:ea typeface="Cambria" panose="02040503050406030204" pitchFamily="18" charset="0"/>
+              </a:rPr>
+              <a:t>		PreparedStatement ps=con.prepareStatement("select * from emp");  </a:t>
+            </a:r>
+          </a:p>
+          <a:p>
+            <a:pPr>
+              <a:spcBef>
+                <a:spcPts val="0"/>
+              </a:spcBef>
+              <a:buNone/>
+            </a:pPr>
+            <a:r>
+              <a:rPr lang="en-US" sz="2000" dirty="0" smtClean="0">
+                <a:latin typeface="Cambria" panose="02040503050406030204" pitchFamily="18" charset="0"/>
+                <a:ea typeface="Cambria" panose="02040503050406030204" pitchFamily="18" charset="0"/>
+              </a:rPr>
+              <a:t>		ResultSet rs=ps.executeQuery();  </a:t>
+            </a:r>
+          </a:p>
+          <a:p>
+            <a:pPr>
+              <a:spcBef>
+                <a:spcPts val="0"/>
+              </a:spcBef>
+              <a:buNone/>
+            </a:pPr>
+            <a:r>
+              <a:rPr lang="en-US" sz="2000" dirty="0" smtClean="0">
+                <a:latin typeface="Cambria" panose="02040503050406030204" pitchFamily="18" charset="0"/>
+                <a:ea typeface="Cambria" panose="02040503050406030204" pitchFamily="18" charset="0"/>
+              </a:rPr>
+              <a:t>		ResultSetMetaData rsmd=rs.getMetaData();  </a:t>
+            </a:r>
+          </a:p>
+          <a:p>
+            <a:pPr>
+              <a:spcBef>
+                <a:spcPts val="0"/>
+              </a:spcBef>
+              <a:buNone/>
+            </a:pPr>
+            <a:r>
+              <a:rPr lang="en-US" sz="2000" dirty="0" smtClean="0">
+                <a:latin typeface="Cambria" panose="02040503050406030204" pitchFamily="18" charset="0"/>
+                <a:ea typeface="Cambria" panose="02040503050406030204" pitchFamily="18" charset="0"/>
+              </a:rPr>
+              <a:t>  </a:t>
+            </a:r>
+          </a:p>
+          <a:p>
+            <a:pPr>
+              <a:spcBef>
+                <a:spcPts val="0"/>
+              </a:spcBef>
+              <a:buNone/>
+            </a:pPr>
+            <a:r>
+              <a:rPr lang="en-US" sz="2000" dirty="0" smtClean="0">
+                <a:latin typeface="Cambria" panose="02040503050406030204" pitchFamily="18" charset="0"/>
+                <a:ea typeface="Cambria" panose="02040503050406030204" pitchFamily="18" charset="0"/>
+              </a:rPr>
+              <a:t>		System.out.println("Total columns: "+rsmd.getColumnCount());  </a:t>
+            </a:r>
+          </a:p>
+          <a:p>
+            <a:pPr>
+              <a:spcBef>
+                <a:spcPts val="0"/>
+              </a:spcBef>
+              <a:buNone/>
+            </a:pPr>
+            <a:r>
+              <a:rPr lang="en-US" sz="2000" dirty="0" smtClean="0">
+                <a:latin typeface="Cambria" panose="02040503050406030204" pitchFamily="18" charset="0"/>
+                <a:ea typeface="Cambria" panose="02040503050406030204" pitchFamily="18" charset="0"/>
+              </a:rPr>
+              <a:t>		System.out.println("Column Name of 1st column: "+rsmd.getColumnName(1));  </a:t>
+            </a:r>
+          </a:p>
+          <a:p>
+            <a:pPr>
+              <a:spcBef>
+                <a:spcPts val="0"/>
+              </a:spcBef>
+              <a:buNone/>
+            </a:pPr>
+            <a:r>
+              <a:rPr lang="en-US" sz="2000" dirty="0" smtClean="0">
+                <a:latin typeface="Cambria" panose="02040503050406030204" pitchFamily="18" charset="0"/>
+                <a:ea typeface="Cambria" panose="02040503050406030204" pitchFamily="18" charset="0"/>
+              </a:rPr>
+              <a:t>		System.out.println("Column Type Name of 1st column: "+rsmd.getColumnTypeName(1));  </a:t>
+            </a:r>
+          </a:p>
+          <a:p>
+            <a:pPr>
+              <a:spcBef>
+                <a:spcPts val="0"/>
+              </a:spcBef>
+              <a:buNone/>
+            </a:pPr>
+            <a:r>
+              <a:rPr lang="en-US" sz="2000" dirty="0" smtClean="0">
+                <a:latin typeface="Cambria" panose="02040503050406030204" pitchFamily="18" charset="0"/>
+                <a:ea typeface="Cambria" panose="02040503050406030204" pitchFamily="18" charset="0"/>
+              </a:rPr>
+              <a:t>  		con.close();  </a:t>
+            </a:r>
+          </a:p>
+          <a:p>
+            <a:pPr>
+              <a:spcBef>
+                <a:spcPts val="0"/>
+              </a:spcBef>
+              <a:buNone/>
+            </a:pPr>
+            <a:r>
+              <a:rPr lang="en-US" sz="2000" dirty="0" smtClean="0">
+                <a:latin typeface="Cambria" panose="02040503050406030204" pitchFamily="18" charset="0"/>
+                <a:ea typeface="Cambria" panose="02040503050406030204" pitchFamily="18" charset="0"/>
+              </a:rPr>
+              <a:t>	}</a:t>
+            </a:r>
+            <a:r>
+              <a:rPr lang="en-US" sz="2000" b="1" dirty="0" smtClean="0">
+                <a:latin typeface="Cambria" panose="02040503050406030204" pitchFamily="18" charset="0"/>
+                <a:ea typeface="Cambria" panose="02040503050406030204" pitchFamily="18" charset="0"/>
+              </a:rPr>
+              <a:t>catch</a:t>
+            </a:r>
+            <a:r>
+              <a:rPr lang="en-US" sz="2000" dirty="0" smtClean="0">
+                <a:latin typeface="Cambria" panose="02040503050406030204" pitchFamily="18" charset="0"/>
+                <a:ea typeface="Cambria" panose="02040503050406030204" pitchFamily="18" charset="0"/>
+              </a:rPr>
+              <a:t>(Exception e){ System.out.println(e);}  </a:t>
+            </a:r>
+          </a:p>
+          <a:p>
+            <a:pPr>
+              <a:spcBef>
+                <a:spcPts val="0"/>
+              </a:spcBef>
+              <a:buNone/>
+            </a:pPr>
+            <a:r>
+              <a:rPr lang="en-US" sz="2000" dirty="0">
+                <a:latin typeface="Cambria" panose="02040503050406030204" pitchFamily="18" charset="0"/>
+                <a:ea typeface="Cambria" panose="02040503050406030204" pitchFamily="18" charset="0"/>
+              </a:rPr>
+              <a:t> </a:t>
+            </a:r>
+            <a:r>
+              <a:rPr lang="en-US" sz="2000" dirty="0" smtClean="0">
+                <a:latin typeface="Cambria" panose="02040503050406030204" pitchFamily="18" charset="0"/>
+                <a:ea typeface="Cambria" panose="02040503050406030204" pitchFamily="18" charset="0"/>
+              </a:rPr>
+              <a:t> }  </a:t>
+            </a:r>
+          </a:p>
+          <a:p>
+            <a:pPr>
+              <a:spcBef>
+                <a:spcPts val="0"/>
+              </a:spcBef>
+              <a:buNone/>
+            </a:pPr>
+            <a:r>
+              <a:rPr lang="en-US" sz="2000" dirty="0" smtClean="0">
+                <a:latin typeface="Cambria" panose="02040503050406030204" pitchFamily="18" charset="0"/>
+                <a:ea typeface="Cambria" panose="02040503050406030204" pitchFamily="18" charset="0"/>
+              </a:rPr>
+              <a:t>}  </a:t>
+            </a:r>
+          </a:p>
+          <a:p>
+            <a:endParaRPr lang="en-US" dirty="0">
               <a:latin typeface="Cambria" panose="02040503050406030204" pitchFamily="18" charset="0"/>
               <a:ea typeface="Cambria" panose="02040503050406030204" pitchFamily="18" charset="0"/>
             </a:endParaRPr>
@@ -39216,6 +39617,11 @@
         </p:txBody>
       </p:sp>
     </p:spTree>
+    <p:extLst>
+      <p:ext uri="{BB962C8B-B14F-4D97-AF65-F5344CB8AC3E}">
+        <p14:creationId xmlns:p14="http://schemas.microsoft.com/office/powerpoint/2010/main" val="993567479"/>
+      </p:ext>
+    </p:extLst>
   </p:cSld>
   <p:clrMapOvr>
     <a:masterClrMapping/>
@@ -39257,16 +39663,53 @@
             <p:ph type="title"/>
           </p:nvPr>
         </p:nvSpPr>
-        <p:spPr/>
+        <p:spPr>
+          <a:xfrm>
+            <a:off x="0" y="0"/>
+            <a:ext cx="4321696" cy="543595"/>
+          </a:xfrm>
+        </p:spPr>
         <p:txBody>
           <a:bodyPr/>
           <a:lstStyle/>
           <a:p>
             <a:r>
-              <a:rPr lang="en-US" dirty="0" smtClean="0"/>
-              <a:t>Oracle</a:t>
-            </a:r>
-            <a:endParaRPr lang="en-US" dirty="0"/>
+              <a:rPr lang="en-GB" sz="4000" b="1" dirty="0" smtClean="0">
+                <a:solidFill>
+                  <a:srgbClr val="FF0000"/>
+                </a:solidFill>
+                <a:latin typeface="Cambria" panose="02040503050406030204" pitchFamily="18" charset="0"/>
+                <a:ea typeface="Cambria" panose="02040503050406030204" pitchFamily="18" charset="0"/>
+              </a:rPr>
+              <a:t>Other </a:t>
+            </a:r>
+            <a:r>
+              <a:rPr lang="en-GB" sz="4000" b="1" dirty="0">
+                <a:solidFill>
+                  <a:srgbClr val="FF0000"/>
+                </a:solidFill>
+                <a:latin typeface="Cambria" panose="02040503050406030204" pitchFamily="18" charset="0"/>
+                <a:ea typeface="Cambria" panose="02040503050406030204" pitchFamily="18" charset="0"/>
+              </a:rPr>
+              <a:t>R</a:t>
+            </a:r>
+            <a:r>
+              <a:rPr lang="en-GB" sz="4000" b="1" dirty="0" smtClean="0">
+                <a:solidFill>
+                  <a:srgbClr val="FF0000"/>
+                </a:solidFill>
+                <a:latin typeface="Cambria" panose="02040503050406030204" pitchFamily="18" charset="0"/>
+                <a:ea typeface="Cambria" panose="02040503050406030204" pitchFamily="18" charset="0"/>
+              </a:rPr>
+              <a:t>eferences</a:t>
+            </a:r>
+            <a:endParaRPr lang="en-US" sz="4000" b="1" dirty="0">
+              <a:solidFill>
+                <a:srgbClr val="FF0000"/>
+              </a:solidFill>
+              <a:latin typeface="Cambria" panose="02040503050406030204" pitchFamily="18" charset="0"/>
+              <a:ea typeface="Cambria" panose="02040503050406030204" pitchFamily="18" charset="0"/>
+            </a:endParaRPr>
           </a:p>
         </p:txBody>
       </p:sp>
@@ -39282,169 +39725,154 @@
         </p:nvSpPr>
         <p:spPr>
           <a:xfrm>
-            <a:off x="838200" y="1285860"/>
-            <a:ext cx="10515600" cy="4891103"/>
+            <a:off x="551384" y="620688"/>
+            <a:ext cx="10585176" cy="4680520"/>
           </a:xfrm>
         </p:spPr>
         <p:txBody>
           <a:bodyPr/>
           <a:lstStyle/>
           <a:p>
-            <a:r>
-              <a:rPr lang="en-GB" sz="2000" dirty="0" smtClean="0"/>
-              <a:t> To connect java application with the Oracle database ojdbc14.jar file is required to be loaded.</a:t>
-            </a:r>
-          </a:p>
-          <a:p>
-            <a:r>
-              <a:rPr lang="en-GB" sz="2000" dirty="0" smtClean="0">
+            <a:pPr algn="just"/>
+            <a:r>
+              <a:rPr lang="en-US" sz="2400" dirty="0" smtClean="0">
+                <a:latin typeface="Cambria" panose="02040503050406030204" pitchFamily="18" charset="0"/>
+                <a:ea typeface="Cambria" panose="02040503050406030204" pitchFamily="18" charset="0"/>
                 <a:hlinkClick r:id="rId2"/>
               </a:rPr>
-              <a:t>download the jar file ojdbc14.jar</a:t>
-            </a:r>
-            <a:endParaRPr lang="en-GB" sz="2000" dirty="0" smtClean="0"/>
-          </a:p>
-          <a:p>
-            <a:r>
-              <a:rPr lang="en-GB" sz="2000" dirty="0" smtClean="0"/>
-              <a:t>Two ways to load the jar file:</a:t>
-            </a:r>
-          </a:p>
-          <a:p>
-            <a:r>
-              <a:rPr lang="en-GB" sz="2000" dirty="0" smtClean="0"/>
-              <a:t>paste the ojdbc14.jar file in </a:t>
-            </a:r>
-            <a:r>
-              <a:rPr lang="en-GB" sz="2000" dirty="0" err="1" smtClean="0"/>
-              <a:t>jre</a:t>
-            </a:r>
-            <a:r>
-              <a:rPr lang="en-GB" sz="2000" dirty="0" smtClean="0"/>
-              <a:t>/lib/ext folder</a:t>
-            </a:r>
-          </a:p>
-          <a:p>
-            <a:r>
-              <a:rPr lang="en-GB" sz="2000" dirty="0" smtClean="0"/>
-              <a:t>set </a:t>
-            </a:r>
-            <a:r>
-              <a:rPr lang="en-GB" sz="2000" dirty="0" err="1" smtClean="0"/>
-              <a:t>classpath</a:t>
-            </a:r>
-            <a:endParaRPr lang="en-GB" sz="2000" dirty="0" smtClean="0"/>
-          </a:p>
-          <a:p>
-            <a:r>
-              <a:rPr lang="en-GB" sz="2000" dirty="0" smtClean="0"/>
-              <a:t>1) paste the ojdbc14.jar file in JRE/lib/ext folder:</a:t>
-            </a:r>
-          </a:p>
-          <a:p>
-            <a:r>
-              <a:rPr lang="en-GB" sz="2000" dirty="0" smtClean="0"/>
-              <a:t>Firstly, search the ojdbc14.jar file then go to JRE/lib/ext folder and paste the jar file here.2) set </a:t>
-            </a:r>
-            <a:r>
-              <a:rPr lang="en-GB" sz="2000" dirty="0" err="1" smtClean="0"/>
-              <a:t>classpath</a:t>
-            </a:r>
-            <a:r>
-              <a:rPr lang="en-GB" sz="2000" dirty="0" smtClean="0"/>
-              <a:t>:</a:t>
-            </a:r>
-          </a:p>
-          <a:p>
-            <a:r>
-              <a:rPr lang="en-GB" sz="2000" dirty="0" smtClean="0"/>
-              <a:t>There are two ways to set the </a:t>
-            </a:r>
-            <a:r>
-              <a:rPr lang="en-GB" sz="2000" dirty="0" err="1" smtClean="0"/>
-              <a:t>classpath:temporary</a:t>
-            </a:r>
-            <a:endParaRPr lang="en-GB" sz="2000" dirty="0" smtClean="0"/>
-          </a:p>
-          <a:p>
-            <a:r>
-              <a:rPr lang="en-GB" sz="2000" dirty="0" smtClean="0"/>
-              <a:t>permanent</a:t>
-            </a:r>
-          </a:p>
-          <a:p>
-            <a:r>
-              <a:rPr lang="en-GB" sz="2000" dirty="0" smtClean="0"/>
-              <a:t>How to set the temporary </a:t>
-            </a:r>
-            <a:r>
-              <a:rPr lang="en-GB" sz="2000" dirty="0" err="1" smtClean="0"/>
-              <a:t>classpath</a:t>
-            </a:r>
-            <a:r>
-              <a:rPr lang="en-GB" sz="2000" dirty="0" smtClean="0"/>
-              <a:t>:</a:t>
-            </a:r>
-          </a:p>
-          <a:p>
-            <a:r>
-              <a:rPr lang="en-GB" sz="2000" dirty="0" smtClean="0"/>
-              <a:t>Firstly, search the ojdbc14.jar file then open command prompt and write:</a:t>
-            </a:r>
-          </a:p>
-          <a:p>
-            <a:r>
-              <a:rPr lang="en-GB" sz="2000" dirty="0" smtClean="0"/>
-              <a:t>C:&gt;set </a:t>
-            </a:r>
-            <a:r>
-              <a:rPr lang="en-GB" sz="2000" dirty="0" err="1" smtClean="0"/>
-              <a:t>classpath</a:t>
-            </a:r>
-            <a:r>
-              <a:rPr lang="en-GB" sz="2000" dirty="0" smtClean="0"/>
-              <a:t>=c:\folder\ojdbc14.jar;.;  </a:t>
-            </a:r>
-          </a:p>
-          <a:p>
-            <a:r>
-              <a:rPr lang="en-GB" sz="2000" dirty="0" smtClean="0"/>
-              <a:t>How to set the permanent </a:t>
-            </a:r>
-            <a:r>
-              <a:rPr lang="en-GB" sz="2000" dirty="0" err="1" smtClean="0"/>
-              <a:t>classpath</a:t>
-            </a:r>
-            <a:r>
-              <a:rPr lang="en-GB" sz="2000" dirty="0" smtClean="0"/>
-              <a:t>:</a:t>
-            </a:r>
-          </a:p>
-          <a:p>
-            <a:r>
-              <a:rPr lang="en-GB" sz="2000" dirty="0" smtClean="0"/>
-              <a:t>Go to environment variable then click on new tab. In variable name write </a:t>
-            </a:r>
-            <a:r>
-              <a:rPr lang="en-GB" sz="2000" b="1" dirty="0" err="1" smtClean="0"/>
-              <a:t>classpath</a:t>
-            </a:r>
-            <a:r>
-              <a:rPr lang="en-GB" sz="2000" dirty="0" smtClean="0"/>
-              <a:t> and in variable value paste the path to ojdbc14.jar by appending ojdbc14.jar;.; as C:\oraclexe\app\oracle\product\10.2.0\server\jdbc\lib\ojdbc14.jar;.;</a:t>
-            </a:r>
-          </a:p>
-          <a:p>
-            <a:pPr>
-              <a:buNone/>
-            </a:pPr>
-            <a:endParaRPr lang="en-GB" dirty="0" smtClean="0"/>
-          </a:p>
-          <a:p>
-            <a:pPr>
-              <a:buNone/>
-            </a:pPr>
-            <a:endParaRPr lang="en-US" dirty="0"/>
+              <a:t>https://www.javatpoint.com/DatabaseMetaData-interface</a:t>
+            </a:r>
+            <a:endParaRPr lang="en-US" sz="2400" dirty="0" smtClean="0">
+              <a:latin typeface="Cambria" panose="02040503050406030204" pitchFamily="18" charset="0"/>
+              <a:ea typeface="Cambria" panose="02040503050406030204" pitchFamily="18" charset="0"/>
+            </a:endParaRPr>
+          </a:p>
+          <a:p>
+            <a:pPr algn="just"/>
+            <a:r>
+              <a:rPr lang="en-US" sz="2400" dirty="0" smtClean="0">
+                <a:latin typeface="Cambria" panose="02040503050406030204" pitchFamily="18" charset="0"/>
+                <a:ea typeface="Cambria" panose="02040503050406030204" pitchFamily="18" charset="0"/>
+                <a:hlinkClick r:id="rId3"/>
+              </a:rPr>
+              <a:t>https://www.javatpoint.com/storing-image-in-oracle-database</a:t>
+            </a:r>
+            <a:endParaRPr lang="en-US" sz="2400" dirty="0" smtClean="0">
+              <a:latin typeface="Cambria" panose="02040503050406030204" pitchFamily="18" charset="0"/>
+              <a:ea typeface="Cambria" panose="02040503050406030204" pitchFamily="18" charset="0"/>
+            </a:endParaRPr>
+          </a:p>
+          <a:p>
+            <a:pPr algn="just"/>
+            <a:r>
+              <a:rPr lang="en-US" sz="2400" dirty="0" smtClean="0">
+                <a:latin typeface="Cambria" panose="02040503050406030204" pitchFamily="18" charset="0"/>
+                <a:ea typeface="Cambria" panose="02040503050406030204" pitchFamily="18" charset="0"/>
+                <a:hlinkClick r:id="rId3"/>
+              </a:rPr>
+              <a:t>https://www.javatpoint.com/storing-image-in-oracle-database</a:t>
+            </a:r>
+            <a:endParaRPr lang="en-US" sz="2400" dirty="0" smtClean="0">
+              <a:latin typeface="Cambria" panose="02040503050406030204" pitchFamily="18" charset="0"/>
+              <a:ea typeface="Cambria" panose="02040503050406030204" pitchFamily="18" charset="0"/>
+            </a:endParaRPr>
+          </a:p>
+          <a:p>
+            <a:pPr algn="just"/>
+            <a:r>
+              <a:rPr lang="en-US" sz="2400" dirty="0" smtClean="0">
+                <a:latin typeface="Cambria" panose="02040503050406030204" pitchFamily="18" charset="0"/>
+                <a:ea typeface="Cambria" panose="02040503050406030204" pitchFamily="18" charset="0"/>
+                <a:hlinkClick r:id="rId4"/>
+              </a:rPr>
+              <a:t>https://www.javatpoint.com/storing-file-in-oracle-database</a:t>
+            </a:r>
+            <a:endParaRPr lang="en-US" sz="2400" dirty="0" smtClean="0">
+              <a:latin typeface="Cambria" panose="02040503050406030204" pitchFamily="18" charset="0"/>
+              <a:ea typeface="Cambria" panose="02040503050406030204" pitchFamily="18" charset="0"/>
+            </a:endParaRPr>
+          </a:p>
+          <a:p>
+            <a:pPr algn="just"/>
+            <a:r>
+              <a:rPr lang="en-US" sz="2400" dirty="0" smtClean="0">
+                <a:latin typeface="Cambria" panose="02040503050406030204" pitchFamily="18" charset="0"/>
+                <a:ea typeface="Cambria" panose="02040503050406030204" pitchFamily="18" charset="0"/>
+                <a:hlinkClick r:id="rId5"/>
+              </a:rPr>
+              <a:t>https://www.javatpoint.com/retrieving-file-from-oracle-database</a:t>
+            </a:r>
+            <a:endParaRPr lang="en-US" sz="2400" dirty="0" smtClean="0">
+              <a:latin typeface="Cambria" panose="02040503050406030204" pitchFamily="18" charset="0"/>
+              <a:ea typeface="Cambria" panose="02040503050406030204" pitchFamily="18" charset="0"/>
+            </a:endParaRPr>
+          </a:p>
+          <a:p>
+            <a:pPr algn="just"/>
+            <a:r>
+              <a:rPr lang="en-US" sz="2400" dirty="0" smtClean="0">
+                <a:latin typeface="Cambria" panose="02040503050406030204" pitchFamily="18" charset="0"/>
+                <a:ea typeface="Cambria" panose="02040503050406030204" pitchFamily="18" charset="0"/>
+                <a:hlinkClick r:id="rId6"/>
+              </a:rPr>
+              <a:t>https://www.javatpoint.com/CallableStatement-interface</a:t>
+            </a:r>
+            <a:endParaRPr lang="en-US" sz="2400" dirty="0" smtClean="0">
+              <a:latin typeface="Cambria" panose="02040503050406030204" pitchFamily="18" charset="0"/>
+              <a:ea typeface="Cambria" panose="02040503050406030204" pitchFamily="18" charset="0"/>
+            </a:endParaRPr>
+          </a:p>
+          <a:p>
+            <a:pPr algn="just"/>
+            <a:r>
+              <a:rPr lang="en-US" sz="2400" dirty="0" smtClean="0">
+                <a:latin typeface="Cambria" panose="02040503050406030204" pitchFamily="18" charset="0"/>
+                <a:ea typeface="Cambria" panose="02040503050406030204" pitchFamily="18" charset="0"/>
+                <a:hlinkClick r:id="rId7"/>
+              </a:rPr>
+              <a:t>https://www.javatpoint.com/transaction-management-in-jdbc</a:t>
+            </a:r>
+            <a:endParaRPr lang="en-US" sz="2400" dirty="0" smtClean="0">
+              <a:latin typeface="Cambria" panose="02040503050406030204" pitchFamily="18" charset="0"/>
+              <a:ea typeface="Cambria" panose="02040503050406030204" pitchFamily="18" charset="0"/>
+            </a:endParaRPr>
+          </a:p>
+          <a:p>
+            <a:pPr algn="just"/>
+            <a:r>
+              <a:rPr lang="en-US" sz="2400" dirty="0" smtClean="0">
+                <a:latin typeface="Cambria" panose="02040503050406030204" pitchFamily="18" charset="0"/>
+                <a:ea typeface="Cambria" panose="02040503050406030204" pitchFamily="18" charset="0"/>
+                <a:hlinkClick r:id="rId8"/>
+              </a:rPr>
+              <a:t>https://www.javatpoint.com/batch-processing-in-jdbc</a:t>
+            </a:r>
+            <a:endParaRPr lang="en-US" sz="2400" dirty="0" smtClean="0">
+              <a:latin typeface="Cambria" panose="02040503050406030204" pitchFamily="18" charset="0"/>
+              <a:ea typeface="Cambria" panose="02040503050406030204" pitchFamily="18" charset="0"/>
+            </a:endParaRPr>
+          </a:p>
+          <a:p>
+            <a:pPr algn="just"/>
+            <a:r>
+              <a:rPr lang="en-US" sz="2400" dirty="0" smtClean="0">
+                <a:latin typeface="Cambria" panose="02040503050406030204" pitchFamily="18" charset="0"/>
+                <a:ea typeface="Cambria" panose="02040503050406030204" pitchFamily="18" charset="0"/>
+                <a:hlinkClick r:id="rId9"/>
+              </a:rPr>
+              <a:t>https://www.javatpoint.com/jdbc-rowset</a:t>
+            </a:r>
+            <a:endParaRPr lang="en-US" sz="2400" dirty="0" smtClean="0">
+              <a:latin typeface="Cambria" panose="02040503050406030204" pitchFamily="18" charset="0"/>
+              <a:ea typeface="Cambria" panose="02040503050406030204" pitchFamily="18" charset="0"/>
+            </a:endParaRPr>
+          </a:p>
+          <a:p>
+            <a:pPr algn="just"/>
+            <a:endParaRPr lang="en-US" sz="2400" dirty="0">
+              <a:latin typeface="Cambria" panose="02040503050406030204" pitchFamily="18" charset="0"/>
+              <a:ea typeface="Cambria" panose="02040503050406030204" pitchFamily="18" charset="0"/>
+            </a:endParaRPr>
           </a:p>
         </p:txBody>
       </p:sp>
@@ -39467,13 +39895,19 @@
               <a:defRPr/>
             </a:pPr>
             <a:fld id="{A01CA5F2-CD08-4EF5-BAD9-872B7BB27165}" type="slidenum">
-              <a:rPr lang="en-US" altLang="en-US" smtClean="0"/>
+              <a:rPr lang="en-US" altLang="en-US" smtClean="0">
+                <a:latin typeface="Cambria" panose="02040503050406030204" pitchFamily="18" charset="0"/>
+                <a:ea typeface="Cambria" panose="02040503050406030204" pitchFamily="18" charset="0"/>
+              </a:rPr>
               <a:pPr>
                 <a:defRPr/>
               </a:pPr>
               <a:t>77</a:t>
             </a:fld>
-            <a:endParaRPr lang="en-US" altLang="en-US"/>
+            <a:endParaRPr lang="en-US" altLang="en-US">
+              <a:latin typeface="Cambria" panose="02040503050406030204" pitchFamily="18" charset="0"/>
+              <a:ea typeface="Cambria" panose="02040503050406030204" pitchFamily="18" charset="0"/>
+            </a:endParaRPr>
           </a:p>
         </p:txBody>
       </p:sp>
@@ -39519,10 +39953,33 @@
             <p:ph type="title"/>
           </p:nvPr>
         </p:nvSpPr>
+        <p:spPr/>
+        <p:txBody>
+          <a:bodyPr/>
+          <a:lstStyle/>
+          <a:p>
+            <a:r>
+              <a:rPr lang="en-US" dirty="0" smtClean="0"/>
+              <a:t>Oracle</a:t>
+            </a:r>
+            <a:endParaRPr lang="en-US" dirty="0"/>
+          </a:p>
+        </p:txBody>
+      </p:sp>
+      <p:sp>
+        <p:nvSpPr>
+          <p:cNvPr id="3" name="Content Placeholder 2"/>
+          <p:cNvSpPr>
+            <a:spLocks noGrp="1"/>
+          </p:cNvSpPr>
+          <p:nvPr>
+            <p:ph idx="1"/>
+          </p:nvPr>
+        </p:nvSpPr>
         <p:spPr>
           <a:xfrm>
-            <a:off x="0" y="-34257"/>
-            <a:ext cx="9408368" cy="654945"/>
+            <a:off x="838200" y="1285860"/>
+            <a:ext cx="10515600" cy="4891103"/>
           </a:xfrm>
         </p:spPr>
         <p:txBody>
@@ -39530,70 +39987,160 @@
           <a:lstStyle/>
           <a:p>
             <a:r>
-              <a:rPr lang="en-GB" sz="4000" b="1" dirty="0" smtClean="0">
-                <a:solidFill>
-                  <a:schemeClr val="accent1"/>
-                </a:solidFill>
-                <a:latin typeface="Cambria" panose="02040503050406030204" pitchFamily="18" charset="0"/>
-                <a:ea typeface="Cambria" panose="02040503050406030204" pitchFamily="18" charset="0"/>
-              </a:rPr>
-              <a:t/>
-            </a:r>
-            <a:br>
-              <a:rPr lang="en-GB" sz="4000" b="1" dirty="0" smtClean="0">
-                <a:solidFill>
-                  <a:schemeClr val="accent1"/>
-                </a:solidFill>
-                <a:latin typeface="Cambria" panose="02040503050406030204" pitchFamily="18" charset="0"/>
-                <a:ea typeface="Cambria" panose="02040503050406030204" pitchFamily="18" charset="0"/>
-              </a:rPr>
-            </a:br>
-            <a:r>
-              <a:rPr lang="en-GB" sz="4000" b="1" dirty="0" smtClean="0">
-                <a:solidFill>
-                  <a:schemeClr val="accent1"/>
-                </a:solidFill>
-                <a:latin typeface="Cambria" panose="02040503050406030204" pitchFamily="18" charset="0"/>
-                <a:ea typeface="Cambria" panose="02040503050406030204" pitchFamily="18" charset="0"/>
-              </a:rPr>
-              <a:t>Java Database Connectivity with </a:t>
-            </a:r>
-            <a:r>
-              <a:rPr lang="en-GB" sz="4000" b="1" dirty="0" err="1" smtClean="0">
-                <a:solidFill>
-                  <a:schemeClr val="accent1"/>
-                </a:solidFill>
-                <a:latin typeface="Cambria" panose="02040503050406030204" pitchFamily="18" charset="0"/>
-                <a:ea typeface="Cambria" panose="02040503050406030204" pitchFamily="18" charset="0"/>
-              </a:rPr>
-              <a:t>MySQL</a:t>
-            </a:r>
-            <a:r>
-              <a:rPr lang="en-GB" sz="4000" b="1" dirty="0" smtClean="0">
-                <a:solidFill>
-                  <a:schemeClr val="accent1"/>
-                </a:solidFill>
-                <a:latin typeface="Cambria" panose="02040503050406030204" pitchFamily="18" charset="0"/>
-                <a:ea typeface="Cambria" panose="02040503050406030204" pitchFamily="18" charset="0"/>
-              </a:rPr>
-              <a:t/>
-            </a:r>
-            <a:br>
-              <a:rPr lang="en-GB" sz="4000" b="1" dirty="0" smtClean="0">
-                <a:solidFill>
-                  <a:schemeClr val="accent1"/>
-                </a:solidFill>
-                <a:latin typeface="Cambria" panose="02040503050406030204" pitchFamily="18" charset="0"/>
-                <a:ea typeface="Cambria" panose="02040503050406030204" pitchFamily="18" charset="0"/>
-              </a:rPr>
-            </a:br>
-            <a:endParaRPr lang="en-US" sz="4000" b="1" dirty="0">
-              <a:solidFill>
-                <a:schemeClr val="accent1"/>
-              </a:solidFill>
-              <a:latin typeface="Cambria" panose="02040503050406030204" pitchFamily="18" charset="0"/>
-              <a:ea typeface="Cambria" panose="02040503050406030204" pitchFamily="18" charset="0"/>
-            </a:endParaRPr>
+              <a:rPr lang="en-GB" sz="2000" dirty="0" smtClean="0"/>
+              <a:t> To connect java application with the Oracle database ojdbc14.jar file is required to be loaded.</a:t>
+            </a:r>
+          </a:p>
+          <a:p>
+            <a:r>
+              <a:rPr lang="en-GB" sz="2000" dirty="0" smtClean="0">
+                <a:hlinkClick r:id="rId2"/>
+              </a:rPr>
+              <a:t>download the jar file ojdbc14.jar</a:t>
+            </a:r>
+            <a:endParaRPr lang="en-GB" sz="2000" dirty="0" smtClean="0"/>
+          </a:p>
+          <a:p>
+            <a:r>
+              <a:rPr lang="en-GB" sz="2000" dirty="0" smtClean="0"/>
+              <a:t>Two ways to load the jar file:</a:t>
+            </a:r>
+          </a:p>
+          <a:p>
+            <a:r>
+              <a:rPr lang="en-GB" sz="2000" dirty="0" smtClean="0"/>
+              <a:t>paste the ojdbc14.jar file in </a:t>
+            </a:r>
+            <a:r>
+              <a:rPr lang="en-GB" sz="2000" dirty="0" err="1" smtClean="0"/>
+              <a:t>jre</a:t>
+            </a:r>
+            <a:r>
+              <a:rPr lang="en-GB" sz="2000" dirty="0" smtClean="0"/>
+              <a:t>/lib/ext folder</a:t>
+            </a:r>
+          </a:p>
+          <a:p>
+            <a:r>
+              <a:rPr lang="en-GB" sz="2000" dirty="0" smtClean="0"/>
+              <a:t>set </a:t>
+            </a:r>
+            <a:r>
+              <a:rPr lang="en-GB" sz="2000" dirty="0" err="1" smtClean="0"/>
+              <a:t>classpath</a:t>
+            </a:r>
+            <a:endParaRPr lang="en-GB" sz="2000" dirty="0" smtClean="0"/>
+          </a:p>
+          <a:p>
+            <a:r>
+              <a:rPr lang="en-GB" sz="2000" dirty="0" smtClean="0"/>
+              <a:t>1) paste the ojdbc14.jar file in JRE/lib/ext folder:</a:t>
+            </a:r>
+          </a:p>
+          <a:p>
+            <a:r>
+              <a:rPr lang="en-GB" sz="2000" dirty="0" smtClean="0"/>
+              <a:t>Firstly, search the ojdbc14.jar file then go to JRE/lib/ext folder and paste the jar file here.2) set </a:t>
+            </a:r>
+            <a:r>
+              <a:rPr lang="en-GB" sz="2000" dirty="0" err="1" smtClean="0"/>
+              <a:t>classpath</a:t>
+            </a:r>
+            <a:r>
+              <a:rPr lang="en-GB" sz="2000" dirty="0" smtClean="0"/>
+              <a:t>:</a:t>
+            </a:r>
+          </a:p>
+          <a:p>
+            <a:r>
+              <a:rPr lang="en-GB" sz="2000" dirty="0" smtClean="0"/>
+              <a:t>There are two ways to set the </a:t>
+            </a:r>
+            <a:r>
+              <a:rPr lang="en-GB" sz="2000" dirty="0" err="1" smtClean="0"/>
+              <a:t>classpath:temporary</a:t>
+            </a:r>
+            <a:endParaRPr lang="en-GB" sz="2000" dirty="0" smtClean="0"/>
+          </a:p>
+          <a:p>
+            <a:r>
+              <a:rPr lang="en-GB" sz="2000" dirty="0" smtClean="0"/>
+              <a:t>permanent</a:t>
+            </a:r>
+          </a:p>
+          <a:p>
+            <a:r>
+              <a:rPr lang="en-GB" sz="2000" dirty="0" smtClean="0"/>
+              <a:t>How to set the temporary </a:t>
+            </a:r>
+            <a:r>
+              <a:rPr lang="en-GB" sz="2000" dirty="0" err="1" smtClean="0"/>
+              <a:t>classpath</a:t>
+            </a:r>
+            <a:r>
+              <a:rPr lang="en-GB" sz="2000" dirty="0" smtClean="0"/>
+              <a:t>:</a:t>
+            </a:r>
+          </a:p>
+          <a:p>
+            <a:r>
+              <a:rPr lang="en-GB" sz="2000" dirty="0" smtClean="0"/>
+              <a:t>Firstly, search the ojdbc14.jar file then open command prompt and write:</a:t>
+            </a:r>
+          </a:p>
+          <a:p>
+            <a:r>
+              <a:rPr lang="en-GB" sz="2000" dirty="0" smtClean="0"/>
+              <a:t>C:&gt;set </a:t>
+            </a:r>
+            <a:r>
+              <a:rPr lang="en-GB" sz="2000" dirty="0" err="1" smtClean="0"/>
+              <a:t>classpath</a:t>
+            </a:r>
+            <a:r>
+              <a:rPr lang="en-GB" sz="2000" dirty="0" smtClean="0"/>
+              <a:t>=c:\folder\ojdbc14.jar;.;  </a:t>
+            </a:r>
+          </a:p>
+          <a:p>
+            <a:r>
+              <a:rPr lang="en-GB" sz="2000" dirty="0" smtClean="0"/>
+              <a:t>How to set the permanent </a:t>
+            </a:r>
+            <a:r>
+              <a:rPr lang="en-GB" sz="2000" dirty="0" err="1" smtClean="0"/>
+              <a:t>classpath</a:t>
+            </a:r>
+            <a:r>
+              <a:rPr lang="en-GB" sz="2000" dirty="0" smtClean="0"/>
+              <a:t>:</a:t>
+            </a:r>
+          </a:p>
+          <a:p>
+            <a:r>
+              <a:rPr lang="en-GB" sz="2000" dirty="0" smtClean="0"/>
+              <a:t>Go to environment variable then click on new tab. In variable name write </a:t>
+            </a:r>
+            <a:r>
+              <a:rPr lang="en-GB" sz="2000" b="1" dirty="0" err="1" smtClean="0"/>
+              <a:t>classpath</a:t>
+            </a:r>
+            <a:r>
+              <a:rPr lang="en-GB" sz="2000" dirty="0" smtClean="0"/>
+              <a:t> and in variable value paste the path to ojdbc14.jar by appending ojdbc14.jar;.; as C:\oraclexe\app\oracle\product\10.2.0\server\jdbc\lib\ojdbc14.jar;.;</a:t>
+            </a:r>
+          </a:p>
+          <a:p>
+            <a:pPr>
+              <a:buNone/>
+            </a:pPr>
+            <a:endParaRPr lang="en-GB" dirty="0" smtClean="0"/>
+          </a:p>
+          <a:p>
+            <a:pPr>
+              <a:buNone/>
+            </a:pPr>
+            <a:endParaRPr lang="en-US" dirty="0"/>
           </a:p>
         </p:txBody>
       </p:sp>
@@ -39616,323 +40163,13 @@
               <a:defRPr/>
             </a:pPr>
             <a:fld id="{A01CA5F2-CD08-4EF5-BAD9-872B7BB27165}" type="slidenum">
-              <a:rPr lang="en-US" altLang="en-US" smtClean="0">
-                <a:latin typeface="Cambria" panose="02040503050406030204" pitchFamily="18" charset="0"/>
-                <a:ea typeface="Cambria" panose="02040503050406030204" pitchFamily="18" charset="0"/>
-              </a:rPr>
+              <a:rPr lang="en-US" altLang="en-US" smtClean="0"/>
               <a:pPr>
                 <a:defRPr/>
               </a:pPr>
               <a:t>78</a:t>
             </a:fld>
-            <a:endParaRPr lang="en-US" altLang="en-US">
-              <a:latin typeface="Cambria" panose="02040503050406030204" pitchFamily="18" charset="0"/>
-              <a:ea typeface="Cambria" panose="02040503050406030204" pitchFamily="18" charset="0"/>
-            </a:endParaRPr>
-          </a:p>
-        </p:txBody>
-      </p:sp>
-      <p:sp>
-        <p:nvSpPr>
-          <p:cNvPr id="6" name="Content Placeholder 5"/>
-          <p:cNvSpPr>
-            <a:spLocks noGrp="1"/>
-          </p:cNvSpPr>
-          <p:nvPr>
-            <p:ph idx="1"/>
-          </p:nvPr>
-        </p:nvSpPr>
-        <p:spPr>
-          <a:xfrm>
-            <a:off x="479376" y="614283"/>
-            <a:ext cx="10585176" cy="4470902"/>
-          </a:xfrm>
-        </p:spPr>
-        <p:txBody>
-          <a:bodyPr/>
-          <a:lstStyle/>
-          <a:p>
-            <a:pPr marL="514350" indent="-514350" algn="just">
-              <a:buFont typeface="+mj-lt"/>
-              <a:buAutoNum type="arabicPeriod"/>
-            </a:pPr>
-            <a:r>
-              <a:rPr lang="en-GB" sz="2400" b="1" dirty="0" smtClean="0">
-                <a:latin typeface="Cambria" panose="02040503050406030204" pitchFamily="18" charset="0"/>
-                <a:ea typeface="Cambria" panose="02040503050406030204" pitchFamily="18" charset="0"/>
-              </a:rPr>
-              <a:t>Driver class: </a:t>
-            </a:r>
-            <a:r>
-              <a:rPr lang="en-GB" sz="2400" dirty="0" smtClean="0">
-                <a:latin typeface="Cambria" panose="02040503050406030204" pitchFamily="18" charset="0"/>
-                <a:ea typeface="Cambria" panose="02040503050406030204" pitchFamily="18" charset="0"/>
-              </a:rPr>
-              <a:t>The driver class for the </a:t>
-            </a:r>
-            <a:r>
-              <a:rPr lang="en-GB" sz="2400" dirty="0" err="1" smtClean="0">
-                <a:latin typeface="Cambria" panose="02040503050406030204" pitchFamily="18" charset="0"/>
-                <a:ea typeface="Cambria" panose="02040503050406030204" pitchFamily="18" charset="0"/>
-              </a:rPr>
-              <a:t>mysql</a:t>
-            </a:r>
-            <a:r>
-              <a:rPr lang="en-GB" sz="2400" dirty="0" smtClean="0">
-                <a:latin typeface="Cambria" panose="02040503050406030204" pitchFamily="18" charset="0"/>
-                <a:ea typeface="Cambria" panose="02040503050406030204" pitchFamily="18" charset="0"/>
-              </a:rPr>
-              <a:t> database is </a:t>
-            </a:r>
-            <a:r>
-              <a:rPr lang="en-GB" sz="2400" b="1" dirty="0" err="1" smtClean="0">
-                <a:latin typeface="Cambria" panose="02040503050406030204" pitchFamily="18" charset="0"/>
-                <a:ea typeface="Cambria" panose="02040503050406030204" pitchFamily="18" charset="0"/>
-              </a:rPr>
-              <a:t>com.mysql.jdbc.Driver</a:t>
-            </a:r>
-            <a:r>
-              <a:rPr lang="en-GB" sz="2400" dirty="0" smtClean="0">
-                <a:latin typeface="Cambria" panose="02040503050406030204" pitchFamily="18" charset="0"/>
-                <a:ea typeface="Cambria" panose="02040503050406030204" pitchFamily="18" charset="0"/>
-              </a:rPr>
-              <a:t>.</a:t>
-            </a:r>
-          </a:p>
-          <a:p>
-            <a:pPr marL="514350" indent="-514350" algn="just">
-              <a:buFont typeface="+mj-lt"/>
-              <a:buAutoNum type="arabicPeriod"/>
-            </a:pPr>
-            <a:r>
-              <a:rPr lang="en-GB" sz="2400" b="1" dirty="0" smtClean="0">
-                <a:latin typeface="Cambria" panose="02040503050406030204" pitchFamily="18" charset="0"/>
-                <a:ea typeface="Cambria" panose="02040503050406030204" pitchFamily="18" charset="0"/>
-              </a:rPr>
-              <a:t>Connection URL: </a:t>
-            </a:r>
-            <a:r>
-              <a:rPr lang="en-GB" sz="2400" dirty="0" smtClean="0">
-                <a:latin typeface="Cambria" panose="02040503050406030204" pitchFamily="18" charset="0"/>
-                <a:ea typeface="Cambria" panose="02040503050406030204" pitchFamily="18" charset="0"/>
-              </a:rPr>
-              <a:t>The connection URL for the </a:t>
-            </a:r>
-            <a:r>
-              <a:rPr lang="en-GB" sz="2400" dirty="0" err="1" smtClean="0">
-                <a:latin typeface="Cambria" panose="02040503050406030204" pitchFamily="18" charset="0"/>
-                <a:ea typeface="Cambria" panose="02040503050406030204" pitchFamily="18" charset="0"/>
-              </a:rPr>
-              <a:t>mysql</a:t>
-            </a:r>
-            <a:r>
-              <a:rPr lang="en-GB" sz="2400" dirty="0" smtClean="0">
-                <a:latin typeface="Cambria" panose="02040503050406030204" pitchFamily="18" charset="0"/>
-                <a:ea typeface="Cambria" panose="02040503050406030204" pitchFamily="18" charset="0"/>
-              </a:rPr>
-              <a:t> database is </a:t>
-            </a:r>
-            <a:r>
-              <a:rPr lang="en-GB" sz="2400" b="1" dirty="0" err="1" smtClean="0">
-                <a:latin typeface="Cambria" panose="02040503050406030204" pitchFamily="18" charset="0"/>
-                <a:ea typeface="Cambria" panose="02040503050406030204" pitchFamily="18" charset="0"/>
-              </a:rPr>
-              <a:t>jdbc:mysql</a:t>
-            </a:r>
-            <a:r>
-              <a:rPr lang="en-GB" sz="2400" b="1" dirty="0" smtClean="0">
-                <a:latin typeface="Cambria" panose="02040503050406030204" pitchFamily="18" charset="0"/>
-                <a:ea typeface="Cambria" panose="02040503050406030204" pitchFamily="18" charset="0"/>
-              </a:rPr>
-              <a:t>://localhost:3306/</a:t>
-            </a:r>
-            <a:r>
-              <a:rPr lang="en-GB" sz="2400" b="1" dirty="0" err="1" smtClean="0">
-                <a:latin typeface="Cambria" panose="02040503050406030204" pitchFamily="18" charset="0"/>
-                <a:ea typeface="Cambria" panose="02040503050406030204" pitchFamily="18" charset="0"/>
-              </a:rPr>
-              <a:t>sonoo</a:t>
-            </a:r>
-            <a:r>
-              <a:rPr lang="en-GB" sz="2400" dirty="0" smtClean="0">
-                <a:latin typeface="Cambria" panose="02040503050406030204" pitchFamily="18" charset="0"/>
-                <a:ea typeface="Cambria" panose="02040503050406030204" pitchFamily="18" charset="0"/>
-              </a:rPr>
-              <a:t> where </a:t>
-            </a:r>
-            <a:r>
-              <a:rPr lang="en-GB" sz="2400" dirty="0" err="1" smtClean="0">
-                <a:latin typeface="Cambria" panose="02040503050406030204" pitchFamily="18" charset="0"/>
-                <a:ea typeface="Cambria" panose="02040503050406030204" pitchFamily="18" charset="0"/>
-              </a:rPr>
-              <a:t>jdbc</a:t>
-            </a:r>
-            <a:r>
-              <a:rPr lang="en-GB" sz="2400" dirty="0" smtClean="0">
-                <a:latin typeface="Cambria" panose="02040503050406030204" pitchFamily="18" charset="0"/>
-                <a:ea typeface="Cambria" panose="02040503050406030204" pitchFamily="18" charset="0"/>
-              </a:rPr>
-              <a:t> is the API, </a:t>
-            </a:r>
-            <a:r>
-              <a:rPr lang="en-GB" sz="2400" dirty="0" err="1" smtClean="0">
-                <a:latin typeface="Cambria" panose="02040503050406030204" pitchFamily="18" charset="0"/>
-                <a:ea typeface="Cambria" panose="02040503050406030204" pitchFamily="18" charset="0"/>
-              </a:rPr>
-              <a:t>mysql</a:t>
-            </a:r>
-            <a:r>
-              <a:rPr lang="en-GB" sz="2400" dirty="0" smtClean="0">
-                <a:latin typeface="Cambria" panose="02040503050406030204" pitchFamily="18" charset="0"/>
-                <a:ea typeface="Cambria" panose="02040503050406030204" pitchFamily="18" charset="0"/>
-              </a:rPr>
-              <a:t> is the database, </a:t>
-            </a:r>
-            <a:r>
-              <a:rPr lang="en-GB" sz="2400" dirty="0" err="1" smtClean="0">
-                <a:latin typeface="Cambria" panose="02040503050406030204" pitchFamily="18" charset="0"/>
-                <a:ea typeface="Cambria" panose="02040503050406030204" pitchFamily="18" charset="0"/>
-              </a:rPr>
-              <a:t>localhost</a:t>
-            </a:r>
-            <a:r>
-              <a:rPr lang="en-GB" sz="2400" dirty="0" smtClean="0">
-                <a:latin typeface="Cambria" panose="02040503050406030204" pitchFamily="18" charset="0"/>
-                <a:ea typeface="Cambria" panose="02040503050406030204" pitchFamily="18" charset="0"/>
-              </a:rPr>
-              <a:t> is the server name on which </a:t>
-            </a:r>
-            <a:r>
-              <a:rPr lang="en-GB" sz="2400" dirty="0" err="1" smtClean="0">
-                <a:latin typeface="Cambria" panose="02040503050406030204" pitchFamily="18" charset="0"/>
-                <a:ea typeface="Cambria" panose="02040503050406030204" pitchFamily="18" charset="0"/>
-              </a:rPr>
-              <a:t>mysql</a:t>
-            </a:r>
-            <a:r>
-              <a:rPr lang="en-GB" sz="2400" dirty="0" smtClean="0">
-                <a:latin typeface="Cambria" panose="02040503050406030204" pitchFamily="18" charset="0"/>
-                <a:ea typeface="Cambria" panose="02040503050406030204" pitchFamily="18" charset="0"/>
-              </a:rPr>
-              <a:t> is running, we may also use IP address, 3306 is the port number and </a:t>
-            </a:r>
-            <a:r>
-              <a:rPr lang="en-GB" sz="2400" dirty="0" err="1" smtClean="0">
-                <a:latin typeface="Cambria" panose="02040503050406030204" pitchFamily="18" charset="0"/>
-                <a:ea typeface="Cambria" panose="02040503050406030204" pitchFamily="18" charset="0"/>
-              </a:rPr>
-              <a:t>sonoo</a:t>
-            </a:r>
-            <a:r>
-              <a:rPr lang="en-GB" sz="2400" dirty="0" smtClean="0">
-                <a:latin typeface="Cambria" panose="02040503050406030204" pitchFamily="18" charset="0"/>
-                <a:ea typeface="Cambria" panose="02040503050406030204" pitchFamily="18" charset="0"/>
-              </a:rPr>
-              <a:t> is the database name. We may use any database, in such case, we need to replace the </a:t>
-            </a:r>
-            <a:r>
-              <a:rPr lang="en-GB" sz="2400" dirty="0" err="1" smtClean="0">
-                <a:latin typeface="Cambria" panose="02040503050406030204" pitchFamily="18" charset="0"/>
-                <a:ea typeface="Cambria" panose="02040503050406030204" pitchFamily="18" charset="0"/>
-              </a:rPr>
-              <a:t>sonoo</a:t>
-            </a:r>
-            <a:r>
-              <a:rPr lang="en-GB" sz="2400" dirty="0" smtClean="0">
-                <a:latin typeface="Cambria" panose="02040503050406030204" pitchFamily="18" charset="0"/>
-                <a:ea typeface="Cambria" panose="02040503050406030204" pitchFamily="18" charset="0"/>
-              </a:rPr>
-              <a:t> with our database name.</a:t>
-            </a:r>
-          </a:p>
-          <a:p>
-            <a:pPr marL="514350" indent="-514350" algn="just">
-              <a:buFont typeface="+mj-lt"/>
-              <a:buAutoNum type="arabicPeriod"/>
-            </a:pPr>
-            <a:r>
-              <a:rPr lang="en-GB" sz="2400" b="1" dirty="0" smtClean="0">
-                <a:latin typeface="Cambria" panose="02040503050406030204" pitchFamily="18" charset="0"/>
-                <a:ea typeface="Cambria" panose="02040503050406030204" pitchFamily="18" charset="0"/>
-              </a:rPr>
-              <a:t>Username: </a:t>
-            </a:r>
-            <a:r>
-              <a:rPr lang="en-GB" sz="2400" dirty="0" smtClean="0">
-                <a:latin typeface="Cambria" panose="02040503050406030204" pitchFamily="18" charset="0"/>
-                <a:ea typeface="Cambria" panose="02040503050406030204" pitchFamily="18" charset="0"/>
-              </a:rPr>
-              <a:t>The default username for the </a:t>
-            </a:r>
-            <a:r>
-              <a:rPr lang="en-GB" sz="2400" dirty="0" err="1" smtClean="0">
-                <a:latin typeface="Cambria" panose="02040503050406030204" pitchFamily="18" charset="0"/>
-                <a:ea typeface="Cambria" panose="02040503050406030204" pitchFamily="18" charset="0"/>
-              </a:rPr>
-              <a:t>mysql</a:t>
-            </a:r>
-            <a:r>
-              <a:rPr lang="en-GB" sz="2400" dirty="0" smtClean="0">
-                <a:latin typeface="Cambria" panose="02040503050406030204" pitchFamily="18" charset="0"/>
-                <a:ea typeface="Cambria" panose="02040503050406030204" pitchFamily="18" charset="0"/>
-              </a:rPr>
-              <a:t> database is </a:t>
-            </a:r>
-            <a:r>
-              <a:rPr lang="en-GB" sz="2400" b="1" dirty="0" smtClean="0">
-                <a:latin typeface="Cambria" panose="02040503050406030204" pitchFamily="18" charset="0"/>
-                <a:ea typeface="Cambria" panose="02040503050406030204" pitchFamily="18" charset="0"/>
-              </a:rPr>
-              <a:t>root</a:t>
-            </a:r>
-            <a:r>
-              <a:rPr lang="en-GB" sz="2400" dirty="0" smtClean="0">
-                <a:latin typeface="Cambria" panose="02040503050406030204" pitchFamily="18" charset="0"/>
-                <a:ea typeface="Cambria" panose="02040503050406030204" pitchFamily="18" charset="0"/>
-              </a:rPr>
-              <a:t>.</a:t>
-            </a:r>
-          </a:p>
-          <a:p>
-            <a:pPr marL="514350" indent="-514350" algn="just">
-              <a:buFont typeface="+mj-lt"/>
-              <a:buAutoNum type="arabicPeriod"/>
-            </a:pPr>
-            <a:r>
-              <a:rPr lang="en-GB" sz="2400" b="1" dirty="0" smtClean="0">
-                <a:latin typeface="Cambria" panose="02040503050406030204" pitchFamily="18" charset="0"/>
-                <a:ea typeface="Cambria" panose="02040503050406030204" pitchFamily="18" charset="0"/>
-              </a:rPr>
-              <a:t>Password: </a:t>
-            </a:r>
-            <a:r>
-              <a:rPr lang="en-GB" sz="2400" dirty="0" smtClean="0">
-                <a:latin typeface="Cambria" panose="02040503050406030204" pitchFamily="18" charset="0"/>
-                <a:ea typeface="Cambria" panose="02040503050406030204" pitchFamily="18" charset="0"/>
-              </a:rPr>
-              <a:t>It is the password given by the user at the time of installing the </a:t>
-            </a:r>
-            <a:r>
-              <a:rPr lang="en-GB" sz="2400" dirty="0" err="1" smtClean="0">
-                <a:latin typeface="Cambria" panose="02040503050406030204" pitchFamily="18" charset="0"/>
-                <a:ea typeface="Cambria" panose="02040503050406030204" pitchFamily="18" charset="0"/>
-              </a:rPr>
-              <a:t>mysql</a:t>
-            </a:r>
-            <a:r>
-              <a:rPr lang="en-GB" sz="2400" dirty="0" smtClean="0">
-                <a:latin typeface="Cambria" panose="02040503050406030204" pitchFamily="18" charset="0"/>
-                <a:ea typeface="Cambria" panose="02040503050406030204" pitchFamily="18" charset="0"/>
-              </a:rPr>
-              <a:t> database. In this example, we are going to use root as the password.</a:t>
-            </a:r>
-          </a:p>
-          <a:p>
-            <a:pPr algn="just"/>
-            <a:endParaRPr lang="en-US" sz="2400" dirty="0">
-              <a:latin typeface="Cambria" panose="02040503050406030204" pitchFamily="18" charset="0"/>
-              <a:ea typeface="Cambria" panose="02040503050406030204" pitchFamily="18" charset="0"/>
-            </a:endParaRPr>
+            <a:endParaRPr lang="en-US" altLang="en-US"/>
           </a:p>
         </p:txBody>
       </p:sp>
@@ -39980,8 +40217,8 @@
         </p:nvSpPr>
         <p:spPr>
           <a:xfrm>
-            <a:off x="0" y="7803"/>
-            <a:ext cx="2711624" cy="612885"/>
+            <a:off x="0" y="-34257"/>
+            <a:ext cx="9408368" cy="654945"/>
           </a:xfrm>
         </p:spPr>
         <p:txBody>
@@ -39989,185 +40226,67 @@
           <a:lstStyle/>
           <a:p>
             <a:r>
-              <a:rPr lang="en-GB" b="1" dirty="0" err="1" smtClean="0">
+              <a:rPr lang="en-GB" sz="4000" b="1" dirty="0" smtClean="0">
                 <a:solidFill>
                   <a:schemeClr val="accent1"/>
                 </a:solidFill>
                 <a:latin typeface="Cambria" panose="02040503050406030204" pitchFamily="18" charset="0"/>
                 <a:ea typeface="Cambria" panose="02040503050406030204" pitchFamily="18" charset="0"/>
               </a:rPr>
+              <a:t/>
+            </a:r>
+            <a:br>
+              <a:rPr lang="en-GB" sz="4000" b="1" dirty="0" smtClean="0">
+                <a:solidFill>
+                  <a:schemeClr val="accent1"/>
+                </a:solidFill>
+                <a:latin typeface="Cambria" panose="02040503050406030204" pitchFamily="18" charset="0"/>
+                <a:ea typeface="Cambria" panose="02040503050406030204" pitchFamily="18" charset="0"/>
+              </a:rPr>
+            </a:br>
+            <a:r>
+              <a:rPr lang="en-GB" sz="4000" b="1" dirty="0" smtClean="0">
+                <a:solidFill>
+                  <a:schemeClr val="accent1"/>
+                </a:solidFill>
+                <a:latin typeface="Cambria" panose="02040503050406030204" pitchFamily="18" charset="0"/>
+                <a:ea typeface="Cambria" panose="02040503050406030204" pitchFamily="18" charset="0"/>
+              </a:rPr>
+              <a:t>Java Database Connectivity with </a:t>
+            </a:r>
+            <a:r>
+              <a:rPr lang="en-GB" sz="4000" b="1" dirty="0" err="1" smtClean="0">
+                <a:solidFill>
+                  <a:schemeClr val="accent1"/>
+                </a:solidFill>
+                <a:latin typeface="Cambria" panose="02040503050406030204" pitchFamily="18" charset="0"/>
+                <a:ea typeface="Cambria" panose="02040503050406030204" pitchFamily="18" charset="0"/>
+              </a:rPr>
               <a:t>MySQL</a:t>
             </a:r>
-            <a:endParaRPr lang="en-US" b="1" dirty="0">
+            <a:r>
+              <a:rPr lang="en-GB" sz="4000" b="1" dirty="0" smtClean="0">
+                <a:solidFill>
+                  <a:schemeClr val="accent1"/>
+                </a:solidFill>
+                <a:latin typeface="Cambria" panose="02040503050406030204" pitchFamily="18" charset="0"/>
+                <a:ea typeface="Cambria" panose="02040503050406030204" pitchFamily="18" charset="0"/>
+              </a:rPr>
+              <a:t/>
+            </a:r>
+            <a:br>
+              <a:rPr lang="en-GB" sz="4000" b="1" dirty="0" smtClean="0">
+                <a:solidFill>
+                  <a:schemeClr val="accent1"/>
+                </a:solidFill>
+                <a:latin typeface="Cambria" panose="02040503050406030204" pitchFamily="18" charset="0"/>
+                <a:ea typeface="Cambria" panose="02040503050406030204" pitchFamily="18" charset="0"/>
+              </a:rPr>
+            </a:br>
+            <a:endParaRPr lang="en-US" sz="4000" b="1" dirty="0">
               <a:solidFill>
                 <a:schemeClr val="accent1"/>
               </a:solidFill>
-              <a:latin typeface="Cambria" panose="02040503050406030204" pitchFamily="18" charset="0"/>
-              <a:ea typeface="Cambria" panose="02040503050406030204" pitchFamily="18" charset="0"/>
-            </a:endParaRPr>
-          </a:p>
-        </p:txBody>
-      </p:sp>
-      <p:sp>
-        <p:nvSpPr>
-          <p:cNvPr id="3" name="Content Placeholder 2"/>
-          <p:cNvSpPr>
-            <a:spLocks noGrp="1"/>
-          </p:cNvSpPr>
-          <p:nvPr>
-            <p:ph idx="1"/>
-          </p:nvPr>
-        </p:nvSpPr>
-        <p:spPr>
-          <a:xfrm>
-            <a:off x="335360" y="836712"/>
-            <a:ext cx="10801200" cy="2520280"/>
-          </a:xfrm>
-        </p:spPr>
-        <p:txBody>
-          <a:bodyPr/>
-          <a:lstStyle/>
-          <a:p>
-            <a:pPr algn="just"/>
-            <a:r>
-              <a:rPr lang="en-GB" dirty="0" smtClean="0">
-                <a:latin typeface="Cambria" panose="02040503050406030204" pitchFamily="18" charset="0"/>
-                <a:ea typeface="Cambria" panose="02040503050406030204" pitchFamily="18" charset="0"/>
-              </a:rPr>
-              <a:t>Let's first create a table in the </a:t>
-            </a:r>
-            <a:r>
-              <a:rPr lang="en-GB" dirty="0" err="1" smtClean="0">
-                <a:latin typeface="Cambria" panose="02040503050406030204" pitchFamily="18" charset="0"/>
-                <a:ea typeface="Cambria" panose="02040503050406030204" pitchFamily="18" charset="0"/>
-              </a:rPr>
-              <a:t>mysql</a:t>
-            </a:r>
-            <a:r>
-              <a:rPr lang="en-GB" dirty="0" smtClean="0">
-                <a:latin typeface="Cambria" panose="02040503050406030204" pitchFamily="18" charset="0"/>
-                <a:ea typeface="Cambria" panose="02040503050406030204" pitchFamily="18" charset="0"/>
-              </a:rPr>
-              <a:t> database, but before creating table, we need to create database first.</a:t>
-            </a:r>
-          </a:p>
-          <a:p>
-            <a:pPr algn="just"/>
-            <a:r>
-              <a:rPr lang="en-GB" dirty="0" smtClean="0">
-                <a:latin typeface="Cambria" panose="02040503050406030204" pitchFamily="18" charset="0"/>
-                <a:ea typeface="Cambria" panose="02040503050406030204" pitchFamily="18" charset="0"/>
-              </a:rPr>
-              <a:t>create database </a:t>
-            </a:r>
-            <a:r>
-              <a:rPr lang="en-GB" dirty="0" err="1" smtClean="0">
-                <a:latin typeface="Cambria" panose="02040503050406030204" pitchFamily="18" charset="0"/>
-                <a:ea typeface="Cambria" panose="02040503050406030204" pitchFamily="18" charset="0"/>
-              </a:rPr>
-              <a:t>sonoo</a:t>
-            </a:r>
-            <a:r>
-              <a:rPr lang="en-GB" dirty="0" smtClean="0">
-                <a:latin typeface="Cambria" panose="02040503050406030204" pitchFamily="18" charset="0"/>
-                <a:ea typeface="Cambria" panose="02040503050406030204" pitchFamily="18" charset="0"/>
-              </a:rPr>
-              <a:t>;  </a:t>
-            </a:r>
-          </a:p>
-          <a:p>
-            <a:pPr algn="just"/>
-            <a:r>
-              <a:rPr lang="en-GB" dirty="0" smtClean="0">
-                <a:latin typeface="Cambria" panose="02040503050406030204" pitchFamily="18" charset="0"/>
-                <a:ea typeface="Cambria" panose="02040503050406030204" pitchFamily="18" charset="0"/>
-              </a:rPr>
-              <a:t>use </a:t>
-            </a:r>
-            <a:r>
-              <a:rPr lang="en-GB" dirty="0" err="1" smtClean="0">
-                <a:latin typeface="Cambria" panose="02040503050406030204" pitchFamily="18" charset="0"/>
-                <a:ea typeface="Cambria" panose="02040503050406030204" pitchFamily="18" charset="0"/>
-              </a:rPr>
-              <a:t>sonoo</a:t>
-            </a:r>
-            <a:r>
-              <a:rPr lang="en-GB" dirty="0" smtClean="0">
-                <a:latin typeface="Cambria" panose="02040503050406030204" pitchFamily="18" charset="0"/>
-                <a:ea typeface="Cambria" panose="02040503050406030204" pitchFamily="18" charset="0"/>
-              </a:rPr>
-              <a:t>;  </a:t>
-            </a:r>
-          </a:p>
-          <a:p>
-            <a:pPr algn="just"/>
-            <a:r>
-              <a:rPr lang="en-GB" dirty="0" smtClean="0">
-                <a:latin typeface="Cambria" panose="02040503050406030204" pitchFamily="18" charset="0"/>
-                <a:ea typeface="Cambria" panose="02040503050406030204" pitchFamily="18" charset="0"/>
-              </a:rPr>
-              <a:t>create table </a:t>
-            </a:r>
-            <a:r>
-              <a:rPr lang="en-GB" dirty="0" err="1" smtClean="0">
-                <a:latin typeface="Cambria" panose="02040503050406030204" pitchFamily="18" charset="0"/>
-                <a:ea typeface="Cambria" panose="02040503050406030204" pitchFamily="18" charset="0"/>
-              </a:rPr>
-              <a:t>emp</a:t>
-            </a:r>
-            <a:r>
-              <a:rPr lang="en-GB" dirty="0" smtClean="0">
-                <a:latin typeface="Cambria" panose="02040503050406030204" pitchFamily="18" charset="0"/>
-                <a:ea typeface="Cambria" panose="02040503050406030204" pitchFamily="18" charset="0"/>
-              </a:rPr>
-              <a:t>(id </a:t>
-            </a:r>
-            <a:r>
-              <a:rPr lang="en-GB" b="1" dirty="0" err="1" smtClean="0">
-                <a:latin typeface="Cambria" panose="02040503050406030204" pitchFamily="18" charset="0"/>
-                <a:ea typeface="Cambria" panose="02040503050406030204" pitchFamily="18" charset="0"/>
-              </a:rPr>
-              <a:t>int</a:t>
-            </a:r>
-            <a:r>
-              <a:rPr lang="en-GB" dirty="0" smtClean="0">
-                <a:latin typeface="Cambria" panose="02040503050406030204" pitchFamily="18" charset="0"/>
-                <a:ea typeface="Cambria" panose="02040503050406030204" pitchFamily="18" charset="0"/>
-              </a:rPr>
-              <a:t>(10),name </a:t>
-            </a:r>
-            <a:r>
-              <a:rPr lang="en-GB" dirty="0" err="1" smtClean="0">
-                <a:latin typeface="Cambria" panose="02040503050406030204" pitchFamily="18" charset="0"/>
-                <a:ea typeface="Cambria" panose="02040503050406030204" pitchFamily="18" charset="0"/>
-              </a:rPr>
-              <a:t>varchar</a:t>
-            </a:r>
-            <a:r>
-              <a:rPr lang="en-GB" dirty="0" smtClean="0">
-                <a:latin typeface="Cambria" panose="02040503050406030204" pitchFamily="18" charset="0"/>
-                <a:ea typeface="Cambria" panose="02040503050406030204" pitchFamily="18" charset="0"/>
-              </a:rPr>
-              <a:t>(40),age </a:t>
-            </a:r>
-            <a:r>
-              <a:rPr lang="en-GB" b="1" dirty="0" err="1" smtClean="0">
-                <a:latin typeface="Cambria" panose="02040503050406030204" pitchFamily="18" charset="0"/>
-                <a:ea typeface="Cambria" panose="02040503050406030204" pitchFamily="18" charset="0"/>
-              </a:rPr>
-              <a:t>int</a:t>
-            </a:r>
-            <a:r>
-              <a:rPr lang="en-GB" dirty="0" smtClean="0">
-                <a:latin typeface="Cambria" panose="02040503050406030204" pitchFamily="18" charset="0"/>
-                <a:ea typeface="Cambria" panose="02040503050406030204" pitchFamily="18" charset="0"/>
-              </a:rPr>
-              <a:t>(3));  </a:t>
-            </a:r>
-          </a:p>
-          <a:p>
-            <a:pPr algn="just"/>
-            <a:endParaRPr lang="en-US" dirty="0">
               <a:latin typeface="Cambria" panose="02040503050406030204" pitchFamily="18" charset="0"/>
               <a:ea typeface="Cambria" panose="02040503050406030204" pitchFamily="18" charset="0"/>
             </a:endParaRPr>
@@ -40203,6 +40322,310 @@
               <a:t>79</a:t>
             </a:fld>
             <a:endParaRPr lang="en-US" altLang="en-US">
+              <a:latin typeface="Cambria" panose="02040503050406030204" pitchFamily="18" charset="0"/>
+              <a:ea typeface="Cambria" panose="02040503050406030204" pitchFamily="18" charset="0"/>
+            </a:endParaRPr>
+          </a:p>
+        </p:txBody>
+      </p:sp>
+      <p:sp>
+        <p:nvSpPr>
+          <p:cNvPr id="6" name="Content Placeholder 5"/>
+          <p:cNvSpPr>
+            <a:spLocks noGrp="1"/>
+          </p:cNvSpPr>
+          <p:nvPr>
+            <p:ph idx="1"/>
+          </p:nvPr>
+        </p:nvSpPr>
+        <p:spPr>
+          <a:xfrm>
+            <a:off x="479376" y="614283"/>
+            <a:ext cx="10585176" cy="4470902"/>
+          </a:xfrm>
+        </p:spPr>
+        <p:txBody>
+          <a:bodyPr/>
+          <a:lstStyle/>
+          <a:p>
+            <a:pPr marL="514350" indent="-514350" algn="just">
+              <a:buFont typeface="+mj-lt"/>
+              <a:buAutoNum type="arabicPeriod"/>
+            </a:pPr>
+            <a:r>
+              <a:rPr lang="en-GB" sz="2400" b="1" dirty="0" smtClean="0">
+                <a:latin typeface="Cambria" panose="02040503050406030204" pitchFamily="18" charset="0"/>
+                <a:ea typeface="Cambria" panose="02040503050406030204" pitchFamily="18" charset="0"/>
+              </a:rPr>
+              <a:t>Driver class: </a:t>
+            </a:r>
+            <a:r>
+              <a:rPr lang="en-GB" sz="2400" dirty="0" smtClean="0">
+                <a:latin typeface="Cambria" panose="02040503050406030204" pitchFamily="18" charset="0"/>
+                <a:ea typeface="Cambria" panose="02040503050406030204" pitchFamily="18" charset="0"/>
+              </a:rPr>
+              <a:t>The driver class for the </a:t>
+            </a:r>
+            <a:r>
+              <a:rPr lang="en-GB" sz="2400" dirty="0" err="1" smtClean="0">
+                <a:latin typeface="Cambria" panose="02040503050406030204" pitchFamily="18" charset="0"/>
+                <a:ea typeface="Cambria" panose="02040503050406030204" pitchFamily="18" charset="0"/>
+              </a:rPr>
+              <a:t>mysql</a:t>
+            </a:r>
+            <a:r>
+              <a:rPr lang="en-GB" sz="2400" dirty="0" smtClean="0">
+                <a:latin typeface="Cambria" panose="02040503050406030204" pitchFamily="18" charset="0"/>
+                <a:ea typeface="Cambria" panose="02040503050406030204" pitchFamily="18" charset="0"/>
+              </a:rPr>
+              <a:t> database is </a:t>
+            </a:r>
+            <a:r>
+              <a:rPr lang="en-GB" sz="2400" b="1" dirty="0" err="1" smtClean="0">
+                <a:latin typeface="Cambria" panose="02040503050406030204" pitchFamily="18" charset="0"/>
+                <a:ea typeface="Cambria" panose="02040503050406030204" pitchFamily="18" charset="0"/>
+              </a:rPr>
+              <a:t>com.mysql.jdbc.Driver</a:t>
+            </a:r>
+            <a:r>
+              <a:rPr lang="en-GB" sz="2400" dirty="0" smtClean="0">
+                <a:latin typeface="Cambria" panose="02040503050406030204" pitchFamily="18" charset="0"/>
+                <a:ea typeface="Cambria" panose="02040503050406030204" pitchFamily="18" charset="0"/>
+              </a:rPr>
+              <a:t>.</a:t>
+            </a:r>
+          </a:p>
+          <a:p>
+            <a:pPr marL="514350" indent="-514350" algn="just">
+              <a:buFont typeface="+mj-lt"/>
+              <a:buAutoNum type="arabicPeriod"/>
+            </a:pPr>
+            <a:r>
+              <a:rPr lang="en-GB" sz="2400" b="1" dirty="0" smtClean="0">
+                <a:latin typeface="Cambria" panose="02040503050406030204" pitchFamily="18" charset="0"/>
+                <a:ea typeface="Cambria" panose="02040503050406030204" pitchFamily="18" charset="0"/>
+              </a:rPr>
+              <a:t>Connection URL: </a:t>
+            </a:r>
+            <a:r>
+              <a:rPr lang="en-GB" sz="2400" dirty="0" smtClean="0">
+                <a:latin typeface="Cambria" panose="02040503050406030204" pitchFamily="18" charset="0"/>
+                <a:ea typeface="Cambria" panose="02040503050406030204" pitchFamily="18" charset="0"/>
+              </a:rPr>
+              <a:t>The connection URL for the </a:t>
+            </a:r>
+            <a:r>
+              <a:rPr lang="en-GB" sz="2400" dirty="0" err="1" smtClean="0">
+                <a:latin typeface="Cambria" panose="02040503050406030204" pitchFamily="18" charset="0"/>
+                <a:ea typeface="Cambria" panose="02040503050406030204" pitchFamily="18" charset="0"/>
+              </a:rPr>
+              <a:t>mysql</a:t>
+            </a:r>
+            <a:r>
+              <a:rPr lang="en-GB" sz="2400" dirty="0" smtClean="0">
+                <a:latin typeface="Cambria" panose="02040503050406030204" pitchFamily="18" charset="0"/>
+                <a:ea typeface="Cambria" panose="02040503050406030204" pitchFamily="18" charset="0"/>
+              </a:rPr>
+              <a:t> database is </a:t>
+            </a:r>
+            <a:r>
+              <a:rPr lang="en-GB" sz="2400" b="1" dirty="0" err="1" smtClean="0">
+                <a:latin typeface="Cambria" panose="02040503050406030204" pitchFamily="18" charset="0"/>
+                <a:ea typeface="Cambria" panose="02040503050406030204" pitchFamily="18" charset="0"/>
+              </a:rPr>
+              <a:t>jdbc:mysql</a:t>
+            </a:r>
+            <a:r>
+              <a:rPr lang="en-GB" sz="2400" b="1" dirty="0" smtClean="0">
+                <a:latin typeface="Cambria" panose="02040503050406030204" pitchFamily="18" charset="0"/>
+                <a:ea typeface="Cambria" panose="02040503050406030204" pitchFamily="18" charset="0"/>
+              </a:rPr>
+              <a:t>://localhost:3306/</a:t>
+            </a:r>
+            <a:r>
+              <a:rPr lang="en-GB" sz="2400" b="1" dirty="0" err="1" smtClean="0">
+                <a:latin typeface="Cambria" panose="02040503050406030204" pitchFamily="18" charset="0"/>
+                <a:ea typeface="Cambria" panose="02040503050406030204" pitchFamily="18" charset="0"/>
+              </a:rPr>
+              <a:t>sonoo</a:t>
+            </a:r>
+            <a:r>
+              <a:rPr lang="en-GB" sz="2400" dirty="0" smtClean="0">
+                <a:latin typeface="Cambria" panose="02040503050406030204" pitchFamily="18" charset="0"/>
+                <a:ea typeface="Cambria" panose="02040503050406030204" pitchFamily="18" charset="0"/>
+              </a:rPr>
+              <a:t> where </a:t>
+            </a:r>
+            <a:r>
+              <a:rPr lang="en-GB" sz="2400" dirty="0" err="1" smtClean="0">
+                <a:latin typeface="Cambria" panose="02040503050406030204" pitchFamily="18" charset="0"/>
+                <a:ea typeface="Cambria" panose="02040503050406030204" pitchFamily="18" charset="0"/>
+              </a:rPr>
+              <a:t>jdbc</a:t>
+            </a:r>
+            <a:r>
+              <a:rPr lang="en-GB" sz="2400" dirty="0" smtClean="0">
+                <a:latin typeface="Cambria" panose="02040503050406030204" pitchFamily="18" charset="0"/>
+                <a:ea typeface="Cambria" panose="02040503050406030204" pitchFamily="18" charset="0"/>
+              </a:rPr>
+              <a:t> is the API, </a:t>
+            </a:r>
+            <a:r>
+              <a:rPr lang="en-GB" sz="2400" dirty="0" err="1" smtClean="0">
+                <a:latin typeface="Cambria" panose="02040503050406030204" pitchFamily="18" charset="0"/>
+                <a:ea typeface="Cambria" panose="02040503050406030204" pitchFamily="18" charset="0"/>
+              </a:rPr>
+              <a:t>mysql</a:t>
+            </a:r>
+            <a:r>
+              <a:rPr lang="en-GB" sz="2400" dirty="0" smtClean="0">
+                <a:latin typeface="Cambria" panose="02040503050406030204" pitchFamily="18" charset="0"/>
+                <a:ea typeface="Cambria" panose="02040503050406030204" pitchFamily="18" charset="0"/>
+              </a:rPr>
+              <a:t> is the database, </a:t>
+            </a:r>
+            <a:r>
+              <a:rPr lang="en-GB" sz="2400" dirty="0" err="1" smtClean="0">
+                <a:latin typeface="Cambria" panose="02040503050406030204" pitchFamily="18" charset="0"/>
+                <a:ea typeface="Cambria" panose="02040503050406030204" pitchFamily="18" charset="0"/>
+              </a:rPr>
+              <a:t>localhost</a:t>
+            </a:r>
+            <a:r>
+              <a:rPr lang="en-GB" sz="2400" dirty="0" smtClean="0">
+                <a:latin typeface="Cambria" panose="02040503050406030204" pitchFamily="18" charset="0"/>
+                <a:ea typeface="Cambria" panose="02040503050406030204" pitchFamily="18" charset="0"/>
+              </a:rPr>
+              <a:t> is the server name on which </a:t>
+            </a:r>
+            <a:r>
+              <a:rPr lang="en-GB" sz="2400" dirty="0" err="1" smtClean="0">
+                <a:latin typeface="Cambria" panose="02040503050406030204" pitchFamily="18" charset="0"/>
+                <a:ea typeface="Cambria" panose="02040503050406030204" pitchFamily="18" charset="0"/>
+              </a:rPr>
+              <a:t>mysql</a:t>
+            </a:r>
+            <a:r>
+              <a:rPr lang="en-GB" sz="2400" dirty="0" smtClean="0">
+                <a:latin typeface="Cambria" panose="02040503050406030204" pitchFamily="18" charset="0"/>
+                <a:ea typeface="Cambria" panose="02040503050406030204" pitchFamily="18" charset="0"/>
+              </a:rPr>
+              <a:t> is running, we may also use IP address, 3306 is the port number and </a:t>
+            </a:r>
+            <a:r>
+              <a:rPr lang="en-GB" sz="2400" dirty="0" err="1" smtClean="0">
+                <a:latin typeface="Cambria" panose="02040503050406030204" pitchFamily="18" charset="0"/>
+                <a:ea typeface="Cambria" panose="02040503050406030204" pitchFamily="18" charset="0"/>
+              </a:rPr>
+              <a:t>sonoo</a:t>
+            </a:r>
+            <a:r>
+              <a:rPr lang="en-GB" sz="2400" dirty="0" smtClean="0">
+                <a:latin typeface="Cambria" panose="02040503050406030204" pitchFamily="18" charset="0"/>
+                <a:ea typeface="Cambria" panose="02040503050406030204" pitchFamily="18" charset="0"/>
+              </a:rPr>
+              <a:t> is the database name. We may use any database, in such case, we need to replace the </a:t>
+            </a:r>
+            <a:r>
+              <a:rPr lang="en-GB" sz="2400" dirty="0" err="1" smtClean="0">
+                <a:latin typeface="Cambria" panose="02040503050406030204" pitchFamily="18" charset="0"/>
+                <a:ea typeface="Cambria" panose="02040503050406030204" pitchFamily="18" charset="0"/>
+              </a:rPr>
+              <a:t>sonoo</a:t>
+            </a:r>
+            <a:r>
+              <a:rPr lang="en-GB" sz="2400" dirty="0" smtClean="0">
+                <a:latin typeface="Cambria" panose="02040503050406030204" pitchFamily="18" charset="0"/>
+                <a:ea typeface="Cambria" panose="02040503050406030204" pitchFamily="18" charset="0"/>
+              </a:rPr>
+              <a:t> with our database name.</a:t>
+            </a:r>
+          </a:p>
+          <a:p>
+            <a:pPr marL="514350" indent="-514350" algn="just">
+              <a:buFont typeface="+mj-lt"/>
+              <a:buAutoNum type="arabicPeriod"/>
+            </a:pPr>
+            <a:r>
+              <a:rPr lang="en-GB" sz="2400" b="1" dirty="0" smtClean="0">
+                <a:latin typeface="Cambria" panose="02040503050406030204" pitchFamily="18" charset="0"/>
+                <a:ea typeface="Cambria" panose="02040503050406030204" pitchFamily="18" charset="0"/>
+              </a:rPr>
+              <a:t>Username: </a:t>
+            </a:r>
+            <a:r>
+              <a:rPr lang="en-GB" sz="2400" dirty="0" smtClean="0">
+                <a:latin typeface="Cambria" panose="02040503050406030204" pitchFamily="18" charset="0"/>
+                <a:ea typeface="Cambria" panose="02040503050406030204" pitchFamily="18" charset="0"/>
+              </a:rPr>
+              <a:t>The default username for the </a:t>
+            </a:r>
+            <a:r>
+              <a:rPr lang="en-GB" sz="2400" dirty="0" err="1" smtClean="0">
+                <a:latin typeface="Cambria" panose="02040503050406030204" pitchFamily="18" charset="0"/>
+                <a:ea typeface="Cambria" panose="02040503050406030204" pitchFamily="18" charset="0"/>
+              </a:rPr>
+              <a:t>mysql</a:t>
+            </a:r>
+            <a:r>
+              <a:rPr lang="en-GB" sz="2400" dirty="0" smtClean="0">
+                <a:latin typeface="Cambria" panose="02040503050406030204" pitchFamily="18" charset="0"/>
+                <a:ea typeface="Cambria" panose="02040503050406030204" pitchFamily="18" charset="0"/>
+              </a:rPr>
+              <a:t> database is </a:t>
+            </a:r>
+            <a:r>
+              <a:rPr lang="en-GB" sz="2400" b="1" dirty="0" smtClean="0">
+                <a:latin typeface="Cambria" panose="02040503050406030204" pitchFamily="18" charset="0"/>
+                <a:ea typeface="Cambria" panose="02040503050406030204" pitchFamily="18" charset="0"/>
+              </a:rPr>
+              <a:t>root</a:t>
+            </a:r>
+            <a:r>
+              <a:rPr lang="en-GB" sz="2400" dirty="0" smtClean="0">
+                <a:latin typeface="Cambria" panose="02040503050406030204" pitchFamily="18" charset="0"/>
+                <a:ea typeface="Cambria" panose="02040503050406030204" pitchFamily="18" charset="0"/>
+              </a:rPr>
+              <a:t>.</a:t>
+            </a:r>
+          </a:p>
+          <a:p>
+            <a:pPr marL="514350" indent="-514350" algn="just">
+              <a:buFont typeface="+mj-lt"/>
+              <a:buAutoNum type="arabicPeriod"/>
+            </a:pPr>
+            <a:r>
+              <a:rPr lang="en-GB" sz="2400" b="1" dirty="0" smtClean="0">
+                <a:latin typeface="Cambria" panose="02040503050406030204" pitchFamily="18" charset="0"/>
+                <a:ea typeface="Cambria" panose="02040503050406030204" pitchFamily="18" charset="0"/>
+              </a:rPr>
+              <a:t>Password: </a:t>
+            </a:r>
+            <a:r>
+              <a:rPr lang="en-GB" sz="2400" dirty="0" smtClean="0">
+                <a:latin typeface="Cambria" panose="02040503050406030204" pitchFamily="18" charset="0"/>
+                <a:ea typeface="Cambria" panose="02040503050406030204" pitchFamily="18" charset="0"/>
+              </a:rPr>
+              <a:t>It is the password given by the user at the time of installing the </a:t>
+            </a:r>
+            <a:r>
+              <a:rPr lang="en-GB" sz="2400" dirty="0" err="1" smtClean="0">
+                <a:latin typeface="Cambria" panose="02040503050406030204" pitchFamily="18" charset="0"/>
+                <a:ea typeface="Cambria" panose="02040503050406030204" pitchFamily="18" charset="0"/>
+              </a:rPr>
+              <a:t>mysql</a:t>
+            </a:r>
+            <a:r>
+              <a:rPr lang="en-GB" sz="2400" dirty="0" smtClean="0">
+                <a:latin typeface="Cambria" panose="02040503050406030204" pitchFamily="18" charset="0"/>
+                <a:ea typeface="Cambria" panose="02040503050406030204" pitchFamily="18" charset="0"/>
+              </a:rPr>
+              <a:t> database. In this example, we are going to use root as the password.</a:t>
+            </a:r>
+          </a:p>
+          <a:p>
+            <a:pPr algn="just"/>
+            <a:endParaRPr lang="en-US" sz="2400" dirty="0">
               <a:latin typeface="Cambria" panose="02040503050406030204" pitchFamily="18" charset="0"/>
               <a:ea typeface="Cambria" panose="02040503050406030204" pitchFamily="18" charset="0"/>
             </a:endParaRPr>
@@ -41363,7 +41786,7 @@
         <p:spPr>
           <a:xfrm>
             <a:off x="0" y="7803"/>
-            <a:ext cx="10920536" cy="756901"/>
+            <a:ext cx="2711624" cy="612885"/>
           </a:xfrm>
         </p:spPr>
         <p:txBody>
@@ -41371,64 +41794,16 @@
           <a:lstStyle/>
           <a:p>
             <a:r>
-              <a:rPr lang="en-GB" sz="3200" b="1" dirty="0" smtClean="0">
+              <a:rPr lang="en-GB" b="1" dirty="0" err="1" smtClean="0">
                 <a:solidFill>
                   <a:schemeClr val="accent1"/>
                 </a:solidFill>
                 <a:latin typeface="Cambria" panose="02040503050406030204" pitchFamily="18" charset="0"/>
                 <a:ea typeface="Cambria" panose="02040503050406030204" pitchFamily="18" charset="0"/>
               </a:rPr>
-              <a:t> </a:t>
-            </a:r>
-            <a:br>
-              <a:rPr lang="en-GB" sz="3200" b="1" dirty="0" smtClean="0">
-                <a:solidFill>
-                  <a:schemeClr val="accent1"/>
-                </a:solidFill>
-                <a:latin typeface="Cambria" panose="02040503050406030204" pitchFamily="18" charset="0"/>
-                <a:ea typeface="Cambria" panose="02040503050406030204" pitchFamily="18" charset="0"/>
-              </a:rPr>
-            </a:br>
-            <a:r>
-              <a:rPr lang="en-GB" sz="3200" b="1" dirty="0" smtClean="0">
-                <a:solidFill>
-                  <a:schemeClr val="accent1"/>
-                </a:solidFill>
-                <a:latin typeface="Cambria" panose="02040503050406030204" pitchFamily="18" charset="0"/>
-                <a:ea typeface="Cambria" panose="02040503050406030204" pitchFamily="18" charset="0"/>
-              </a:rPr>
-              <a:t>Example to Connect Java Application with </a:t>
-            </a:r>
-            <a:r>
-              <a:rPr lang="en-GB" sz="3200" b="1" dirty="0" err="1" smtClean="0">
-                <a:solidFill>
-                  <a:schemeClr val="accent1"/>
-                </a:solidFill>
-                <a:latin typeface="Cambria" panose="02040503050406030204" pitchFamily="18" charset="0"/>
-                <a:ea typeface="Cambria" panose="02040503050406030204" pitchFamily="18" charset="0"/>
-              </a:rPr>
-              <a:t>mysql</a:t>
-            </a:r>
-            <a:r>
-              <a:rPr lang="en-GB" sz="3200" b="1" dirty="0" smtClean="0">
-                <a:solidFill>
-                  <a:schemeClr val="accent1"/>
-                </a:solidFill>
-                <a:latin typeface="Cambria" panose="02040503050406030204" pitchFamily="18" charset="0"/>
-                <a:ea typeface="Cambria" panose="02040503050406030204" pitchFamily="18" charset="0"/>
-              </a:rPr>
-              <a:t> database</a:t>
-            </a:r>
-            <a:br>
-              <a:rPr lang="en-GB" sz="3200" b="1" dirty="0" smtClean="0">
-                <a:solidFill>
-                  <a:schemeClr val="accent1"/>
-                </a:solidFill>
-                <a:latin typeface="Cambria" panose="02040503050406030204" pitchFamily="18" charset="0"/>
-                <a:ea typeface="Cambria" panose="02040503050406030204" pitchFamily="18" charset="0"/>
-              </a:rPr>
-            </a:br>
-            <a:endParaRPr lang="en-US" sz="3200" b="1" dirty="0">
+              <a:t>MySQL</a:t>
+            </a:r>
+            <a:endParaRPr lang="en-US" b="1" dirty="0">
               <a:solidFill>
                 <a:schemeClr val="accent1"/>
               </a:solidFill>
@@ -41450,509 +41825,145 @@
         </p:nvSpPr>
         <p:spPr>
           <a:xfrm>
-            <a:off x="551384" y="768696"/>
-            <a:ext cx="10515600" cy="4351338"/>
+            <a:off x="335360" y="836712"/>
+            <a:ext cx="10801200" cy="2520280"/>
           </a:xfrm>
         </p:spPr>
         <p:txBody>
           <a:bodyPr/>
           <a:lstStyle/>
           <a:p>
-            <a:pPr algn="just">
-              <a:spcBef>
-                <a:spcPts val="0"/>
-              </a:spcBef>
-            </a:pPr>
-            <a:r>
-              <a:rPr lang="en-GB" sz="1800" dirty="0" smtClean="0">
-                <a:latin typeface="Cambria" panose="02040503050406030204" pitchFamily="18" charset="0"/>
-                <a:ea typeface="Cambria" panose="02040503050406030204" pitchFamily="18" charset="0"/>
-              </a:rPr>
-              <a:t>In this example, </a:t>
-            </a:r>
-            <a:r>
-              <a:rPr lang="en-GB" sz="1800" dirty="0" err="1" smtClean="0">
+            <a:pPr algn="just"/>
+            <a:r>
+              <a:rPr lang="en-GB" dirty="0" smtClean="0">
+                <a:latin typeface="Cambria" panose="02040503050406030204" pitchFamily="18" charset="0"/>
+                <a:ea typeface="Cambria" panose="02040503050406030204" pitchFamily="18" charset="0"/>
+              </a:rPr>
+              <a:t>Let's first create a table in the </a:t>
+            </a:r>
+            <a:r>
+              <a:rPr lang="en-GB" dirty="0" err="1" smtClean="0">
+                <a:latin typeface="Cambria" panose="02040503050406030204" pitchFamily="18" charset="0"/>
+                <a:ea typeface="Cambria" panose="02040503050406030204" pitchFamily="18" charset="0"/>
+              </a:rPr>
+              <a:t>mysql</a:t>
+            </a:r>
+            <a:r>
+              <a:rPr lang="en-GB" dirty="0" smtClean="0">
+                <a:latin typeface="Cambria" panose="02040503050406030204" pitchFamily="18" charset="0"/>
+                <a:ea typeface="Cambria" panose="02040503050406030204" pitchFamily="18" charset="0"/>
+              </a:rPr>
+              <a:t> database, but before creating table, we need to create database first.</a:t>
+            </a:r>
+          </a:p>
+          <a:p>
+            <a:pPr algn="just"/>
+            <a:r>
+              <a:rPr lang="en-GB" dirty="0" smtClean="0">
+                <a:latin typeface="Cambria" panose="02040503050406030204" pitchFamily="18" charset="0"/>
+                <a:ea typeface="Cambria" panose="02040503050406030204" pitchFamily="18" charset="0"/>
+              </a:rPr>
+              <a:t>create database </a:t>
+            </a:r>
+            <a:r>
+              <a:rPr lang="en-GB" dirty="0" err="1" smtClean="0">
                 <a:latin typeface="Cambria" panose="02040503050406030204" pitchFamily="18" charset="0"/>
                 <a:ea typeface="Cambria" panose="02040503050406030204" pitchFamily="18" charset="0"/>
               </a:rPr>
               <a:t>sonoo</a:t>
             </a:r>
             <a:r>
-              <a:rPr lang="en-GB" sz="1800" dirty="0" smtClean="0">
-                <a:latin typeface="Cambria" panose="02040503050406030204" pitchFamily="18" charset="0"/>
-                <a:ea typeface="Cambria" panose="02040503050406030204" pitchFamily="18" charset="0"/>
-              </a:rPr>
-              <a:t> is the database name, root is the username and password both.</a:t>
-            </a:r>
-          </a:p>
-          <a:p>
-            <a:pPr algn="just">
-              <a:spcBef>
-                <a:spcPts val="0"/>
-              </a:spcBef>
-              <a:buNone/>
-            </a:pPr>
-            <a:r>
-              <a:rPr lang="en-US" sz="1800" b="1" dirty="0" smtClean="0">
-                <a:latin typeface="Cambria" panose="02040503050406030204" pitchFamily="18" charset="0"/>
-                <a:ea typeface="Cambria" panose="02040503050406030204" pitchFamily="18" charset="0"/>
-              </a:rPr>
-              <a:t>import</a:t>
-            </a:r>
-            <a:r>
-              <a:rPr lang="en-US" sz="1800" dirty="0" smtClean="0">
-                <a:latin typeface="Cambria" panose="02040503050406030204" pitchFamily="18" charset="0"/>
-                <a:ea typeface="Cambria" panose="02040503050406030204" pitchFamily="18" charset="0"/>
-              </a:rPr>
-              <a:t> java.sql.*;  </a:t>
-            </a:r>
-          </a:p>
-          <a:p>
-            <a:pPr algn="just">
-              <a:spcBef>
-                <a:spcPts val="0"/>
-              </a:spcBef>
-              <a:buNone/>
-            </a:pPr>
-            <a:r>
-              <a:rPr lang="en-US" sz="1800" b="1" dirty="0" smtClean="0">
-                <a:latin typeface="Cambria" panose="02040503050406030204" pitchFamily="18" charset="0"/>
-                <a:ea typeface="Cambria" panose="02040503050406030204" pitchFamily="18" charset="0"/>
-              </a:rPr>
-              <a:t>class</a:t>
-            </a:r>
-            <a:r>
-              <a:rPr lang="en-US" sz="1800" dirty="0" smtClean="0">
-                <a:latin typeface="Cambria" panose="02040503050406030204" pitchFamily="18" charset="0"/>
-                <a:ea typeface="Cambria" panose="02040503050406030204" pitchFamily="18" charset="0"/>
-              </a:rPr>
-              <a:t> </a:t>
-            </a:r>
-            <a:r>
-              <a:rPr lang="en-US" sz="1800" dirty="0" err="1" smtClean="0">
-                <a:latin typeface="Cambria" panose="02040503050406030204" pitchFamily="18" charset="0"/>
-                <a:ea typeface="Cambria" panose="02040503050406030204" pitchFamily="18" charset="0"/>
-              </a:rPr>
-              <a:t>MysqlCon</a:t>
-            </a:r>
-            <a:r>
-              <a:rPr lang="en-US" sz="1800" dirty="0" smtClean="0">
-                <a:latin typeface="Cambria" panose="02040503050406030204" pitchFamily="18" charset="0"/>
-                <a:ea typeface="Cambria" panose="02040503050406030204" pitchFamily="18" charset="0"/>
-              </a:rPr>
-              <a:t>{  </a:t>
-            </a:r>
-          </a:p>
-          <a:p>
-            <a:pPr algn="just">
-              <a:spcBef>
-                <a:spcPts val="0"/>
-              </a:spcBef>
-              <a:buNone/>
-            </a:pPr>
-            <a:r>
-              <a:rPr lang="en-US" sz="1800" b="1" dirty="0" smtClean="0">
-                <a:latin typeface="Cambria" panose="02040503050406030204" pitchFamily="18" charset="0"/>
-                <a:ea typeface="Cambria" panose="02040503050406030204" pitchFamily="18" charset="0"/>
-              </a:rPr>
-              <a:t>public</a:t>
-            </a:r>
-            <a:r>
-              <a:rPr lang="en-US" sz="1800" dirty="0" smtClean="0">
-                <a:latin typeface="Cambria" panose="02040503050406030204" pitchFamily="18" charset="0"/>
-                <a:ea typeface="Cambria" panose="02040503050406030204" pitchFamily="18" charset="0"/>
-              </a:rPr>
-              <a:t> </a:t>
-            </a:r>
-            <a:r>
-              <a:rPr lang="en-US" sz="1800" b="1" dirty="0" smtClean="0">
-                <a:latin typeface="Cambria" panose="02040503050406030204" pitchFamily="18" charset="0"/>
-                <a:ea typeface="Cambria" panose="02040503050406030204" pitchFamily="18" charset="0"/>
-              </a:rPr>
-              <a:t>static</a:t>
-            </a:r>
-            <a:r>
-              <a:rPr lang="en-US" sz="1800" dirty="0" smtClean="0">
-                <a:latin typeface="Cambria" panose="02040503050406030204" pitchFamily="18" charset="0"/>
-                <a:ea typeface="Cambria" panose="02040503050406030204" pitchFamily="18" charset="0"/>
-              </a:rPr>
-              <a:t> </a:t>
-            </a:r>
-            <a:r>
-              <a:rPr lang="en-US" sz="1800" b="1" dirty="0" smtClean="0">
-                <a:latin typeface="Cambria" panose="02040503050406030204" pitchFamily="18" charset="0"/>
-                <a:ea typeface="Cambria" panose="02040503050406030204" pitchFamily="18" charset="0"/>
-              </a:rPr>
-              <a:t>void</a:t>
-            </a:r>
-            <a:r>
-              <a:rPr lang="en-US" sz="1800" dirty="0" smtClean="0">
-                <a:latin typeface="Cambria" panose="02040503050406030204" pitchFamily="18" charset="0"/>
-                <a:ea typeface="Cambria" panose="02040503050406030204" pitchFamily="18" charset="0"/>
-              </a:rPr>
-              <a:t> main(String </a:t>
-            </a:r>
-            <a:r>
-              <a:rPr lang="en-US" sz="1800" dirty="0" err="1" smtClean="0">
-                <a:latin typeface="Cambria" panose="02040503050406030204" pitchFamily="18" charset="0"/>
-                <a:ea typeface="Cambria" panose="02040503050406030204" pitchFamily="18" charset="0"/>
-              </a:rPr>
-              <a:t>args</a:t>
-            </a:r>
-            <a:r>
-              <a:rPr lang="en-US" sz="1800" dirty="0" smtClean="0">
-                <a:latin typeface="Cambria" panose="02040503050406030204" pitchFamily="18" charset="0"/>
-                <a:ea typeface="Cambria" panose="02040503050406030204" pitchFamily="18" charset="0"/>
-              </a:rPr>
-              <a:t>[]){  </a:t>
-            </a:r>
-          </a:p>
-          <a:p>
-            <a:pPr algn="just">
-              <a:spcBef>
-                <a:spcPts val="0"/>
-              </a:spcBef>
-              <a:buNone/>
-            </a:pPr>
-            <a:r>
-              <a:rPr lang="en-US" sz="1800" b="1" dirty="0" smtClean="0">
-                <a:latin typeface="Cambria" panose="02040503050406030204" pitchFamily="18" charset="0"/>
-                <a:ea typeface="Cambria" panose="02040503050406030204" pitchFamily="18" charset="0"/>
-              </a:rPr>
-              <a:t>try</a:t>
-            </a:r>
-            <a:r>
-              <a:rPr lang="en-US" sz="1800" dirty="0" smtClean="0">
-                <a:latin typeface="Cambria" panose="02040503050406030204" pitchFamily="18" charset="0"/>
-                <a:ea typeface="Cambria" panose="02040503050406030204" pitchFamily="18" charset="0"/>
-              </a:rPr>
-              <a:t>{  </a:t>
-            </a:r>
-          </a:p>
-          <a:p>
-            <a:pPr algn="just">
-              <a:spcBef>
-                <a:spcPts val="0"/>
-              </a:spcBef>
-              <a:buNone/>
-            </a:pPr>
-            <a:r>
-              <a:rPr lang="en-US" sz="1800" dirty="0" err="1" smtClean="0">
-                <a:latin typeface="Cambria" panose="02040503050406030204" pitchFamily="18" charset="0"/>
-                <a:ea typeface="Cambria" panose="02040503050406030204" pitchFamily="18" charset="0"/>
-              </a:rPr>
-              <a:t>Class.forName</a:t>
-            </a:r>
-            <a:r>
-              <a:rPr lang="en-US" sz="1800" dirty="0" smtClean="0">
-                <a:latin typeface="Cambria" panose="02040503050406030204" pitchFamily="18" charset="0"/>
-                <a:ea typeface="Cambria" panose="02040503050406030204" pitchFamily="18" charset="0"/>
-              </a:rPr>
-              <a:t>("</a:t>
-            </a:r>
-            <a:r>
-              <a:rPr lang="en-US" sz="1800" dirty="0" err="1" smtClean="0">
-                <a:latin typeface="Cambria" panose="02040503050406030204" pitchFamily="18" charset="0"/>
-                <a:ea typeface="Cambria" panose="02040503050406030204" pitchFamily="18" charset="0"/>
-              </a:rPr>
-              <a:t>com.mysql.jdbc.Driver</a:t>
-            </a:r>
-            <a:r>
-              <a:rPr lang="en-US" sz="1800" dirty="0" smtClean="0">
-                <a:latin typeface="Cambria" panose="02040503050406030204" pitchFamily="18" charset="0"/>
-                <a:ea typeface="Cambria" panose="02040503050406030204" pitchFamily="18" charset="0"/>
-              </a:rPr>
-              <a:t>");  </a:t>
-            </a:r>
-          </a:p>
-          <a:p>
-            <a:pPr algn="just">
-              <a:spcBef>
-                <a:spcPts val="0"/>
-              </a:spcBef>
-              <a:buNone/>
-            </a:pPr>
-            <a:r>
-              <a:rPr lang="en-US" sz="1800" dirty="0" smtClean="0">
-                <a:latin typeface="Cambria" panose="02040503050406030204" pitchFamily="18" charset="0"/>
-                <a:ea typeface="Cambria" panose="02040503050406030204" pitchFamily="18" charset="0"/>
-              </a:rPr>
-              <a:t>Connection con=</a:t>
-            </a:r>
-            <a:r>
-              <a:rPr lang="en-US" sz="1800" dirty="0" err="1" smtClean="0">
-                <a:latin typeface="Cambria" panose="02040503050406030204" pitchFamily="18" charset="0"/>
-                <a:ea typeface="Cambria" panose="02040503050406030204" pitchFamily="18" charset="0"/>
-              </a:rPr>
-              <a:t>DriverManager.getConnection</a:t>
-            </a:r>
-            <a:r>
-              <a:rPr lang="en-US" sz="1800" dirty="0" smtClean="0">
-                <a:latin typeface="Cambria" panose="02040503050406030204" pitchFamily="18" charset="0"/>
-                <a:ea typeface="Cambria" panose="02040503050406030204" pitchFamily="18" charset="0"/>
-              </a:rPr>
-              <a:t>(  </a:t>
-            </a:r>
-          </a:p>
-          <a:p>
-            <a:pPr algn="just">
-              <a:spcBef>
-                <a:spcPts val="0"/>
-              </a:spcBef>
-              <a:buNone/>
-            </a:pPr>
-            <a:r>
-              <a:rPr lang="en-US" sz="1800" dirty="0" smtClean="0">
-                <a:latin typeface="Cambria" panose="02040503050406030204" pitchFamily="18" charset="0"/>
-                <a:ea typeface="Cambria" panose="02040503050406030204" pitchFamily="18" charset="0"/>
-              </a:rPr>
-              <a:t>"</a:t>
-            </a:r>
-            <a:r>
-              <a:rPr lang="en-US" sz="1800" dirty="0" err="1" smtClean="0">
-                <a:latin typeface="Cambria" panose="02040503050406030204" pitchFamily="18" charset="0"/>
-                <a:ea typeface="Cambria" panose="02040503050406030204" pitchFamily="18" charset="0"/>
-              </a:rPr>
-              <a:t>jdbc:mysql</a:t>
-            </a:r>
-            <a:r>
-              <a:rPr lang="en-US" sz="1800" dirty="0" smtClean="0">
-                <a:latin typeface="Cambria" panose="02040503050406030204" pitchFamily="18" charset="0"/>
-                <a:ea typeface="Cambria" panose="02040503050406030204" pitchFamily="18" charset="0"/>
-              </a:rPr>
-              <a:t>://localhost:3306/</a:t>
-            </a:r>
-            <a:r>
-              <a:rPr lang="en-US" sz="1800" dirty="0" err="1" smtClean="0">
-                <a:latin typeface="Cambria" panose="02040503050406030204" pitchFamily="18" charset="0"/>
-                <a:ea typeface="Cambria" panose="02040503050406030204" pitchFamily="18" charset="0"/>
-              </a:rPr>
-              <a:t>sonoo","root","root</a:t>
-            </a:r>
-            <a:r>
-              <a:rPr lang="en-US" sz="1800" dirty="0" smtClean="0">
-                <a:latin typeface="Cambria" panose="02040503050406030204" pitchFamily="18" charset="0"/>
-                <a:ea typeface="Cambria" panose="02040503050406030204" pitchFamily="18" charset="0"/>
-              </a:rPr>
-              <a:t>");  </a:t>
-            </a:r>
-          </a:p>
-          <a:p>
-            <a:pPr algn="just">
-              <a:spcBef>
-                <a:spcPts val="0"/>
-              </a:spcBef>
-              <a:buNone/>
-            </a:pPr>
-            <a:r>
-              <a:rPr lang="en-US" sz="1800" dirty="0" smtClean="0">
-                <a:latin typeface="Cambria" panose="02040503050406030204" pitchFamily="18" charset="0"/>
-                <a:ea typeface="Cambria" panose="02040503050406030204" pitchFamily="18" charset="0"/>
-              </a:rPr>
-              <a:t>//here </a:t>
-            </a:r>
-            <a:r>
-              <a:rPr lang="en-US" sz="1800" dirty="0" err="1" smtClean="0">
+              <a:rPr lang="en-GB" dirty="0" smtClean="0">
+                <a:latin typeface="Cambria" panose="02040503050406030204" pitchFamily="18" charset="0"/>
+                <a:ea typeface="Cambria" panose="02040503050406030204" pitchFamily="18" charset="0"/>
+              </a:rPr>
+              <a:t>;  </a:t>
+            </a:r>
+          </a:p>
+          <a:p>
+            <a:pPr algn="just"/>
+            <a:r>
+              <a:rPr lang="en-GB" dirty="0" smtClean="0">
+                <a:latin typeface="Cambria" panose="02040503050406030204" pitchFamily="18" charset="0"/>
+                <a:ea typeface="Cambria" panose="02040503050406030204" pitchFamily="18" charset="0"/>
+              </a:rPr>
+              <a:t>use </a:t>
+            </a:r>
+            <a:r>
+              <a:rPr lang="en-GB" dirty="0" err="1" smtClean="0">
                 <a:latin typeface="Cambria" panose="02040503050406030204" pitchFamily="18" charset="0"/>
                 <a:ea typeface="Cambria" panose="02040503050406030204" pitchFamily="18" charset="0"/>
               </a:rPr>
               <a:t>sonoo</a:t>
             </a:r>
             <a:r>
-              <a:rPr lang="en-US" sz="1800" dirty="0" smtClean="0">
-                <a:latin typeface="Cambria" panose="02040503050406030204" pitchFamily="18" charset="0"/>
-                <a:ea typeface="Cambria" panose="02040503050406030204" pitchFamily="18" charset="0"/>
-              </a:rPr>
-              <a:t> is database name, root is username and password  </a:t>
-            </a:r>
-          </a:p>
-          <a:p>
-            <a:pPr algn="just">
-              <a:spcBef>
-                <a:spcPts val="0"/>
-              </a:spcBef>
-              <a:buNone/>
-            </a:pPr>
-            <a:r>
-              <a:rPr lang="en-US" sz="1800" dirty="0" smtClean="0">
-                <a:latin typeface="Cambria" panose="02040503050406030204" pitchFamily="18" charset="0"/>
-                <a:ea typeface="Cambria" panose="02040503050406030204" pitchFamily="18" charset="0"/>
-              </a:rPr>
-              <a:t>Statement stmt=</a:t>
-            </a:r>
-            <a:r>
-              <a:rPr lang="en-US" sz="1800" dirty="0" err="1" smtClean="0">
-                <a:latin typeface="Cambria" panose="02040503050406030204" pitchFamily="18" charset="0"/>
-                <a:ea typeface="Cambria" panose="02040503050406030204" pitchFamily="18" charset="0"/>
-              </a:rPr>
-              <a:t>con.createStatement</a:t>
-            </a:r>
-            <a:r>
-              <a:rPr lang="en-US" sz="1800" dirty="0" smtClean="0">
-                <a:latin typeface="Cambria" panose="02040503050406030204" pitchFamily="18" charset="0"/>
-                <a:ea typeface="Cambria" panose="02040503050406030204" pitchFamily="18" charset="0"/>
-              </a:rPr>
-              <a:t>();  </a:t>
-            </a:r>
-          </a:p>
-          <a:p>
-            <a:pPr algn="just">
-              <a:spcBef>
-                <a:spcPts val="0"/>
-              </a:spcBef>
-              <a:buNone/>
-            </a:pPr>
-            <a:r>
-              <a:rPr lang="en-US" sz="1800" dirty="0" err="1" smtClean="0">
-                <a:latin typeface="Cambria" panose="02040503050406030204" pitchFamily="18" charset="0"/>
-                <a:ea typeface="Cambria" panose="02040503050406030204" pitchFamily="18" charset="0"/>
-              </a:rPr>
-              <a:t>ResultSet</a:t>
-            </a:r>
-            <a:r>
-              <a:rPr lang="en-US" sz="1800" dirty="0" smtClean="0">
-                <a:latin typeface="Cambria" panose="02040503050406030204" pitchFamily="18" charset="0"/>
-                <a:ea typeface="Cambria" panose="02040503050406030204" pitchFamily="18" charset="0"/>
-              </a:rPr>
-              <a:t> </a:t>
-            </a:r>
-            <a:r>
-              <a:rPr lang="en-US" sz="1800" dirty="0" err="1" smtClean="0">
-                <a:latin typeface="Cambria" panose="02040503050406030204" pitchFamily="18" charset="0"/>
-                <a:ea typeface="Cambria" panose="02040503050406030204" pitchFamily="18" charset="0"/>
-              </a:rPr>
-              <a:t>rs</a:t>
-            </a:r>
-            <a:r>
-              <a:rPr lang="en-US" sz="1800" dirty="0" smtClean="0">
-                <a:latin typeface="Cambria" panose="02040503050406030204" pitchFamily="18" charset="0"/>
-                <a:ea typeface="Cambria" panose="02040503050406030204" pitchFamily="18" charset="0"/>
-              </a:rPr>
-              <a:t>=</a:t>
-            </a:r>
-            <a:r>
-              <a:rPr lang="en-US" sz="1800" dirty="0" err="1" smtClean="0">
-                <a:latin typeface="Cambria" panose="02040503050406030204" pitchFamily="18" charset="0"/>
-                <a:ea typeface="Cambria" panose="02040503050406030204" pitchFamily="18" charset="0"/>
-              </a:rPr>
-              <a:t>stmt.executeQuery</a:t>
-            </a:r>
-            <a:r>
-              <a:rPr lang="en-US" sz="1800" dirty="0" smtClean="0">
-                <a:latin typeface="Cambria" panose="02040503050406030204" pitchFamily="18" charset="0"/>
-                <a:ea typeface="Cambria" panose="02040503050406030204" pitchFamily="18" charset="0"/>
-              </a:rPr>
-              <a:t>("select * from </a:t>
-            </a:r>
-            <a:r>
-              <a:rPr lang="en-US" sz="1800" dirty="0" err="1" smtClean="0">
+              <a:rPr lang="en-GB" dirty="0" smtClean="0">
+                <a:latin typeface="Cambria" panose="02040503050406030204" pitchFamily="18" charset="0"/>
+                <a:ea typeface="Cambria" panose="02040503050406030204" pitchFamily="18" charset="0"/>
+              </a:rPr>
+              <a:t>;  </a:t>
+            </a:r>
+          </a:p>
+          <a:p>
+            <a:pPr algn="just"/>
+            <a:r>
+              <a:rPr lang="en-GB" dirty="0" smtClean="0">
+                <a:latin typeface="Cambria" panose="02040503050406030204" pitchFamily="18" charset="0"/>
+                <a:ea typeface="Cambria" panose="02040503050406030204" pitchFamily="18" charset="0"/>
+              </a:rPr>
+              <a:t>create table </a:t>
+            </a:r>
+            <a:r>
+              <a:rPr lang="en-GB" dirty="0" err="1" smtClean="0">
                 <a:latin typeface="Cambria" panose="02040503050406030204" pitchFamily="18" charset="0"/>
                 <a:ea typeface="Cambria" panose="02040503050406030204" pitchFamily="18" charset="0"/>
               </a:rPr>
               <a:t>emp</a:t>
             </a:r>
             <a:r>
-              <a:rPr lang="en-US" sz="1800" dirty="0" smtClean="0">
-                <a:latin typeface="Cambria" panose="02040503050406030204" pitchFamily="18" charset="0"/>
-                <a:ea typeface="Cambria" panose="02040503050406030204" pitchFamily="18" charset="0"/>
-              </a:rPr>
-              <a:t>");  </a:t>
-            </a:r>
-          </a:p>
-          <a:p>
-            <a:pPr algn="just">
-              <a:spcBef>
-                <a:spcPts val="0"/>
-              </a:spcBef>
-              <a:buNone/>
-            </a:pPr>
-            <a:r>
-              <a:rPr lang="en-US" sz="1800" b="1" dirty="0" smtClean="0">
-                <a:latin typeface="Cambria" panose="02040503050406030204" pitchFamily="18" charset="0"/>
-                <a:ea typeface="Cambria" panose="02040503050406030204" pitchFamily="18" charset="0"/>
-              </a:rPr>
-              <a:t>while</a:t>
-            </a:r>
-            <a:r>
-              <a:rPr lang="en-US" sz="1800" dirty="0" smtClean="0">
-                <a:latin typeface="Cambria" panose="02040503050406030204" pitchFamily="18" charset="0"/>
-                <a:ea typeface="Cambria" panose="02040503050406030204" pitchFamily="18" charset="0"/>
-              </a:rPr>
-              <a:t>(</a:t>
-            </a:r>
-            <a:r>
-              <a:rPr lang="en-US" sz="1800" dirty="0" err="1" smtClean="0">
-                <a:latin typeface="Cambria" panose="02040503050406030204" pitchFamily="18" charset="0"/>
-                <a:ea typeface="Cambria" panose="02040503050406030204" pitchFamily="18" charset="0"/>
-              </a:rPr>
-              <a:t>rs.next</a:t>
-            </a:r>
-            <a:r>
-              <a:rPr lang="en-US" sz="1800" dirty="0" smtClean="0">
-                <a:latin typeface="Cambria" panose="02040503050406030204" pitchFamily="18" charset="0"/>
-                <a:ea typeface="Cambria" panose="02040503050406030204" pitchFamily="18" charset="0"/>
-              </a:rPr>
-              <a:t>())  </a:t>
-            </a:r>
-          </a:p>
-          <a:p>
-            <a:pPr algn="just">
-              <a:spcBef>
-                <a:spcPts val="0"/>
-              </a:spcBef>
-              <a:buNone/>
-            </a:pPr>
-            <a:r>
-              <a:rPr lang="en-US" sz="1800" dirty="0" err="1" smtClean="0">
-                <a:latin typeface="Cambria" panose="02040503050406030204" pitchFamily="18" charset="0"/>
-                <a:ea typeface="Cambria" panose="02040503050406030204" pitchFamily="18" charset="0"/>
-              </a:rPr>
-              <a:t>System.out.println</a:t>
-            </a:r>
-            <a:r>
-              <a:rPr lang="en-US" sz="1800" dirty="0" smtClean="0">
-                <a:latin typeface="Cambria" panose="02040503050406030204" pitchFamily="18" charset="0"/>
-                <a:ea typeface="Cambria" panose="02040503050406030204" pitchFamily="18" charset="0"/>
-              </a:rPr>
-              <a:t>(</a:t>
-            </a:r>
-            <a:r>
-              <a:rPr lang="en-US" sz="1800" dirty="0" err="1" smtClean="0">
-                <a:latin typeface="Cambria" panose="02040503050406030204" pitchFamily="18" charset="0"/>
-                <a:ea typeface="Cambria" panose="02040503050406030204" pitchFamily="18" charset="0"/>
-              </a:rPr>
-              <a:t>rs.getInt</a:t>
-            </a:r>
-            <a:r>
-              <a:rPr lang="en-US" sz="1800" dirty="0" smtClean="0">
-                <a:latin typeface="Cambria" panose="02040503050406030204" pitchFamily="18" charset="0"/>
-                <a:ea typeface="Cambria" panose="02040503050406030204" pitchFamily="18" charset="0"/>
-              </a:rPr>
-              <a:t>(1)+"  "+</a:t>
-            </a:r>
-            <a:r>
-              <a:rPr lang="en-US" sz="1800" dirty="0" err="1" smtClean="0">
-                <a:latin typeface="Cambria" panose="02040503050406030204" pitchFamily="18" charset="0"/>
-                <a:ea typeface="Cambria" panose="02040503050406030204" pitchFamily="18" charset="0"/>
-              </a:rPr>
-              <a:t>rs.getString</a:t>
-            </a:r>
-            <a:r>
-              <a:rPr lang="en-US" sz="1800" dirty="0" smtClean="0">
-                <a:latin typeface="Cambria" panose="02040503050406030204" pitchFamily="18" charset="0"/>
-                <a:ea typeface="Cambria" panose="02040503050406030204" pitchFamily="18" charset="0"/>
-              </a:rPr>
-              <a:t>(2)+"  "+</a:t>
-            </a:r>
-            <a:r>
-              <a:rPr lang="en-US" sz="1800" dirty="0" err="1" smtClean="0">
-                <a:latin typeface="Cambria" panose="02040503050406030204" pitchFamily="18" charset="0"/>
-                <a:ea typeface="Cambria" panose="02040503050406030204" pitchFamily="18" charset="0"/>
-              </a:rPr>
-              <a:t>rs.getString</a:t>
-            </a:r>
-            <a:r>
-              <a:rPr lang="en-US" sz="1800" dirty="0" smtClean="0">
+              <a:rPr lang="en-GB" dirty="0" smtClean="0">
+                <a:latin typeface="Cambria" panose="02040503050406030204" pitchFamily="18" charset="0"/>
+                <a:ea typeface="Cambria" panose="02040503050406030204" pitchFamily="18" charset="0"/>
+              </a:rPr>
+              <a:t>(id </a:t>
+            </a:r>
+            <a:r>
+              <a:rPr lang="en-GB" b="1" dirty="0" err="1" smtClean="0">
+                <a:latin typeface="Cambria" panose="02040503050406030204" pitchFamily="18" charset="0"/>
+                <a:ea typeface="Cambria" panose="02040503050406030204" pitchFamily="18" charset="0"/>
+              </a:rPr>
+              <a:t>int</a:t>
+            </a:r>
+            <a:r>
+              <a:rPr lang="en-GB" dirty="0" smtClean="0">
+                <a:latin typeface="Cambria" panose="02040503050406030204" pitchFamily="18" charset="0"/>
+                <a:ea typeface="Cambria" panose="02040503050406030204" pitchFamily="18" charset="0"/>
+              </a:rPr>
+              <a:t>(10),name </a:t>
+            </a:r>
+            <a:r>
+              <a:rPr lang="en-GB" dirty="0" err="1" smtClean="0">
+                <a:latin typeface="Cambria" panose="02040503050406030204" pitchFamily="18" charset="0"/>
+                <a:ea typeface="Cambria" panose="02040503050406030204" pitchFamily="18" charset="0"/>
+              </a:rPr>
+              <a:t>varchar</a:t>
+            </a:r>
+            <a:r>
+              <a:rPr lang="en-GB" dirty="0" smtClean="0">
+                <a:latin typeface="Cambria" panose="02040503050406030204" pitchFamily="18" charset="0"/>
+                <a:ea typeface="Cambria" panose="02040503050406030204" pitchFamily="18" charset="0"/>
+              </a:rPr>
+              <a:t>(40),age </a:t>
+            </a:r>
+            <a:r>
+              <a:rPr lang="en-GB" b="1" dirty="0" err="1" smtClean="0">
+                <a:latin typeface="Cambria" panose="02040503050406030204" pitchFamily="18" charset="0"/>
+                <a:ea typeface="Cambria" panose="02040503050406030204" pitchFamily="18" charset="0"/>
+              </a:rPr>
+              <a:t>int</a:t>
+            </a:r>
+            <a:r>
+              <a:rPr lang="en-GB" dirty="0" smtClean="0">
                 <a:latin typeface="Cambria" panose="02040503050406030204" pitchFamily="18" charset="0"/>
                 <a:ea typeface="Cambria" panose="02040503050406030204" pitchFamily="18" charset="0"/>
               </a:rPr>
@@ -41960,108 +41971,8 @@
             </a:r>
           </a:p>
           <a:p>
-            <a:pPr algn="just">
-              <a:spcBef>
-                <a:spcPts val="0"/>
-              </a:spcBef>
-              <a:buNone/>
-            </a:pPr>
-            <a:r>
-              <a:rPr lang="en-US" sz="1800" dirty="0" err="1" smtClean="0">
-                <a:latin typeface="Cambria" panose="02040503050406030204" pitchFamily="18" charset="0"/>
-                <a:ea typeface="Cambria" panose="02040503050406030204" pitchFamily="18" charset="0"/>
-              </a:rPr>
-              <a:t>con.close</a:t>
-            </a:r>
-            <a:r>
-              <a:rPr lang="en-US" sz="1800" dirty="0" smtClean="0">
-                <a:latin typeface="Cambria" panose="02040503050406030204" pitchFamily="18" charset="0"/>
-                <a:ea typeface="Cambria" panose="02040503050406030204" pitchFamily="18" charset="0"/>
-              </a:rPr>
-              <a:t>();  </a:t>
-            </a:r>
-          </a:p>
-          <a:p>
-            <a:pPr algn="just">
-              <a:spcBef>
-                <a:spcPts val="0"/>
-              </a:spcBef>
-              <a:buNone/>
-            </a:pPr>
-            <a:r>
-              <a:rPr lang="en-US" sz="1800" dirty="0" smtClean="0">
-                <a:latin typeface="Cambria" panose="02040503050406030204" pitchFamily="18" charset="0"/>
-                <a:ea typeface="Cambria" panose="02040503050406030204" pitchFamily="18" charset="0"/>
-              </a:rPr>
-              <a:t>}</a:t>
-            </a:r>
-            <a:r>
-              <a:rPr lang="en-US" sz="1800" b="1" dirty="0" smtClean="0">
-                <a:latin typeface="Cambria" panose="02040503050406030204" pitchFamily="18" charset="0"/>
-                <a:ea typeface="Cambria" panose="02040503050406030204" pitchFamily="18" charset="0"/>
-              </a:rPr>
-              <a:t>catch</a:t>
-            </a:r>
-            <a:r>
-              <a:rPr lang="en-US" sz="1800" dirty="0" smtClean="0">
-                <a:latin typeface="Cambria" panose="02040503050406030204" pitchFamily="18" charset="0"/>
-                <a:ea typeface="Cambria" panose="02040503050406030204" pitchFamily="18" charset="0"/>
-              </a:rPr>
-              <a:t>(Exception e){ </a:t>
-            </a:r>
-            <a:r>
-              <a:rPr lang="en-US" sz="1800" dirty="0" err="1" smtClean="0">
-                <a:latin typeface="Cambria" panose="02040503050406030204" pitchFamily="18" charset="0"/>
-                <a:ea typeface="Cambria" panose="02040503050406030204" pitchFamily="18" charset="0"/>
-              </a:rPr>
-              <a:t>System.out.println</a:t>
-            </a:r>
-            <a:r>
-              <a:rPr lang="en-US" sz="1800" dirty="0" smtClean="0">
-                <a:latin typeface="Cambria" panose="02040503050406030204" pitchFamily="18" charset="0"/>
-                <a:ea typeface="Cambria" panose="02040503050406030204" pitchFamily="18" charset="0"/>
-              </a:rPr>
-              <a:t>(e);}  </a:t>
-            </a:r>
-          </a:p>
-          <a:p>
-            <a:pPr algn="just">
-              <a:spcBef>
-                <a:spcPts val="0"/>
-              </a:spcBef>
-              <a:buNone/>
-            </a:pPr>
-            <a:r>
-              <a:rPr lang="en-US" sz="1800" dirty="0" smtClean="0">
-                <a:latin typeface="Cambria" panose="02040503050406030204" pitchFamily="18" charset="0"/>
-                <a:ea typeface="Cambria" panose="02040503050406030204" pitchFamily="18" charset="0"/>
-              </a:rPr>
-              <a:t>}  </a:t>
-            </a:r>
-          </a:p>
-          <a:p>
-            <a:pPr algn="just">
-              <a:spcBef>
-                <a:spcPts val="0"/>
-              </a:spcBef>
-              <a:buNone/>
-            </a:pPr>
-            <a:r>
-              <a:rPr lang="en-US" sz="1800" dirty="0" smtClean="0">
-                <a:latin typeface="Cambria" panose="02040503050406030204" pitchFamily="18" charset="0"/>
-                <a:ea typeface="Cambria" panose="02040503050406030204" pitchFamily="18" charset="0"/>
-              </a:rPr>
-              <a:t>}  </a:t>
-            </a:r>
-          </a:p>
-          <a:p>
-            <a:pPr algn="just">
-              <a:spcBef>
-                <a:spcPts val="0"/>
-              </a:spcBef>
-              <a:buNone/>
-            </a:pPr>
-            <a:endParaRPr lang="en-US" sz="1800" dirty="0">
+            <a:pPr algn="just"/>
+            <a:endParaRPr lang="en-US" dirty="0">
               <a:latin typeface="Cambria" panose="02040503050406030204" pitchFamily="18" charset="0"/>
               <a:ea typeface="Cambria" panose="02040503050406030204" pitchFamily="18" charset="0"/>
             </a:endParaRPr>
@@ -42145,16 +42056,81 @@
             <p:ph type="title"/>
           </p:nvPr>
         </p:nvSpPr>
-        <p:spPr/>
+        <p:spPr>
+          <a:xfrm>
+            <a:off x="0" y="7803"/>
+            <a:ext cx="10920536" cy="756901"/>
+          </a:xfrm>
+        </p:spPr>
         <p:txBody>
           <a:bodyPr/>
           <a:lstStyle/>
           <a:p>
             <a:r>
-              <a:rPr lang="en-GB" dirty="0" smtClean="0"/>
-              <a:t>Configuring</a:t>
-            </a:r>
-            <a:endParaRPr lang="en-US" dirty="0"/>
+              <a:rPr lang="en-GB" sz="3200" b="1" dirty="0" smtClean="0">
+                <a:solidFill>
+                  <a:schemeClr val="accent1"/>
+                </a:solidFill>
+                <a:latin typeface="Cambria" panose="02040503050406030204" pitchFamily="18" charset="0"/>
+                <a:ea typeface="Cambria" panose="02040503050406030204" pitchFamily="18" charset="0"/>
+              </a:rPr>
+              <a:t> </a:t>
+            </a:r>
+            <a:br>
+              <a:rPr lang="en-GB" sz="3200" b="1" dirty="0" smtClean="0">
+                <a:solidFill>
+                  <a:schemeClr val="accent1"/>
+                </a:solidFill>
+                <a:latin typeface="Cambria" panose="02040503050406030204" pitchFamily="18" charset="0"/>
+                <a:ea typeface="Cambria" panose="02040503050406030204" pitchFamily="18" charset="0"/>
+              </a:rPr>
+            </a:br>
+            <a:r>
+              <a:rPr lang="en-GB" sz="3200" b="1" dirty="0" smtClean="0">
+                <a:solidFill>
+                  <a:schemeClr val="accent1"/>
+                </a:solidFill>
+                <a:latin typeface="Cambria" panose="02040503050406030204" pitchFamily="18" charset="0"/>
+                <a:ea typeface="Cambria" panose="02040503050406030204" pitchFamily="18" charset="0"/>
+              </a:rPr>
+              <a:t>Example to Connect Java Application with </a:t>
+            </a:r>
+            <a:r>
+              <a:rPr lang="en-GB" sz="3200" b="1" dirty="0" err="1" smtClean="0">
+                <a:solidFill>
+                  <a:schemeClr val="accent1"/>
+                </a:solidFill>
+                <a:latin typeface="Cambria" panose="02040503050406030204" pitchFamily="18" charset="0"/>
+                <a:ea typeface="Cambria" panose="02040503050406030204" pitchFamily="18" charset="0"/>
+              </a:rPr>
+              <a:t>mysql</a:t>
+            </a:r>
+            <a:r>
+              <a:rPr lang="en-GB" sz="3200" b="1" dirty="0" smtClean="0">
+                <a:solidFill>
+                  <a:schemeClr val="accent1"/>
+                </a:solidFill>
+                <a:latin typeface="Cambria" panose="02040503050406030204" pitchFamily="18" charset="0"/>
+                <a:ea typeface="Cambria" panose="02040503050406030204" pitchFamily="18" charset="0"/>
+              </a:rPr>
+              <a:t> database</a:t>
+            </a:r>
+            <a:br>
+              <a:rPr lang="en-GB" sz="3200" b="1" dirty="0" smtClean="0">
+                <a:solidFill>
+                  <a:schemeClr val="accent1"/>
+                </a:solidFill>
+                <a:latin typeface="Cambria" panose="02040503050406030204" pitchFamily="18" charset="0"/>
+                <a:ea typeface="Cambria" panose="02040503050406030204" pitchFamily="18" charset="0"/>
+              </a:rPr>
+            </a:br>
+            <a:endParaRPr lang="en-US" sz="3200" b="1" dirty="0">
+              <a:solidFill>
+                <a:schemeClr val="accent1"/>
+              </a:solidFill>
+              <a:latin typeface="Cambria" panose="02040503050406030204" pitchFamily="18" charset="0"/>
+              <a:ea typeface="Cambria" panose="02040503050406030204" pitchFamily="18" charset="0"/>
+            </a:endParaRPr>
           </a:p>
         </p:txBody>
       </p:sp>
@@ -42168,175 +42144,623 @@
             <p:ph idx="1"/>
           </p:nvPr>
         </p:nvSpPr>
-        <p:spPr/>
+        <p:spPr>
+          <a:xfrm>
+            <a:off x="551384" y="768696"/>
+            <a:ext cx="10515600" cy="4351338"/>
+          </a:xfrm>
+        </p:spPr>
         <p:txBody>
           <a:bodyPr/>
           <a:lstStyle/>
           <a:p>
-            <a:r>
-              <a:rPr lang="en-GB" dirty="0" smtClean="0"/>
-              <a:t> o connect java application with the </a:t>
-            </a:r>
-            <a:r>
-              <a:rPr lang="en-GB" dirty="0" err="1" smtClean="0"/>
-              <a:t>mysql</a:t>
-            </a:r>
-            <a:r>
-              <a:rPr lang="en-GB" dirty="0" smtClean="0"/>
-              <a:t> database, </a:t>
-            </a:r>
-            <a:r>
-              <a:rPr lang="en-GB" b="1" dirty="0" smtClean="0"/>
-              <a:t>mysqlconnector.jar</a:t>
-            </a:r>
-            <a:r>
-              <a:rPr lang="en-GB" dirty="0" smtClean="0"/>
-              <a:t> file is required to be loaded.</a:t>
-            </a:r>
-          </a:p>
-          <a:p>
-            <a:r>
-              <a:rPr lang="en-GB" dirty="0" smtClean="0">
-                <a:hlinkClick r:id="rId2"/>
-              </a:rPr>
-              <a:t>download the jar file mysql-connector.jar</a:t>
-            </a:r>
-            <a:endParaRPr lang="en-GB" dirty="0" smtClean="0"/>
-          </a:p>
-          <a:p>
-            <a:r>
-              <a:rPr lang="en-GB" dirty="0" smtClean="0"/>
-              <a:t>Two ways to load the jar file:</a:t>
-            </a:r>
-          </a:p>
-          <a:p>
-            <a:r>
-              <a:rPr lang="en-GB" dirty="0" smtClean="0"/>
-              <a:t>Paste the mysqlconnector.jar file in </a:t>
-            </a:r>
-            <a:r>
-              <a:rPr lang="en-GB" dirty="0" err="1" smtClean="0"/>
-              <a:t>jre</a:t>
-            </a:r>
-            <a:r>
-              <a:rPr lang="en-GB" dirty="0" smtClean="0"/>
-              <a:t>/lib/ext folder</a:t>
-            </a:r>
-          </a:p>
-          <a:p>
-            <a:r>
-              <a:rPr lang="en-GB" dirty="0" smtClean="0"/>
-              <a:t>Set </a:t>
-            </a:r>
-            <a:r>
-              <a:rPr lang="en-GB" dirty="0" err="1" smtClean="0"/>
-              <a:t>classpath</a:t>
-            </a:r>
-            <a:endParaRPr lang="en-GB" dirty="0" smtClean="0"/>
-          </a:p>
-          <a:p>
-            <a:r>
-              <a:rPr lang="en-GB" dirty="0" smtClean="0"/>
-              <a:t>1) Paste the mysqlconnector.jar file in JRE/lib/ext folder:</a:t>
-            </a:r>
-          </a:p>
-          <a:p>
-            <a:r>
-              <a:rPr lang="en-GB" dirty="0" smtClean="0"/>
-              <a:t>Download the mysqlconnector.jar file. Go to </a:t>
-            </a:r>
-            <a:r>
-              <a:rPr lang="en-GB" dirty="0" err="1" smtClean="0"/>
-              <a:t>jre</a:t>
-            </a:r>
-            <a:r>
-              <a:rPr lang="en-GB" dirty="0" smtClean="0"/>
-              <a:t>/lib/ext folder and paste the jar file here.2) Set </a:t>
-            </a:r>
-            <a:r>
-              <a:rPr lang="en-GB" dirty="0" err="1" smtClean="0"/>
-              <a:t>classpath</a:t>
-            </a:r>
-            <a:r>
-              <a:rPr lang="en-GB" dirty="0" smtClean="0"/>
-              <a:t>:</a:t>
-            </a:r>
-          </a:p>
-          <a:p>
-            <a:r>
-              <a:rPr lang="en-GB" dirty="0" smtClean="0"/>
-              <a:t>There are two ways to set the </a:t>
-            </a:r>
-            <a:r>
-              <a:rPr lang="en-GB" dirty="0" err="1" smtClean="0"/>
-              <a:t>classpath:temporary</a:t>
-            </a:r>
-            <a:endParaRPr lang="en-GB" dirty="0" smtClean="0"/>
-          </a:p>
-          <a:p>
-            <a:r>
-              <a:rPr lang="en-GB" dirty="0" smtClean="0"/>
-              <a:t>permanent</a:t>
-            </a:r>
-          </a:p>
-          <a:p>
-            <a:r>
-              <a:rPr lang="en-GB" dirty="0" smtClean="0"/>
-              <a:t>How to set the temporary </a:t>
-            </a:r>
-            <a:r>
-              <a:rPr lang="en-GB" dirty="0" err="1" smtClean="0"/>
-              <a:t>classpath</a:t>
-            </a:r>
-            <a:endParaRPr lang="en-GB" dirty="0" smtClean="0"/>
-          </a:p>
-          <a:p>
-            <a:r>
-              <a:rPr lang="en-GB" dirty="0" smtClean="0"/>
-              <a:t>open command prompt and write:</a:t>
-            </a:r>
-          </a:p>
-          <a:p>
-            <a:r>
-              <a:rPr lang="en-GB" dirty="0" smtClean="0"/>
-              <a:t>C:&gt;set </a:t>
-            </a:r>
-            <a:r>
-              <a:rPr lang="en-GB" dirty="0" err="1" smtClean="0"/>
-              <a:t>classpath</a:t>
-            </a:r>
-            <a:r>
-              <a:rPr lang="en-GB" dirty="0" smtClean="0"/>
-              <a:t>=c:\folder\mysql-connector-java-5.0.8-bin.jar;.;  </a:t>
-            </a:r>
-          </a:p>
-          <a:p>
-            <a:r>
-              <a:rPr lang="en-GB" dirty="0" smtClean="0"/>
-              <a:t>How to set the permanent </a:t>
-            </a:r>
-            <a:r>
-              <a:rPr lang="en-GB" dirty="0" err="1" smtClean="0"/>
-              <a:t>classpath</a:t>
-            </a:r>
-            <a:endParaRPr lang="en-GB" dirty="0" smtClean="0"/>
-          </a:p>
-          <a:p>
-            <a:r>
-              <a:rPr lang="en-GB" dirty="0" smtClean="0"/>
-              <a:t>Go to environment variable then click on new tab. In variable name write </a:t>
-            </a:r>
-            <a:r>
-              <a:rPr lang="en-GB" b="1" dirty="0" err="1" smtClean="0"/>
-              <a:t>classpath</a:t>
-            </a:r>
-            <a:r>
-              <a:rPr lang="en-GB" dirty="0" smtClean="0"/>
-              <a:t> and in variable value paste the path to the mysqlconnector.jar file by appending mysqlconnector.jar;.; as C:\folder\mysql-connector-java-5.0.8-bin.jar;.;</a:t>
-            </a:r>
-          </a:p>
-          <a:p>
-            <a:endParaRPr lang="en-US" dirty="0"/>
+            <a:pPr algn="just">
+              <a:spcBef>
+                <a:spcPts val="0"/>
+              </a:spcBef>
+            </a:pPr>
+            <a:r>
+              <a:rPr lang="en-GB" sz="1800" dirty="0" smtClean="0">
+                <a:latin typeface="Cambria" panose="02040503050406030204" pitchFamily="18" charset="0"/>
+                <a:ea typeface="Cambria" panose="02040503050406030204" pitchFamily="18" charset="0"/>
+              </a:rPr>
+              <a:t>In this example, </a:t>
+            </a:r>
+            <a:r>
+              <a:rPr lang="en-GB" sz="1800" dirty="0" err="1" smtClean="0">
+                <a:latin typeface="Cambria" panose="02040503050406030204" pitchFamily="18" charset="0"/>
+                <a:ea typeface="Cambria" panose="02040503050406030204" pitchFamily="18" charset="0"/>
+              </a:rPr>
+              <a:t>sonoo</a:t>
+            </a:r>
+            <a:r>
+              <a:rPr lang="en-GB" sz="1800" dirty="0" smtClean="0">
+                <a:latin typeface="Cambria" panose="02040503050406030204" pitchFamily="18" charset="0"/>
+                <a:ea typeface="Cambria" panose="02040503050406030204" pitchFamily="18" charset="0"/>
+              </a:rPr>
+              <a:t> is the database name, root is the username and password both.</a:t>
+            </a:r>
+          </a:p>
+          <a:p>
+            <a:pPr algn="just">
+              <a:spcBef>
+                <a:spcPts val="0"/>
+              </a:spcBef>
+              <a:buNone/>
+            </a:pPr>
+            <a:r>
+              <a:rPr lang="en-US" sz="1800" b="1" dirty="0" smtClean="0">
+                <a:latin typeface="Cambria" panose="02040503050406030204" pitchFamily="18" charset="0"/>
+                <a:ea typeface="Cambria" panose="02040503050406030204" pitchFamily="18" charset="0"/>
+              </a:rPr>
+              <a:t>import</a:t>
+            </a:r>
+            <a:r>
+              <a:rPr lang="en-US" sz="1800" dirty="0" smtClean="0">
+                <a:latin typeface="Cambria" panose="02040503050406030204" pitchFamily="18" charset="0"/>
+                <a:ea typeface="Cambria" panose="02040503050406030204" pitchFamily="18" charset="0"/>
+              </a:rPr>
+              <a:t> java.sql.*;  </a:t>
+            </a:r>
+          </a:p>
+          <a:p>
+            <a:pPr algn="just">
+              <a:spcBef>
+                <a:spcPts val="0"/>
+              </a:spcBef>
+              <a:buNone/>
+            </a:pPr>
+            <a:r>
+              <a:rPr lang="en-US" sz="1800" b="1" dirty="0" smtClean="0">
+                <a:latin typeface="Cambria" panose="02040503050406030204" pitchFamily="18" charset="0"/>
+                <a:ea typeface="Cambria" panose="02040503050406030204" pitchFamily="18" charset="0"/>
+              </a:rPr>
+              <a:t>class</a:t>
+            </a:r>
+            <a:r>
+              <a:rPr lang="en-US" sz="1800" dirty="0" smtClean="0">
+                <a:latin typeface="Cambria" panose="02040503050406030204" pitchFamily="18" charset="0"/>
+                <a:ea typeface="Cambria" panose="02040503050406030204" pitchFamily="18" charset="0"/>
+              </a:rPr>
+              <a:t> </a:t>
+            </a:r>
+            <a:r>
+              <a:rPr lang="en-US" sz="1800" dirty="0" err="1" smtClean="0">
+                <a:latin typeface="Cambria" panose="02040503050406030204" pitchFamily="18" charset="0"/>
+                <a:ea typeface="Cambria" panose="02040503050406030204" pitchFamily="18" charset="0"/>
+              </a:rPr>
+              <a:t>MysqlCon</a:t>
+            </a:r>
+            <a:r>
+              <a:rPr lang="en-US" sz="1800" dirty="0" smtClean="0">
+                <a:latin typeface="Cambria" panose="02040503050406030204" pitchFamily="18" charset="0"/>
+                <a:ea typeface="Cambria" panose="02040503050406030204" pitchFamily="18" charset="0"/>
+              </a:rPr>
+              <a:t>{  </a:t>
+            </a:r>
+          </a:p>
+          <a:p>
+            <a:pPr algn="just">
+              <a:spcBef>
+                <a:spcPts val="0"/>
+              </a:spcBef>
+              <a:buNone/>
+            </a:pPr>
+            <a:r>
+              <a:rPr lang="en-US" sz="1800" b="1" dirty="0" smtClean="0">
+                <a:latin typeface="Cambria" panose="02040503050406030204" pitchFamily="18" charset="0"/>
+                <a:ea typeface="Cambria" panose="02040503050406030204" pitchFamily="18" charset="0"/>
+              </a:rPr>
+              <a:t>public</a:t>
+            </a:r>
+            <a:r>
+              <a:rPr lang="en-US" sz="1800" dirty="0" smtClean="0">
+                <a:latin typeface="Cambria" panose="02040503050406030204" pitchFamily="18" charset="0"/>
+                <a:ea typeface="Cambria" panose="02040503050406030204" pitchFamily="18" charset="0"/>
+              </a:rPr>
+              <a:t> </a:t>
+            </a:r>
+            <a:r>
+              <a:rPr lang="en-US" sz="1800" b="1" dirty="0" smtClean="0">
+                <a:latin typeface="Cambria" panose="02040503050406030204" pitchFamily="18" charset="0"/>
+                <a:ea typeface="Cambria" panose="02040503050406030204" pitchFamily="18" charset="0"/>
+              </a:rPr>
+              <a:t>static</a:t>
+            </a:r>
+            <a:r>
+              <a:rPr lang="en-US" sz="1800" dirty="0" smtClean="0">
+                <a:latin typeface="Cambria" panose="02040503050406030204" pitchFamily="18" charset="0"/>
+                <a:ea typeface="Cambria" panose="02040503050406030204" pitchFamily="18" charset="0"/>
+              </a:rPr>
+              <a:t> </a:t>
+            </a:r>
+            <a:r>
+              <a:rPr lang="en-US" sz="1800" b="1" dirty="0" smtClean="0">
+                <a:latin typeface="Cambria" panose="02040503050406030204" pitchFamily="18" charset="0"/>
+                <a:ea typeface="Cambria" panose="02040503050406030204" pitchFamily="18" charset="0"/>
+              </a:rPr>
+              <a:t>void</a:t>
+            </a:r>
+            <a:r>
+              <a:rPr lang="en-US" sz="1800" dirty="0" smtClean="0">
+                <a:latin typeface="Cambria" panose="02040503050406030204" pitchFamily="18" charset="0"/>
+                <a:ea typeface="Cambria" panose="02040503050406030204" pitchFamily="18" charset="0"/>
+              </a:rPr>
+              <a:t> main(String </a:t>
+            </a:r>
+            <a:r>
+              <a:rPr lang="en-US" sz="1800" dirty="0" err="1" smtClean="0">
+                <a:latin typeface="Cambria" panose="02040503050406030204" pitchFamily="18" charset="0"/>
+                <a:ea typeface="Cambria" panose="02040503050406030204" pitchFamily="18" charset="0"/>
+              </a:rPr>
+              <a:t>args</a:t>
+            </a:r>
+            <a:r>
+              <a:rPr lang="en-US" sz="1800" dirty="0" smtClean="0">
+                <a:latin typeface="Cambria" panose="02040503050406030204" pitchFamily="18" charset="0"/>
+                <a:ea typeface="Cambria" panose="02040503050406030204" pitchFamily="18" charset="0"/>
+              </a:rPr>
+              <a:t>[]){  </a:t>
+            </a:r>
+          </a:p>
+          <a:p>
+            <a:pPr algn="just">
+              <a:spcBef>
+                <a:spcPts val="0"/>
+              </a:spcBef>
+              <a:buNone/>
+            </a:pPr>
+            <a:r>
+              <a:rPr lang="en-US" sz="1800" b="1" dirty="0" smtClean="0">
+                <a:latin typeface="Cambria" panose="02040503050406030204" pitchFamily="18" charset="0"/>
+                <a:ea typeface="Cambria" panose="02040503050406030204" pitchFamily="18" charset="0"/>
+              </a:rPr>
+              <a:t>try</a:t>
+            </a:r>
+            <a:r>
+              <a:rPr lang="en-US" sz="1800" dirty="0" smtClean="0">
+                <a:latin typeface="Cambria" panose="02040503050406030204" pitchFamily="18" charset="0"/>
+                <a:ea typeface="Cambria" panose="02040503050406030204" pitchFamily="18" charset="0"/>
+              </a:rPr>
+              <a:t>{  </a:t>
+            </a:r>
+          </a:p>
+          <a:p>
+            <a:pPr algn="just">
+              <a:spcBef>
+                <a:spcPts val="0"/>
+              </a:spcBef>
+              <a:buNone/>
+            </a:pPr>
+            <a:r>
+              <a:rPr lang="en-US" sz="1800" dirty="0" err="1" smtClean="0">
+                <a:latin typeface="Cambria" panose="02040503050406030204" pitchFamily="18" charset="0"/>
+                <a:ea typeface="Cambria" panose="02040503050406030204" pitchFamily="18" charset="0"/>
+              </a:rPr>
+              <a:t>Class.forName</a:t>
+            </a:r>
+            <a:r>
+              <a:rPr lang="en-US" sz="1800" dirty="0" smtClean="0">
+                <a:latin typeface="Cambria" panose="02040503050406030204" pitchFamily="18" charset="0"/>
+                <a:ea typeface="Cambria" panose="02040503050406030204" pitchFamily="18" charset="0"/>
+              </a:rPr>
+              <a:t>("</a:t>
+            </a:r>
+            <a:r>
+              <a:rPr lang="en-US" sz="1800" dirty="0" err="1" smtClean="0">
+                <a:latin typeface="Cambria" panose="02040503050406030204" pitchFamily="18" charset="0"/>
+                <a:ea typeface="Cambria" panose="02040503050406030204" pitchFamily="18" charset="0"/>
+              </a:rPr>
+              <a:t>com.mysql.jdbc.Driver</a:t>
+            </a:r>
+            <a:r>
+              <a:rPr lang="en-US" sz="1800" dirty="0" smtClean="0">
+                <a:latin typeface="Cambria" panose="02040503050406030204" pitchFamily="18" charset="0"/>
+                <a:ea typeface="Cambria" panose="02040503050406030204" pitchFamily="18" charset="0"/>
+              </a:rPr>
+              <a:t>");  </a:t>
+            </a:r>
+          </a:p>
+          <a:p>
+            <a:pPr algn="just">
+              <a:spcBef>
+                <a:spcPts val="0"/>
+              </a:spcBef>
+              <a:buNone/>
+            </a:pPr>
+            <a:r>
+              <a:rPr lang="en-US" sz="1800" dirty="0" smtClean="0">
+                <a:latin typeface="Cambria" panose="02040503050406030204" pitchFamily="18" charset="0"/>
+                <a:ea typeface="Cambria" panose="02040503050406030204" pitchFamily="18" charset="0"/>
+              </a:rPr>
+              <a:t>Connection con=</a:t>
+            </a:r>
+            <a:r>
+              <a:rPr lang="en-US" sz="1800" dirty="0" err="1" smtClean="0">
+                <a:latin typeface="Cambria" panose="02040503050406030204" pitchFamily="18" charset="0"/>
+                <a:ea typeface="Cambria" panose="02040503050406030204" pitchFamily="18" charset="0"/>
+              </a:rPr>
+              <a:t>DriverManager.getConnection</a:t>
+            </a:r>
+            <a:r>
+              <a:rPr lang="en-US" sz="1800" dirty="0" smtClean="0">
+                <a:latin typeface="Cambria" panose="02040503050406030204" pitchFamily="18" charset="0"/>
+                <a:ea typeface="Cambria" panose="02040503050406030204" pitchFamily="18" charset="0"/>
+              </a:rPr>
+              <a:t>(  </a:t>
+            </a:r>
+          </a:p>
+          <a:p>
+            <a:pPr algn="just">
+              <a:spcBef>
+                <a:spcPts val="0"/>
+              </a:spcBef>
+              <a:buNone/>
+            </a:pPr>
+            <a:r>
+              <a:rPr lang="en-US" sz="1800" dirty="0" smtClean="0">
+                <a:latin typeface="Cambria" panose="02040503050406030204" pitchFamily="18" charset="0"/>
+                <a:ea typeface="Cambria" panose="02040503050406030204" pitchFamily="18" charset="0"/>
+              </a:rPr>
+              <a:t>"</a:t>
+            </a:r>
+            <a:r>
+              <a:rPr lang="en-US" sz="1800" dirty="0" err="1" smtClean="0">
+                <a:latin typeface="Cambria" panose="02040503050406030204" pitchFamily="18" charset="0"/>
+                <a:ea typeface="Cambria" panose="02040503050406030204" pitchFamily="18" charset="0"/>
+              </a:rPr>
+              <a:t>jdbc:mysql</a:t>
+            </a:r>
+            <a:r>
+              <a:rPr lang="en-US" sz="1800" dirty="0" smtClean="0">
+                <a:latin typeface="Cambria" panose="02040503050406030204" pitchFamily="18" charset="0"/>
+                <a:ea typeface="Cambria" panose="02040503050406030204" pitchFamily="18" charset="0"/>
+              </a:rPr>
+              <a:t>://localhost:3306/</a:t>
+            </a:r>
+            <a:r>
+              <a:rPr lang="en-US" sz="1800" dirty="0" err="1" smtClean="0">
+                <a:latin typeface="Cambria" panose="02040503050406030204" pitchFamily="18" charset="0"/>
+                <a:ea typeface="Cambria" panose="02040503050406030204" pitchFamily="18" charset="0"/>
+              </a:rPr>
+              <a:t>sonoo","root","root</a:t>
+            </a:r>
+            <a:r>
+              <a:rPr lang="en-US" sz="1800" dirty="0" smtClean="0">
+                <a:latin typeface="Cambria" panose="02040503050406030204" pitchFamily="18" charset="0"/>
+                <a:ea typeface="Cambria" panose="02040503050406030204" pitchFamily="18" charset="0"/>
+              </a:rPr>
+              <a:t>");  </a:t>
+            </a:r>
+          </a:p>
+          <a:p>
+            <a:pPr algn="just">
+              <a:spcBef>
+                <a:spcPts val="0"/>
+              </a:spcBef>
+              <a:buNone/>
+            </a:pPr>
+            <a:r>
+              <a:rPr lang="en-US" sz="1800" dirty="0" smtClean="0">
+                <a:latin typeface="Cambria" panose="02040503050406030204" pitchFamily="18" charset="0"/>
+                <a:ea typeface="Cambria" panose="02040503050406030204" pitchFamily="18" charset="0"/>
+              </a:rPr>
+              <a:t>//here </a:t>
+            </a:r>
+            <a:r>
+              <a:rPr lang="en-US" sz="1800" dirty="0" err="1" smtClean="0">
+                <a:latin typeface="Cambria" panose="02040503050406030204" pitchFamily="18" charset="0"/>
+                <a:ea typeface="Cambria" panose="02040503050406030204" pitchFamily="18" charset="0"/>
+              </a:rPr>
+              <a:t>sonoo</a:t>
+            </a:r>
+            <a:r>
+              <a:rPr lang="en-US" sz="1800" dirty="0" smtClean="0">
+                <a:latin typeface="Cambria" panose="02040503050406030204" pitchFamily="18" charset="0"/>
+                <a:ea typeface="Cambria" panose="02040503050406030204" pitchFamily="18" charset="0"/>
+              </a:rPr>
+              <a:t> is database name, root is username and password  </a:t>
+            </a:r>
+          </a:p>
+          <a:p>
+            <a:pPr algn="just">
+              <a:spcBef>
+                <a:spcPts val="0"/>
+              </a:spcBef>
+              <a:buNone/>
+            </a:pPr>
+            <a:r>
+              <a:rPr lang="en-US" sz="1800" dirty="0" smtClean="0">
+                <a:latin typeface="Cambria" panose="02040503050406030204" pitchFamily="18" charset="0"/>
+                <a:ea typeface="Cambria" panose="02040503050406030204" pitchFamily="18" charset="0"/>
+              </a:rPr>
+              <a:t>Statement stmt=</a:t>
+            </a:r>
+            <a:r>
+              <a:rPr lang="en-US" sz="1800" dirty="0" err="1" smtClean="0">
+                <a:latin typeface="Cambria" panose="02040503050406030204" pitchFamily="18" charset="0"/>
+                <a:ea typeface="Cambria" panose="02040503050406030204" pitchFamily="18" charset="0"/>
+              </a:rPr>
+              <a:t>con.createStatement</a:t>
+            </a:r>
+            <a:r>
+              <a:rPr lang="en-US" sz="1800" dirty="0" smtClean="0">
+                <a:latin typeface="Cambria" panose="02040503050406030204" pitchFamily="18" charset="0"/>
+                <a:ea typeface="Cambria" panose="02040503050406030204" pitchFamily="18" charset="0"/>
+              </a:rPr>
+              <a:t>();  </a:t>
+            </a:r>
+          </a:p>
+          <a:p>
+            <a:pPr algn="just">
+              <a:spcBef>
+                <a:spcPts val="0"/>
+              </a:spcBef>
+              <a:buNone/>
+            </a:pPr>
+            <a:r>
+              <a:rPr lang="en-US" sz="1800" dirty="0" err="1" smtClean="0">
+                <a:latin typeface="Cambria" panose="02040503050406030204" pitchFamily="18" charset="0"/>
+                <a:ea typeface="Cambria" panose="02040503050406030204" pitchFamily="18" charset="0"/>
+              </a:rPr>
+              <a:t>ResultSet</a:t>
+            </a:r>
+            <a:r>
+              <a:rPr lang="en-US" sz="1800" dirty="0" smtClean="0">
+                <a:latin typeface="Cambria" panose="02040503050406030204" pitchFamily="18" charset="0"/>
+                <a:ea typeface="Cambria" panose="02040503050406030204" pitchFamily="18" charset="0"/>
+              </a:rPr>
+              <a:t> </a:t>
+            </a:r>
+            <a:r>
+              <a:rPr lang="en-US" sz="1800" dirty="0" err="1" smtClean="0">
+                <a:latin typeface="Cambria" panose="02040503050406030204" pitchFamily="18" charset="0"/>
+                <a:ea typeface="Cambria" panose="02040503050406030204" pitchFamily="18" charset="0"/>
+              </a:rPr>
+              <a:t>rs</a:t>
+            </a:r>
+            <a:r>
+              <a:rPr lang="en-US" sz="1800" dirty="0" smtClean="0">
+                <a:latin typeface="Cambria" panose="02040503050406030204" pitchFamily="18" charset="0"/>
+                <a:ea typeface="Cambria" panose="02040503050406030204" pitchFamily="18" charset="0"/>
+              </a:rPr>
+              <a:t>=</a:t>
+            </a:r>
+            <a:r>
+              <a:rPr lang="en-US" sz="1800" dirty="0" err="1" smtClean="0">
+                <a:latin typeface="Cambria" panose="02040503050406030204" pitchFamily="18" charset="0"/>
+                <a:ea typeface="Cambria" panose="02040503050406030204" pitchFamily="18" charset="0"/>
+              </a:rPr>
+              <a:t>stmt.executeQuery</a:t>
+            </a:r>
+            <a:r>
+              <a:rPr lang="en-US" sz="1800" dirty="0" smtClean="0">
+                <a:latin typeface="Cambria" panose="02040503050406030204" pitchFamily="18" charset="0"/>
+                <a:ea typeface="Cambria" panose="02040503050406030204" pitchFamily="18" charset="0"/>
+              </a:rPr>
+              <a:t>("select * from </a:t>
+            </a:r>
+            <a:r>
+              <a:rPr lang="en-US" sz="1800" dirty="0" err="1" smtClean="0">
+                <a:latin typeface="Cambria" panose="02040503050406030204" pitchFamily="18" charset="0"/>
+                <a:ea typeface="Cambria" panose="02040503050406030204" pitchFamily="18" charset="0"/>
+              </a:rPr>
+              <a:t>emp</a:t>
+            </a:r>
+            <a:r>
+              <a:rPr lang="en-US" sz="1800" dirty="0" smtClean="0">
+                <a:latin typeface="Cambria" panose="02040503050406030204" pitchFamily="18" charset="0"/>
+                <a:ea typeface="Cambria" panose="02040503050406030204" pitchFamily="18" charset="0"/>
+              </a:rPr>
+              <a:t>");  </a:t>
+            </a:r>
+          </a:p>
+          <a:p>
+            <a:pPr algn="just">
+              <a:spcBef>
+                <a:spcPts val="0"/>
+              </a:spcBef>
+              <a:buNone/>
+            </a:pPr>
+            <a:r>
+              <a:rPr lang="en-US" sz="1800" b="1" dirty="0" smtClean="0">
+                <a:latin typeface="Cambria" panose="02040503050406030204" pitchFamily="18" charset="0"/>
+                <a:ea typeface="Cambria" panose="02040503050406030204" pitchFamily="18" charset="0"/>
+              </a:rPr>
+              <a:t>while</a:t>
+            </a:r>
+            <a:r>
+              <a:rPr lang="en-US" sz="1800" dirty="0" smtClean="0">
+                <a:latin typeface="Cambria" panose="02040503050406030204" pitchFamily="18" charset="0"/>
+                <a:ea typeface="Cambria" panose="02040503050406030204" pitchFamily="18" charset="0"/>
+              </a:rPr>
+              <a:t>(</a:t>
+            </a:r>
+            <a:r>
+              <a:rPr lang="en-US" sz="1800" dirty="0" err="1" smtClean="0">
+                <a:latin typeface="Cambria" panose="02040503050406030204" pitchFamily="18" charset="0"/>
+                <a:ea typeface="Cambria" panose="02040503050406030204" pitchFamily="18" charset="0"/>
+              </a:rPr>
+              <a:t>rs.next</a:t>
+            </a:r>
+            <a:r>
+              <a:rPr lang="en-US" sz="1800" dirty="0" smtClean="0">
+                <a:latin typeface="Cambria" panose="02040503050406030204" pitchFamily="18" charset="0"/>
+                <a:ea typeface="Cambria" panose="02040503050406030204" pitchFamily="18" charset="0"/>
+              </a:rPr>
+              <a:t>())  </a:t>
+            </a:r>
+          </a:p>
+          <a:p>
+            <a:pPr algn="just">
+              <a:spcBef>
+                <a:spcPts val="0"/>
+              </a:spcBef>
+              <a:buNone/>
+            </a:pPr>
+            <a:r>
+              <a:rPr lang="en-US" sz="1800" dirty="0" err="1" smtClean="0">
+                <a:latin typeface="Cambria" panose="02040503050406030204" pitchFamily="18" charset="0"/>
+                <a:ea typeface="Cambria" panose="02040503050406030204" pitchFamily="18" charset="0"/>
+              </a:rPr>
+              <a:t>System.out.println</a:t>
+            </a:r>
+            <a:r>
+              <a:rPr lang="en-US" sz="1800" dirty="0" smtClean="0">
+                <a:latin typeface="Cambria" panose="02040503050406030204" pitchFamily="18" charset="0"/>
+                <a:ea typeface="Cambria" panose="02040503050406030204" pitchFamily="18" charset="0"/>
+              </a:rPr>
+              <a:t>(</a:t>
+            </a:r>
+            <a:r>
+              <a:rPr lang="en-US" sz="1800" dirty="0" err="1" smtClean="0">
+                <a:latin typeface="Cambria" panose="02040503050406030204" pitchFamily="18" charset="0"/>
+                <a:ea typeface="Cambria" panose="02040503050406030204" pitchFamily="18" charset="0"/>
+              </a:rPr>
+              <a:t>rs.getInt</a:t>
+            </a:r>
+            <a:r>
+              <a:rPr lang="en-US" sz="1800" dirty="0" smtClean="0">
+                <a:latin typeface="Cambria" panose="02040503050406030204" pitchFamily="18" charset="0"/>
+                <a:ea typeface="Cambria" panose="02040503050406030204" pitchFamily="18" charset="0"/>
+              </a:rPr>
+              <a:t>(1)+"  "+</a:t>
+            </a:r>
+            <a:r>
+              <a:rPr lang="en-US" sz="1800" dirty="0" err="1" smtClean="0">
+                <a:latin typeface="Cambria" panose="02040503050406030204" pitchFamily="18" charset="0"/>
+                <a:ea typeface="Cambria" panose="02040503050406030204" pitchFamily="18" charset="0"/>
+              </a:rPr>
+              <a:t>rs.getString</a:t>
+            </a:r>
+            <a:r>
+              <a:rPr lang="en-US" sz="1800" dirty="0" smtClean="0">
+                <a:latin typeface="Cambria" panose="02040503050406030204" pitchFamily="18" charset="0"/>
+                <a:ea typeface="Cambria" panose="02040503050406030204" pitchFamily="18" charset="0"/>
+              </a:rPr>
+              <a:t>(2)+"  "+</a:t>
+            </a:r>
+            <a:r>
+              <a:rPr lang="en-US" sz="1800" dirty="0" err="1" smtClean="0">
+                <a:latin typeface="Cambria" panose="02040503050406030204" pitchFamily="18" charset="0"/>
+                <a:ea typeface="Cambria" panose="02040503050406030204" pitchFamily="18" charset="0"/>
+              </a:rPr>
+              <a:t>rs.getString</a:t>
+            </a:r>
+            <a:r>
+              <a:rPr lang="en-US" sz="1800" dirty="0" smtClean="0">
+                <a:latin typeface="Cambria" panose="02040503050406030204" pitchFamily="18" charset="0"/>
+                <a:ea typeface="Cambria" panose="02040503050406030204" pitchFamily="18" charset="0"/>
+              </a:rPr>
+              <a:t>(3));  </a:t>
+            </a:r>
+          </a:p>
+          <a:p>
+            <a:pPr algn="just">
+              <a:spcBef>
+                <a:spcPts val="0"/>
+              </a:spcBef>
+              <a:buNone/>
+            </a:pPr>
+            <a:r>
+              <a:rPr lang="en-US" sz="1800" dirty="0" err="1" smtClean="0">
+                <a:latin typeface="Cambria" panose="02040503050406030204" pitchFamily="18" charset="0"/>
+                <a:ea typeface="Cambria" panose="02040503050406030204" pitchFamily="18" charset="0"/>
+              </a:rPr>
+              <a:t>con.close</a:t>
+            </a:r>
+            <a:r>
+              <a:rPr lang="en-US" sz="1800" dirty="0" smtClean="0">
+                <a:latin typeface="Cambria" panose="02040503050406030204" pitchFamily="18" charset="0"/>
+                <a:ea typeface="Cambria" panose="02040503050406030204" pitchFamily="18" charset="0"/>
+              </a:rPr>
+              <a:t>();  </a:t>
+            </a:r>
+          </a:p>
+          <a:p>
+            <a:pPr algn="just">
+              <a:spcBef>
+                <a:spcPts val="0"/>
+              </a:spcBef>
+              <a:buNone/>
+            </a:pPr>
+            <a:r>
+              <a:rPr lang="en-US" sz="1800" dirty="0" smtClean="0">
+                <a:latin typeface="Cambria" panose="02040503050406030204" pitchFamily="18" charset="0"/>
+                <a:ea typeface="Cambria" panose="02040503050406030204" pitchFamily="18" charset="0"/>
+              </a:rPr>
+              <a:t>}</a:t>
+            </a:r>
+            <a:r>
+              <a:rPr lang="en-US" sz="1800" b="1" dirty="0" smtClean="0">
+                <a:latin typeface="Cambria" panose="02040503050406030204" pitchFamily="18" charset="0"/>
+                <a:ea typeface="Cambria" panose="02040503050406030204" pitchFamily="18" charset="0"/>
+              </a:rPr>
+              <a:t>catch</a:t>
+            </a:r>
+            <a:r>
+              <a:rPr lang="en-US" sz="1800" dirty="0" smtClean="0">
+                <a:latin typeface="Cambria" panose="02040503050406030204" pitchFamily="18" charset="0"/>
+                <a:ea typeface="Cambria" panose="02040503050406030204" pitchFamily="18" charset="0"/>
+              </a:rPr>
+              <a:t>(Exception e){ </a:t>
+            </a:r>
+            <a:r>
+              <a:rPr lang="en-US" sz="1800" dirty="0" err="1" smtClean="0">
+                <a:latin typeface="Cambria" panose="02040503050406030204" pitchFamily="18" charset="0"/>
+                <a:ea typeface="Cambria" panose="02040503050406030204" pitchFamily="18" charset="0"/>
+              </a:rPr>
+              <a:t>System.out.println</a:t>
+            </a:r>
+            <a:r>
+              <a:rPr lang="en-US" sz="1800" dirty="0" smtClean="0">
+                <a:latin typeface="Cambria" panose="02040503050406030204" pitchFamily="18" charset="0"/>
+                <a:ea typeface="Cambria" panose="02040503050406030204" pitchFamily="18" charset="0"/>
+              </a:rPr>
+              <a:t>(e);}  </a:t>
+            </a:r>
+          </a:p>
+          <a:p>
+            <a:pPr algn="just">
+              <a:spcBef>
+                <a:spcPts val="0"/>
+              </a:spcBef>
+              <a:buNone/>
+            </a:pPr>
+            <a:r>
+              <a:rPr lang="en-US" sz="1800" dirty="0" smtClean="0">
+                <a:latin typeface="Cambria" panose="02040503050406030204" pitchFamily="18" charset="0"/>
+                <a:ea typeface="Cambria" panose="02040503050406030204" pitchFamily="18" charset="0"/>
+              </a:rPr>
+              <a:t>}  </a:t>
+            </a:r>
+          </a:p>
+          <a:p>
+            <a:pPr algn="just">
+              <a:spcBef>
+                <a:spcPts val="0"/>
+              </a:spcBef>
+              <a:buNone/>
+            </a:pPr>
+            <a:r>
+              <a:rPr lang="en-US" sz="1800" dirty="0" smtClean="0">
+                <a:latin typeface="Cambria" panose="02040503050406030204" pitchFamily="18" charset="0"/>
+                <a:ea typeface="Cambria" panose="02040503050406030204" pitchFamily="18" charset="0"/>
+              </a:rPr>
+              <a:t>}  </a:t>
+            </a:r>
+          </a:p>
+          <a:p>
+            <a:pPr algn="just">
+              <a:spcBef>
+                <a:spcPts val="0"/>
+              </a:spcBef>
+              <a:buNone/>
+            </a:pPr>
+            <a:endParaRPr lang="en-US" sz="1800" dirty="0">
+              <a:latin typeface="Cambria" panose="02040503050406030204" pitchFamily="18" charset="0"/>
+              <a:ea typeface="Cambria" panose="02040503050406030204" pitchFamily="18" charset="0"/>
+            </a:endParaRPr>
           </a:p>
         </p:txBody>
       </p:sp>
@@ -42359,13 +42783,19 @@
               <a:defRPr/>
             </a:pPr>
             <a:fld id="{A01CA5F2-CD08-4EF5-BAD9-872B7BB27165}" type="slidenum">
-              <a:rPr lang="en-US" altLang="en-US" smtClean="0"/>
+              <a:rPr lang="en-US" altLang="en-US" smtClean="0">
+                <a:latin typeface="Cambria" panose="02040503050406030204" pitchFamily="18" charset="0"/>
+                <a:ea typeface="Cambria" panose="02040503050406030204" pitchFamily="18" charset="0"/>
+              </a:rPr>
               <a:pPr>
                 <a:defRPr/>
               </a:pPr>
               <a:t>81</a:t>
             </a:fld>
-            <a:endParaRPr lang="en-US" altLang="en-US"/>
+            <a:endParaRPr lang="en-US" altLang="en-US">
+              <a:latin typeface="Cambria" panose="02040503050406030204" pitchFamily="18" charset="0"/>
+              <a:ea typeface="Cambria" panose="02040503050406030204" pitchFamily="18" charset="0"/>
+            </a:endParaRPr>
           </a:p>
         </p:txBody>
       </p:sp>
@@ -42411,23 +42841,15 @@
             <p:ph type="title"/>
           </p:nvPr>
         </p:nvSpPr>
-        <p:spPr>
-          <a:xfrm>
-            <a:off x="838200" y="365125"/>
-            <a:ext cx="10515600" cy="777859"/>
-          </a:xfrm>
-        </p:spPr>
+        <p:spPr/>
         <p:txBody>
           <a:bodyPr/>
           <a:lstStyle/>
           <a:p>
             <a:r>
               <a:rPr lang="en-GB" dirty="0" smtClean="0"/>
-              <a:t> Connectivity with Access without DSN</a:t>
-            </a:r>
-            <a:br>
-              <a:rPr lang="en-GB" dirty="0" smtClean="0"/>
-            </a:br>
+              <a:t>Configuring</a:t>
+            </a:r>
             <a:endParaRPr lang="en-US" dirty="0"/>
           </a:p>
         </p:txBody>
@@ -42442,39 +42864,171 @@
             <p:ph idx="1"/>
           </p:nvPr>
         </p:nvSpPr>
-        <p:spPr>
-          <a:xfrm>
-            <a:off x="838200" y="1214422"/>
-            <a:ext cx="10515600" cy="4962541"/>
-          </a:xfrm>
-        </p:spPr>
+        <p:spPr/>
         <p:txBody>
           <a:bodyPr/>
           <a:lstStyle/>
           <a:p>
             <a:r>
               <a:rPr lang="en-GB" dirty="0" smtClean="0"/>
-              <a:t>There are two ways to connect java application with the access database.</a:t>
-            </a:r>
-          </a:p>
-          <a:p>
-            <a:pPr marL="514350" indent="-514350">
-              <a:buFont typeface="+mj-lt"/>
-              <a:buAutoNum type="arabicPeriod"/>
-            </a:pPr>
+              <a:t> o connect java application with the </a:t>
+            </a:r>
+            <a:r>
+              <a:rPr lang="en-GB" dirty="0" err="1" smtClean="0"/>
+              <a:t>mysql</a:t>
+            </a:r>
             <a:r>
               <a:rPr lang="en-GB" dirty="0" smtClean="0"/>
-              <a:t>Without DSN (Data Source Name)</a:t>
-            </a:r>
-          </a:p>
-          <a:p>
-            <a:pPr marL="514350" indent="-514350">
-              <a:buFont typeface="+mj-lt"/>
-              <a:buAutoNum type="arabicPeriod"/>
-            </a:pPr>
+              <a:t> database, </a:t>
+            </a:r>
+            <a:r>
+              <a:rPr lang="en-GB" b="1" dirty="0" smtClean="0"/>
+              <a:t>mysqlconnector.jar</a:t>
+            </a:r>
             <a:r>
               <a:rPr lang="en-GB" dirty="0" smtClean="0"/>
-              <a:t>With DSN</a:t>
+              <a:t> file is required to be loaded.</a:t>
+            </a:r>
+          </a:p>
+          <a:p>
+            <a:r>
+              <a:rPr lang="en-GB" dirty="0" smtClean="0">
+                <a:hlinkClick r:id="rId2"/>
+              </a:rPr>
+              <a:t>download the jar file mysql-connector.jar</a:t>
+            </a:r>
+            <a:endParaRPr lang="en-GB" dirty="0" smtClean="0"/>
+          </a:p>
+          <a:p>
+            <a:r>
+              <a:rPr lang="en-GB" dirty="0" smtClean="0"/>
+              <a:t>Two ways to load the jar file:</a:t>
+            </a:r>
+          </a:p>
+          <a:p>
+            <a:r>
+              <a:rPr lang="en-GB" dirty="0" smtClean="0"/>
+              <a:t>Paste the mysqlconnector.jar file in </a:t>
+            </a:r>
+            <a:r>
+              <a:rPr lang="en-GB" dirty="0" err="1" smtClean="0"/>
+              <a:t>jre</a:t>
+            </a:r>
+            <a:r>
+              <a:rPr lang="en-GB" dirty="0" smtClean="0"/>
+              <a:t>/lib/ext folder</a:t>
+            </a:r>
+          </a:p>
+          <a:p>
+            <a:r>
+              <a:rPr lang="en-GB" dirty="0" smtClean="0"/>
+              <a:t>Set </a:t>
+            </a:r>
+            <a:r>
+              <a:rPr lang="en-GB" dirty="0" err="1" smtClean="0"/>
+              <a:t>classpath</a:t>
+            </a:r>
+            <a:endParaRPr lang="en-GB" dirty="0" smtClean="0"/>
+          </a:p>
+          <a:p>
+            <a:r>
+              <a:rPr lang="en-GB" dirty="0" smtClean="0"/>
+              <a:t>1) Paste the mysqlconnector.jar file in JRE/lib/ext folder:</a:t>
+            </a:r>
+          </a:p>
+          <a:p>
+            <a:r>
+              <a:rPr lang="en-GB" dirty="0" smtClean="0"/>
+              <a:t>Download the mysqlconnector.jar file. Go to </a:t>
+            </a:r>
+            <a:r>
+              <a:rPr lang="en-GB" dirty="0" err="1" smtClean="0"/>
+              <a:t>jre</a:t>
+            </a:r>
+            <a:r>
+              <a:rPr lang="en-GB" dirty="0" smtClean="0"/>
+              <a:t>/lib/ext folder and paste the jar file here.2) Set </a:t>
+            </a:r>
+            <a:r>
+              <a:rPr lang="en-GB" dirty="0" err="1" smtClean="0"/>
+              <a:t>classpath</a:t>
+            </a:r>
+            <a:r>
+              <a:rPr lang="en-GB" dirty="0" smtClean="0"/>
+              <a:t>:</a:t>
+            </a:r>
+          </a:p>
+          <a:p>
+            <a:r>
+              <a:rPr lang="en-GB" dirty="0" smtClean="0"/>
+              <a:t>There are two ways to set the </a:t>
+            </a:r>
+            <a:r>
+              <a:rPr lang="en-GB" dirty="0" err="1" smtClean="0"/>
+              <a:t>classpath:temporary</a:t>
+            </a:r>
+            <a:endParaRPr lang="en-GB" dirty="0" smtClean="0"/>
+          </a:p>
+          <a:p>
+            <a:r>
+              <a:rPr lang="en-GB" dirty="0" smtClean="0"/>
+              <a:t>permanent</a:t>
+            </a:r>
+          </a:p>
+          <a:p>
+            <a:r>
+              <a:rPr lang="en-GB" dirty="0" smtClean="0"/>
+              <a:t>How to set the temporary </a:t>
+            </a:r>
+            <a:r>
+              <a:rPr lang="en-GB" dirty="0" err="1" smtClean="0"/>
+              <a:t>classpath</a:t>
+            </a:r>
+            <a:endParaRPr lang="en-GB" dirty="0" smtClean="0"/>
+          </a:p>
+          <a:p>
+            <a:r>
+              <a:rPr lang="en-GB" dirty="0" smtClean="0"/>
+              <a:t>open command prompt and write:</a:t>
+            </a:r>
+          </a:p>
+          <a:p>
+            <a:r>
+              <a:rPr lang="en-GB" dirty="0" smtClean="0"/>
+              <a:t>C:&gt;set </a:t>
+            </a:r>
+            <a:r>
+              <a:rPr lang="en-GB" dirty="0" err="1" smtClean="0"/>
+              <a:t>classpath</a:t>
+            </a:r>
+            <a:r>
+              <a:rPr lang="en-GB" dirty="0" smtClean="0"/>
+              <a:t>=c:\folder\mysql-connector-java-5.0.8-bin.jar;.;  </a:t>
+            </a:r>
+          </a:p>
+          <a:p>
+            <a:r>
+              <a:rPr lang="en-GB" dirty="0" smtClean="0"/>
+              <a:t>How to set the permanent </a:t>
+            </a:r>
+            <a:r>
+              <a:rPr lang="en-GB" dirty="0" err="1" smtClean="0"/>
+              <a:t>classpath</a:t>
+            </a:r>
+            <a:endParaRPr lang="en-GB" dirty="0" smtClean="0"/>
+          </a:p>
+          <a:p>
+            <a:r>
+              <a:rPr lang="en-GB" dirty="0" smtClean="0"/>
+              <a:t>Go to environment variable then click on new tab. In variable name write </a:t>
+            </a:r>
+            <a:r>
+              <a:rPr lang="en-GB" b="1" dirty="0" err="1" smtClean="0"/>
+              <a:t>classpath</a:t>
+            </a:r>
+            <a:r>
+              <a:rPr lang="en-GB" dirty="0" smtClean="0"/>
+              <a:t> and in variable value paste the path to the mysqlconnector.jar file by appending mysqlconnector.jar;.; as C:\folder\mysql-connector-java-5.0.8-bin.jar;.;</a:t>
             </a:r>
           </a:p>
           <a:p>
@@ -42553,14 +43107,19 @@
             <p:ph type="title"/>
           </p:nvPr>
         </p:nvSpPr>
-        <p:spPr/>
+        <p:spPr>
+          <a:xfrm>
+            <a:off x="838200" y="365125"/>
+            <a:ext cx="10515600" cy="777859"/>
+          </a:xfrm>
+        </p:spPr>
         <p:txBody>
           <a:bodyPr/>
           <a:lstStyle/>
           <a:p>
             <a:r>
               <a:rPr lang="en-GB" dirty="0" smtClean="0"/>
-              <a:t> Example to Connect Java Application with access without DSN</a:t>
+              <a:t> Connectivity with Access without DSN</a:t>
             </a:r>
             <a:br>
               <a:rPr lang="en-GB" dirty="0" smtClean="0"/>
@@ -42581,483 +43140,37 @@
         </p:nvSpPr>
         <p:spPr>
           <a:xfrm>
-            <a:off x="838200" y="1428736"/>
-            <a:ext cx="10515600" cy="4748227"/>
+            <a:off x="838200" y="1214422"/>
+            <a:ext cx="10515600" cy="4962541"/>
           </a:xfrm>
         </p:spPr>
         <p:txBody>
           <a:bodyPr/>
           <a:lstStyle/>
           <a:p>
-            <a:pPr>
-              <a:spcBef>
-                <a:spcPts val="0"/>
-              </a:spcBef>
-              <a:buNone/>
-            </a:pPr>
-            <a:r>
-              <a:rPr lang="en-GB" sz="2000" dirty="0" smtClean="0"/>
-              <a:t> </a:t>
-            </a:r>
-            <a:r>
-              <a:rPr lang="en-GB" sz="2000" dirty="0" err="1" smtClean="0"/>
-              <a:t>i</a:t>
-            </a:r>
-            <a:r>
-              <a:rPr lang="en-US" sz="2000" b="1" dirty="0" err="1" smtClean="0"/>
-              <a:t>mport</a:t>
-            </a:r>
-            <a:r>
-              <a:rPr lang="en-US" sz="2000" dirty="0" smtClean="0"/>
-              <a:t> java.sql.*;  </a:t>
-            </a:r>
-          </a:p>
-          <a:p>
-            <a:pPr>
-              <a:spcBef>
-                <a:spcPts val="0"/>
-              </a:spcBef>
-              <a:buNone/>
-            </a:pPr>
-            <a:r>
-              <a:rPr lang="en-US" sz="2000" b="1" dirty="0" smtClean="0"/>
-              <a:t>class</a:t>
-            </a:r>
-            <a:r>
-              <a:rPr lang="en-US" sz="2000" dirty="0" smtClean="0"/>
-              <a:t> Test{  </a:t>
-            </a:r>
-          </a:p>
-          <a:p>
-            <a:pPr>
-              <a:spcBef>
-                <a:spcPts val="0"/>
-              </a:spcBef>
-              <a:buNone/>
-            </a:pPr>
-            <a:r>
-              <a:rPr lang="en-US" sz="2000" b="1" dirty="0" smtClean="0"/>
-              <a:t>public</a:t>
-            </a:r>
-            <a:r>
-              <a:rPr lang="en-US" sz="2000" dirty="0" smtClean="0"/>
-              <a:t> </a:t>
-            </a:r>
-            <a:r>
-              <a:rPr lang="en-US" sz="2000" b="1" dirty="0" smtClean="0"/>
-              <a:t>static</a:t>
-            </a:r>
-            <a:r>
-              <a:rPr lang="en-US" sz="2000" dirty="0" smtClean="0"/>
-              <a:t> </a:t>
-            </a:r>
-            <a:r>
-              <a:rPr lang="en-US" sz="2000" b="1" dirty="0" smtClean="0"/>
-              <a:t>void</a:t>
-            </a:r>
-            <a:r>
-              <a:rPr lang="en-US" sz="2000" dirty="0" smtClean="0"/>
-              <a:t> main(String </a:t>
-            </a:r>
-            <a:r>
-              <a:rPr lang="en-US" sz="2000" dirty="0" err="1" smtClean="0"/>
-              <a:t>ar</a:t>
-            </a:r>
-            <a:r>
-              <a:rPr lang="en-US" sz="2000" dirty="0" smtClean="0"/>
-              <a:t>[]){  </a:t>
-            </a:r>
-          </a:p>
-          <a:p>
-            <a:pPr>
-              <a:spcBef>
-                <a:spcPts val="0"/>
-              </a:spcBef>
-              <a:buNone/>
-            </a:pPr>
-            <a:r>
-              <a:rPr lang="en-US" sz="2000" dirty="0" smtClean="0"/>
-              <a:t> </a:t>
-            </a:r>
-            <a:r>
-              <a:rPr lang="en-US" sz="2000" b="1" dirty="0" smtClean="0"/>
-              <a:t>try</a:t>
-            </a:r>
-            <a:r>
-              <a:rPr lang="en-US" sz="2000" dirty="0" smtClean="0"/>
-              <a:t>{  </a:t>
-            </a:r>
-          </a:p>
-          <a:p>
-            <a:pPr>
-              <a:spcBef>
-                <a:spcPts val="0"/>
-              </a:spcBef>
-              <a:buNone/>
-            </a:pPr>
-            <a:r>
-              <a:rPr lang="en-US" sz="2000" dirty="0" smtClean="0"/>
-              <a:t>   String database="student.mdb";//Here database exists in the current directory  </a:t>
-            </a:r>
-          </a:p>
-          <a:p>
-            <a:pPr>
-              <a:spcBef>
-                <a:spcPts val="0"/>
-              </a:spcBef>
-              <a:buNone/>
-            </a:pPr>
-            <a:r>
-              <a:rPr lang="en-US" sz="2000" dirty="0" smtClean="0"/>
-              <a:t>  </a:t>
-            </a:r>
-          </a:p>
-          <a:p>
-            <a:pPr>
-              <a:spcBef>
-                <a:spcPts val="0"/>
-              </a:spcBef>
-              <a:buNone/>
-            </a:pPr>
-            <a:r>
-              <a:rPr lang="en-US" sz="2000" dirty="0" smtClean="0"/>
-              <a:t>   String </a:t>
-            </a:r>
-            <a:r>
-              <a:rPr lang="en-US" sz="2000" dirty="0" err="1" smtClean="0"/>
-              <a:t>url</a:t>
-            </a:r>
-            <a:r>
-              <a:rPr lang="en-US" sz="2000" dirty="0" smtClean="0"/>
-              <a:t>="</a:t>
-            </a:r>
-            <a:r>
-              <a:rPr lang="en-US" sz="2000" dirty="0" err="1" smtClean="0"/>
-              <a:t>jdbc:odbc:Driver</a:t>
-            </a:r>
-            <a:r>
-              <a:rPr lang="en-US" sz="2000" dirty="0" smtClean="0"/>
-              <a:t>={Microsoft Access Driver (*.mdb)};  </a:t>
-            </a:r>
-          </a:p>
-          <a:p>
-            <a:pPr>
-              <a:spcBef>
-                <a:spcPts val="0"/>
-              </a:spcBef>
-              <a:buNone/>
-            </a:pPr>
-            <a:r>
-              <a:rPr lang="en-US" sz="2000" dirty="0" smtClean="0"/>
-              <a:t>                    DBQ=" + database + ";</a:t>
-            </a:r>
-            <a:r>
-              <a:rPr lang="en-US" sz="2000" dirty="0" err="1" smtClean="0"/>
-              <a:t>DriverID</a:t>
-            </a:r>
-            <a:r>
-              <a:rPr lang="en-US" sz="2000" dirty="0" smtClean="0"/>
-              <a:t>=22;READONLY=</a:t>
-            </a:r>
-            <a:r>
-              <a:rPr lang="en-US" sz="2000" b="1" dirty="0" smtClean="0"/>
-              <a:t>true</a:t>
-            </a:r>
-            <a:r>
-              <a:rPr lang="en-US" sz="2000" dirty="0" smtClean="0"/>
-              <a:t>";  </a:t>
-            </a:r>
-          </a:p>
-          <a:p>
-            <a:pPr>
-              <a:spcBef>
-                <a:spcPts val="0"/>
-              </a:spcBef>
-              <a:buNone/>
-            </a:pPr>
-            <a:r>
-              <a:rPr lang="en-US" sz="2000" dirty="0" smtClean="0"/>
-              <a:t>  </a:t>
-            </a:r>
-          </a:p>
-          <a:p>
-            <a:pPr>
-              <a:spcBef>
-                <a:spcPts val="0"/>
-              </a:spcBef>
-              <a:buNone/>
-            </a:pPr>
-            <a:r>
-              <a:rPr lang="en-US" sz="2000" dirty="0" smtClean="0"/>
-              <a:t>   </a:t>
-            </a:r>
-            <a:r>
-              <a:rPr lang="en-US" sz="2000" dirty="0" err="1" smtClean="0"/>
-              <a:t>Class.forName</a:t>
-            </a:r>
-            <a:r>
-              <a:rPr lang="en-US" sz="2000" dirty="0" smtClean="0"/>
-              <a:t>("</a:t>
-            </a:r>
-            <a:r>
-              <a:rPr lang="en-US" sz="2000" dirty="0" err="1" smtClean="0"/>
-              <a:t>sun.jdbc.odbc.JdbcOdbcDriver</a:t>
-            </a:r>
-            <a:r>
-              <a:rPr lang="en-US" sz="2000" dirty="0" smtClean="0"/>
-              <a:t>");  </a:t>
-            </a:r>
-          </a:p>
-          <a:p>
-            <a:pPr>
-              <a:spcBef>
-                <a:spcPts val="0"/>
-              </a:spcBef>
-              <a:buNone/>
-            </a:pPr>
-            <a:r>
-              <a:rPr lang="en-US" sz="2000" dirty="0" smtClean="0"/>
-              <a:t>   Connection c=</a:t>
-            </a:r>
-            <a:r>
-              <a:rPr lang="en-US" sz="2000" dirty="0" err="1" smtClean="0"/>
-              <a:t>DriverManager.getConnection</a:t>
-            </a:r>
-            <a:r>
-              <a:rPr lang="en-US" sz="2000" dirty="0" smtClean="0"/>
-              <a:t>(</a:t>
-            </a:r>
-            <a:r>
-              <a:rPr lang="en-US" sz="2000" dirty="0" err="1" smtClean="0"/>
-              <a:t>url</a:t>
-            </a:r>
-            <a:r>
-              <a:rPr lang="en-US" sz="2000" dirty="0" smtClean="0"/>
-              <a:t>);  </a:t>
-            </a:r>
-          </a:p>
-          <a:p>
-            <a:pPr>
-              <a:spcBef>
-                <a:spcPts val="0"/>
-              </a:spcBef>
-              <a:buNone/>
-            </a:pPr>
-            <a:r>
-              <a:rPr lang="en-US" sz="2000" dirty="0" smtClean="0"/>
-              <a:t>   Statement </a:t>
-            </a:r>
-            <a:r>
-              <a:rPr lang="en-US" sz="2000" dirty="0" err="1" smtClean="0"/>
-              <a:t>st</a:t>
-            </a:r>
-            <a:r>
-              <a:rPr lang="en-US" sz="2000" dirty="0" smtClean="0"/>
-              <a:t>=</a:t>
-            </a:r>
-            <a:r>
-              <a:rPr lang="en-US" sz="2000" dirty="0" err="1" smtClean="0"/>
-              <a:t>c.createStatement</a:t>
-            </a:r>
-            <a:r>
-              <a:rPr lang="en-US" sz="2000" dirty="0" smtClean="0"/>
-              <a:t>();  </a:t>
-            </a:r>
-          </a:p>
-          <a:p>
-            <a:pPr>
-              <a:spcBef>
-                <a:spcPts val="0"/>
-              </a:spcBef>
-              <a:buNone/>
-            </a:pPr>
-            <a:r>
-              <a:rPr lang="en-US" sz="2000" dirty="0" smtClean="0"/>
-              <a:t>   </a:t>
-            </a:r>
-            <a:r>
-              <a:rPr lang="en-US" sz="2000" dirty="0" err="1" smtClean="0"/>
-              <a:t>ResultSet</a:t>
-            </a:r>
-            <a:r>
-              <a:rPr lang="en-US" sz="2000" dirty="0" smtClean="0"/>
-              <a:t> </a:t>
-            </a:r>
-            <a:r>
-              <a:rPr lang="en-US" sz="2000" dirty="0" err="1" smtClean="0"/>
-              <a:t>rs</a:t>
-            </a:r>
-            <a:r>
-              <a:rPr lang="en-US" sz="2000" dirty="0" smtClean="0"/>
-              <a:t>=</a:t>
-            </a:r>
-            <a:r>
-              <a:rPr lang="en-US" sz="2000" dirty="0" err="1" smtClean="0"/>
-              <a:t>st.executeQuery</a:t>
-            </a:r>
-            <a:r>
-              <a:rPr lang="en-US" sz="2000" dirty="0" smtClean="0"/>
-              <a:t>("select * from login");  </a:t>
-            </a:r>
-          </a:p>
-          <a:p>
-            <a:pPr>
-              <a:spcBef>
-                <a:spcPts val="0"/>
-              </a:spcBef>
-              <a:buNone/>
-            </a:pPr>
-            <a:r>
-              <a:rPr lang="en-US" sz="2000" dirty="0" smtClean="0"/>
-              <a:t>    </a:t>
-            </a:r>
-          </a:p>
-          <a:p>
-            <a:pPr>
-              <a:spcBef>
-                <a:spcPts val="0"/>
-              </a:spcBef>
-              <a:buNone/>
-            </a:pPr>
-            <a:r>
-              <a:rPr lang="en-US" sz="2000" dirty="0" smtClean="0"/>
-              <a:t>   </a:t>
-            </a:r>
-            <a:r>
-              <a:rPr lang="en-US" sz="2000" b="1" dirty="0" smtClean="0"/>
-              <a:t>while</a:t>
-            </a:r>
-            <a:r>
-              <a:rPr lang="en-US" sz="2000" dirty="0" smtClean="0"/>
-              <a:t>(</a:t>
-            </a:r>
-            <a:r>
-              <a:rPr lang="en-US" sz="2000" dirty="0" err="1" smtClean="0"/>
-              <a:t>rs.next</a:t>
-            </a:r>
-            <a:r>
-              <a:rPr lang="en-US" sz="2000" dirty="0" smtClean="0"/>
-              <a:t>()){  </a:t>
-            </a:r>
-          </a:p>
-          <a:p>
-            <a:pPr>
-              <a:spcBef>
-                <a:spcPts val="0"/>
-              </a:spcBef>
-              <a:buNone/>
-            </a:pPr>
-            <a:r>
-              <a:rPr lang="en-US" sz="2000" dirty="0" smtClean="0"/>
-              <a:t>    </a:t>
-            </a:r>
-            <a:r>
-              <a:rPr lang="en-US" sz="2000" dirty="0" err="1" smtClean="0"/>
-              <a:t>System.out.println</a:t>
-            </a:r>
-            <a:r>
-              <a:rPr lang="en-US" sz="2000" dirty="0" smtClean="0"/>
-              <a:t>(</a:t>
-            </a:r>
-            <a:r>
-              <a:rPr lang="en-US" sz="2000" dirty="0" err="1" smtClean="0"/>
-              <a:t>rs.getString</a:t>
-            </a:r>
-            <a:r>
-              <a:rPr lang="en-US" sz="2000" dirty="0" smtClean="0"/>
-              <a:t>(1));  </a:t>
-            </a:r>
-          </a:p>
-          <a:p>
-            <a:pPr>
-              <a:spcBef>
-                <a:spcPts val="0"/>
-              </a:spcBef>
-              <a:buNone/>
-            </a:pPr>
-            <a:r>
-              <a:rPr lang="en-US" sz="2000" dirty="0" smtClean="0"/>
-              <a:t>   }  </a:t>
-            </a:r>
-          </a:p>
-          <a:p>
-            <a:pPr>
-              <a:spcBef>
-                <a:spcPts val="0"/>
-              </a:spcBef>
-              <a:buNone/>
-            </a:pPr>
-            <a:r>
-              <a:rPr lang="en-US" sz="2000" dirty="0" smtClean="0"/>
-              <a:t>  </a:t>
-            </a:r>
-          </a:p>
-          <a:p>
-            <a:pPr>
-              <a:spcBef>
-                <a:spcPts val="0"/>
-              </a:spcBef>
-              <a:buNone/>
-            </a:pPr>
-            <a:r>
-              <a:rPr lang="en-US" sz="2000" dirty="0" smtClean="0"/>
-              <a:t>}</a:t>
-            </a:r>
-            <a:r>
-              <a:rPr lang="en-US" sz="2000" b="1" dirty="0" smtClean="0"/>
-              <a:t>catch</a:t>
-            </a:r>
-            <a:r>
-              <a:rPr lang="en-US" sz="2000" dirty="0" smtClean="0"/>
-              <a:t>(Exception </a:t>
-            </a:r>
-            <a:r>
-              <a:rPr lang="en-US" sz="2000" dirty="0" err="1" smtClean="0"/>
-              <a:t>ee</a:t>
-            </a:r>
-            <a:r>
-              <a:rPr lang="en-US" sz="2000" dirty="0" smtClean="0"/>
-              <a:t>){</a:t>
-            </a:r>
-            <a:r>
-              <a:rPr lang="en-US" sz="2000" dirty="0" err="1" smtClean="0"/>
-              <a:t>System.out.println</a:t>
-            </a:r>
-            <a:r>
-              <a:rPr lang="en-US" sz="2000" dirty="0" smtClean="0"/>
-              <a:t>(</a:t>
-            </a:r>
-            <a:r>
-              <a:rPr lang="en-US" sz="2000" dirty="0" err="1" smtClean="0"/>
-              <a:t>ee</a:t>
-            </a:r>
-            <a:r>
-              <a:rPr lang="en-US" sz="2000" dirty="0" smtClean="0"/>
-              <a:t>);}  </a:t>
-            </a:r>
-          </a:p>
-          <a:p>
-            <a:pPr>
-              <a:spcBef>
-                <a:spcPts val="0"/>
-              </a:spcBef>
-              <a:buNone/>
-            </a:pPr>
-            <a:r>
-              <a:rPr lang="en-US" sz="2000" dirty="0" smtClean="0"/>
-              <a:t>  </a:t>
-            </a:r>
-          </a:p>
-          <a:p>
-            <a:pPr>
-              <a:spcBef>
-                <a:spcPts val="0"/>
-              </a:spcBef>
-              <a:buNone/>
-            </a:pPr>
-            <a:r>
-              <a:rPr lang="en-US" sz="2000" dirty="0" smtClean="0"/>
-              <a:t>}}  </a:t>
+            <a:r>
+              <a:rPr lang="en-GB" dirty="0" smtClean="0"/>
+              <a:t>There are two ways to connect java application with the access database.</a:t>
+            </a:r>
+          </a:p>
+          <a:p>
+            <a:pPr marL="514350" indent="-514350">
+              <a:buFont typeface="+mj-lt"/>
+              <a:buAutoNum type="arabicPeriod"/>
+            </a:pPr>
+            <a:r>
+              <a:rPr lang="en-GB" dirty="0" smtClean="0"/>
+              <a:t>Without DSN (Data Source Name)</a:t>
+            </a:r>
+          </a:p>
+          <a:p>
+            <a:pPr marL="514350" indent="-514350">
+              <a:buFont typeface="+mj-lt"/>
+              <a:buAutoNum type="arabicPeriod"/>
+            </a:pPr>
+            <a:r>
+              <a:rPr lang="en-GB" dirty="0" smtClean="0"/>
+              <a:t>With DSN</a:t>
             </a:r>
           </a:p>
           <a:p>
@@ -43143,9 +43256,12 @@
           <a:p>
             <a:r>
               <a:rPr lang="en-GB" dirty="0" smtClean="0"/>
-              <a:t>Example to Connect Java Application with access with DSN</a:t>
-            </a:r>
-            <a:endParaRPr lang="en-GB" dirty="0"/>
+              <a:t> Example to Connect Java Application with access without DSN</a:t>
+            </a:r>
+            <a:br>
+              <a:rPr lang="en-GB" dirty="0" smtClean="0"/>
+            </a:br>
+            <a:endParaRPr lang="en-US" dirty="0"/>
           </a:p>
         </p:txBody>
       </p:sp>
@@ -43159,7 +43275,12 @@
             <p:ph idx="1"/>
           </p:nvPr>
         </p:nvSpPr>
-        <p:spPr/>
+        <p:spPr>
+          <a:xfrm>
+            <a:off x="838200" y="1428736"/>
+            <a:ext cx="10515600" cy="4748227"/>
+          </a:xfrm>
+        </p:spPr>
         <p:txBody>
           <a:bodyPr/>
           <a:lstStyle/>
@@ -43171,8 +43292,16 @@
               <a:buNone/>
             </a:pPr>
             <a:r>
-              <a:rPr lang="en-US" sz="2000" b="1" dirty="0" smtClean="0"/>
-              <a:t>import</a:t>
+              <a:rPr lang="en-GB" sz="2000" dirty="0" smtClean="0"/>
+              <a:t> </a:t>
+            </a:r>
+            <a:r>
+              <a:rPr lang="en-GB" sz="2000" dirty="0" err="1" smtClean="0"/>
+              <a:t>i</a:t>
+            </a:r>
+            <a:r>
+              <a:rPr lang="en-US" sz="2000" b="1" dirty="0" err="1" smtClean="0"/>
+              <a:t>mport</a:t>
             </a:r>
             <a:r>
               <a:rPr lang="en-US" sz="2000" dirty="0" smtClean="0"/>
@@ -43264,6 +43393,30 @@
             </a:pPr>
             <a:r>
               <a:rPr lang="en-US" sz="2000" dirty="0" smtClean="0"/>
+              <a:t>   String database="student.mdb";//Here database exists in the current directory  </a:t>
+            </a:r>
+          </a:p>
+          <a:p>
+            <a:pPr>
+              <a:spcBef>
+                <a:spcPts val="0"/>
+              </a:spcBef>
+              <a:buNone/>
+            </a:pPr>
+            <a:r>
+              <a:rPr lang="en-US" sz="2000" dirty="0" smtClean="0"/>
+              <a:t>  </a:t>
+            </a:r>
+          </a:p>
+          <a:p>
+            <a:pPr>
+              <a:spcBef>
+                <a:spcPts val="0"/>
+              </a:spcBef>
+              <a:buNone/>
+            </a:pPr>
+            <a:r>
+              <a:rPr lang="en-US" sz="2000" dirty="0" smtClean="0"/>
               <a:t>   String </a:t>
             </a:r>
             <a:r>
@@ -43276,7 +43429,35 @@
             </a:r>
             <a:r>
               <a:rPr lang="en-US" sz="2000" dirty="0" err="1" smtClean="0"/>
-              <a:t>jdbc:odbc:mydsn</a:t>
+              <a:t>jdbc:odbc:Driver</a:t>
+            </a:r>
+            <a:r>
+              <a:rPr lang="en-US" sz="2000" dirty="0" smtClean="0"/>
+              <a:t>={Microsoft Access Driver (*.mdb)};  </a:t>
+            </a:r>
+          </a:p>
+          <a:p>
+            <a:pPr>
+              <a:spcBef>
+                <a:spcPts val="0"/>
+              </a:spcBef>
+              <a:buNone/>
+            </a:pPr>
+            <a:r>
+              <a:rPr lang="en-US" sz="2000" dirty="0" smtClean="0"/>
+              <a:t>                    DBQ=" + database + ";</a:t>
+            </a:r>
+            <a:r>
+              <a:rPr lang="en-US" sz="2000" dirty="0" err="1" smtClean="0"/>
+              <a:t>DriverID</a:t>
+            </a:r>
+            <a:r>
+              <a:rPr lang="en-US" sz="2000" dirty="0" smtClean="0"/>
+              <a:t>=22;READONLY=</a:t>
+            </a:r>
+            <a:r>
+              <a:rPr lang="en-US" sz="2000" b="1" dirty="0" smtClean="0"/>
+              <a:t>true</a:t>
             </a:r>
             <a:r>
               <a:rPr lang="en-US" sz="2000" dirty="0" smtClean="0"/>
@@ -43292,6 +43473,18 @@
             </a:pPr>
             <a:r>
               <a:rPr lang="en-US" sz="2000" dirty="0" smtClean="0"/>
+              <a:t>  </a:t>
+            </a:r>
+          </a:p>
+          <a:p>
+            <a:pPr>
+              <a:spcBef>
+                <a:spcPts val="0"/>
+              </a:spcBef>
+              <a:buNone/>
+            </a:pPr>
+            <a:r>
+              <a:rPr lang="en-US" sz="2000" dirty="0" smtClean="0"/>
               <a:t>   </a:t>
             </a:r>
             <a:r>
@@ -43424,7 +43617,7 @@
             </a:pPr>
             <a:r>
               <a:rPr lang="en-US" sz="2000" dirty="0" smtClean="0"/>
-              <a:t>  </a:t>
+              <a:t>   </a:t>
             </a:r>
             <a:r>
               <a:rPr lang="en-US" sz="2000" b="1" dirty="0" smtClean="0"/>
@@ -43564,13 +43757,7 @@
             </a:r>
           </a:p>
           <a:p>
-            <a:pPr>
-              <a:spcBef>
-                <a:spcPts val="0"/>
-              </a:spcBef>
-              <a:buNone/>
-            </a:pPr>
-            <a:endParaRPr lang="en-US" sz="2000" dirty="0"/>
+            <a:endParaRPr lang="en-US" dirty="0"/>
           </a:p>
         </p:txBody>
       </p:sp>
@@ -43650,7 +43837,11 @@
           <a:bodyPr/>
           <a:lstStyle/>
           <a:p>
-            <a:endParaRPr lang="en-US"/>
+            <a:r>
+              <a:rPr lang="en-GB" dirty="0" smtClean="0"/>
+              <a:t>Example to Connect Java Application with access with DSN</a:t>
+            </a:r>
+            <a:endParaRPr lang="en-GB" dirty="0"/>
           </a:p>
         </p:txBody>
       </p:sp>
@@ -43669,7 +43860,413 @@
           <a:bodyPr/>
           <a:lstStyle/>
           <a:p>
-            <a:endParaRPr lang="en-US"/>
+            <a:pPr>
+              <a:spcBef>
+                <a:spcPts val="0"/>
+              </a:spcBef>
+              <a:buNone/>
+            </a:pPr>
+            <a:r>
+              <a:rPr lang="en-US" sz="2000" b="1" dirty="0" smtClean="0"/>
+              <a:t>import</a:t>
+            </a:r>
+            <a:r>
+              <a:rPr lang="en-US" sz="2000" dirty="0" smtClean="0"/>
+              <a:t> java.sql.*;  </a:t>
+            </a:r>
+          </a:p>
+          <a:p>
+            <a:pPr>
+              <a:spcBef>
+                <a:spcPts val="0"/>
+              </a:spcBef>
+              <a:buNone/>
+            </a:pPr>
+            <a:r>
+              <a:rPr lang="en-US" sz="2000" b="1" dirty="0" smtClean="0"/>
+              <a:t>class</a:t>
+            </a:r>
+            <a:r>
+              <a:rPr lang="en-US" sz="2000" dirty="0" smtClean="0"/>
+              <a:t> Test{  </a:t>
+            </a:r>
+          </a:p>
+          <a:p>
+            <a:pPr>
+              <a:spcBef>
+                <a:spcPts val="0"/>
+              </a:spcBef>
+              <a:buNone/>
+            </a:pPr>
+            <a:r>
+              <a:rPr lang="en-US" sz="2000" b="1" dirty="0" smtClean="0"/>
+              <a:t>public</a:t>
+            </a:r>
+            <a:r>
+              <a:rPr lang="en-US" sz="2000" dirty="0" smtClean="0"/>
+              <a:t> </a:t>
+            </a:r>
+            <a:r>
+              <a:rPr lang="en-US" sz="2000" b="1" dirty="0" smtClean="0"/>
+              <a:t>static</a:t>
+            </a:r>
+            <a:r>
+              <a:rPr lang="en-US" sz="2000" dirty="0" smtClean="0"/>
+              <a:t> </a:t>
+            </a:r>
+            <a:r>
+              <a:rPr lang="en-US" sz="2000" b="1" dirty="0" smtClean="0"/>
+              <a:t>void</a:t>
+            </a:r>
+            <a:r>
+              <a:rPr lang="en-US" sz="2000" dirty="0" smtClean="0"/>
+              <a:t> main(String </a:t>
+            </a:r>
+            <a:r>
+              <a:rPr lang="en-US" sz="2000" dirty="0" err="1" smtClean="0"/>
+              <a:t>ar</a:t>
+            </a:r>
+            <a:r>
+              <a:rPr lang="en-US" sz="2000" dirty="0" smtClean="0"/>
+              <a:t>[]){  </a:t>
+            </a:r>
+          </a:p>
+          <a:p>
+            <a:pPr>
+              <a:spcBef>
+                <a:spcPts val="0"/>
+              </a:spcBef>
+              <a:buNone/>
+            </a:pPr>
+            <a:r>
+              <a:rPr lang="en-US" sz="2000" dirty="0" smtClean="0"/>
+              <a:t> </a:t>
+            </a:r>
+            <a:r>
+              <a:rPr lang="en-US" sz="2000" b="1" dirty="0" smtClean="0"/>
+              <a:t>try</a:t>
+            </a:r>
+            <a:r>
+              <a:rPr lang="en-US" sz="2000" dirty="0" smtClean="0"/>
+              <a:t>{  </a:t>
+            </a:r>
+          </a:p>
+          <a:p>
+            <a:pPr>
+              <a:spcBef>
+                <a:spcPts val="0"/>
+              </a:spcBef>
+              <a:buNone/>
+            </a:pPr>
+            <a:r>
+              <a:rPr lang="en-US" sz="2000" dirty="0" smtClean="0"/>
+              <a:t>   String </a:t>
+            </a:r>
+            <a:r>
+              <a:rPr lang="en-US" sz="2000" dirty="0" err="1" smtClean="0"/>
+              <a:t>url</a:t>
+            </a:r>
+            <a:r>
+              <a:rPr lang="en-US" sz="2000" dirty="0" smtClean="0"/>
+              <a:t>="</a:t>
+            </a:r>
+            <a:r>
+              <a:rPr lang="en-US" sz="2000" dirty="0" err="1" smtClean="0"/>
+              <a:t>jdbc:odbc:mydsn</a:t>
+            </a:r>
+            <a:r>
+              <a:rPr lang="en-US" sz="2000" dirty="0" smtClean="0"/>
+              <a:t>";  </a:t>
+            </a:r>
+          </a:p>
+          <a:p>
+            <a:pPr>
+              <a:spcBef>
+                <a:spcPts val="0"/>
+              </a:spcBef>
+              <a:buNone/>
+            </a:pPr>
+            <a:r>
+              <a:rPr lang="en-US" sz="2000" dirty="0" smtClean="0"/>
+              <a:t>   </a:t>
+            </a:r>
+            <a:r>
+              <a:rPr lang="en-US" sz="2000" dirty="0" err="1" smtClean="0"/>
+              <a:t>Class.forName</a:t>
+            </a:r>
+            <a:r>
+              <a:rPr lang="en-US" sz="2000" dirty="0" smtClean="0"/>
+              <a:t>("</a:t>
+            </a:r>
+            <a:r>
+              <a:rPr lang="en-US" sz="2000" dirty="0" err="1" smtClean="0"/>
+              <a:t>sun.jdbc.odbc.JdbcOdbcDriver</a:t>
+            </a:r>
+            <a:r>
+              <a:rPr lang="en-US" sz="2000" dirty="0" smtClean="0"/>
+              <a:t>");  </a:t>
+            </a:r>
+          </a:p>
+          <a:p>
+            <a:pPr>
+              <a:spcBef>
+                <a:spcPts val="0"/>
+              </a:spcBef>
+              <a:buNone/>
+            </a:pPr>
+            <a:r>
+              <a:rPr lang="en-US" sz="2000" dirty="0" smtClean="0"/>
+              <a:t>   Connection c=</a:t>
+            </a:r>
+            <a:r>
+              <a:rPr lang="en-US" sz="2000" dirty="0" err="1" smtClean="0"/>
+              <a:t>DriverManager.getConnection</a:t>
+            </a:r>
+            <a:r>
+              <a:rPr lang="en-US" sz="2000" dirty="0" smtClean="0"/>
+              <a:t>(</a:t>
+            </a:r>
+            <a:r>
+              <a:rPr lang="en-US" sz="2000" dirty="0" err="1" smtClean="0"/>
+              <a:t>url</a:t>
+            </a:r>
+            <a:r>
+              <a:rPr lang="en-US" sz="2000" dirty="0" smtClean="0"/>
+              <a:t>);  </a:t>
+            </a:r>
+          </a:p>
+          <a:p>
+            <a:pPr>
+              <a:spcBef>
+                <a:spcPts val="0"/>
+              </a:spcBef>
+              <a:buNone/>
+            </a:pPr>
+            <a:r>
+              <a:rPr lang="en-US" sz="2000" dirty="0" smtClean="0"/>
+              <a:t>   Statement </a:t>
+            </a:r>
+            <a:r>
+              <a:rPr lang="en-US" sz="2000" dirty="0" err="1" smtClean="0"/>
+              <a:t>st</a:t>
+            </a:r>
+            <a:r>
+              <a:rPr lang="en-US" sz="2000" dirty="0" smtClean="0"/>
+              <a:t>=</a:t>
+            </a:r>
+            <a:r>
+              <a:rPr lang="en-US" sz="2000" dirty="0" err="1" smtClean="0"/>
+              <a:t>c.createStatement</a:t>
+            </a:r>
+            <a:r>
+              <a:rPr lang="en-US" sz="2000" dirty="0" smtClean="0"/>
+              <a:t>();  </a:t>
+            </a:r>
+          </a:p>
+          <a:p>
+            <a:pPr>
+              <a:spcBef>
+                <a:spcPts val="0"/>
+              </a:spcBef>
+              <a:buNone/>
+            </a:pPr>
+            <a:r>
+              <a:rPr lang="en-US" sz="2000" dirty="0" smtClean="0"/>
+              <a:t>   </a:t>
+            </a:r>
+            <a:r>
+              <a:rPr lang="en-US" sz="2000" dirty="0" err="1" smtClean="0"/>
+              <a:t>ResultSet</a:t>
+            </a:r>
+            <a:r>
+              <a:rPr lang="en-US" sz="2000" dirty="0" smtClean="0"/>
+              <a:t> </a:t>
+            </a:r>
+            <a:r>
+              <a:rPr lang="en-US" sz="2000" dirty="0" err="1" smtClean="0"/>
+              <a:t>rs</a:t>
+            </a:r>
+            <a:r>
+              <a:rPr lang="en-US" sz="2000" dirty="0" smtClean="0"/>
+              <a:t>=</a:t>
+            </a:r>
+            <a:r>
+              <a:rPr lang="en-US" sz="2000" dirty="0" err="1" smtClean="0"/>
+              <a:t>st.executeQuery</a:t>
+            </a:r>
+            <a:r>
+              <a:rPr lang="en-US" sz="2000" dirty="0" smtClean="0"/>
+              <a:t>("select * from login");  </a:t>
+            </a:r>
+          </a:p>
+          <a:p>
+            <a:pPr>
+              <a:spcBef>
+                <a:spcPts val="0"/>
+              </a:spcBef>
+              <a:buNone/>
+            </a:pPr>
+            <a:r>
+              <a:rPr lang="en-US" sz="2000" dirty="0" smtClean="0"/>
+              <a:t>    </a:t>
+            </a:r>
+          </a:p>
+          <a:p>
+            <a:pPr>
+              <a:spcBef>
+                <a:spcPts val="0"/>
+              </a:spcBef>
+              <a:buNone/>
+            </a:pPr>
+            <a:r>
+              <a:rPr lang="en-US" sz="2000" dirty="0" smtClean="0"/>
+              <a:t>  </a:t>
+            </a:r>
+            <a:r>
+              <a:rPr lang="en-US" sz="2000" b="1" dirty="0" smtClean="0"/>
+              <a:t>while</a:t>
+            </a:r>
+            <a:r>
+              <a:rPr lang="en-US" sz="2000" dirty="0" smtClean="0"/>
+              <a:t>(</a:t>
+            </a:r>
+            <a:r>
+              <a:rPr lang="en-US" sz="2000" dirty="0" err="1" smtClean="0"/>
+              <a:t>rs.next</a:t>
+            </a:r>
+            <a:r>
+              <a:rPr lang="en-US" sz="2000" dirty="0" smtClean="0"/>
+              <a:t>()){  </a:t>
+            </a:r>
+          </a:p>
+          <a:p>
+            <a:pPr>
+              <a:spcBef>
+                <a:spcPts val="0"/>
+              </a:spcBef>
+              <a:buNone/>
+            </a:pPr>
+            <a:r>
+              <a:rPr lang="en-US" sz="2000" dirty="0" smtClean="0"/>
+              <a:t>    </a:t>
+            </a:r>
+            <a:r>
+              <a:rPr lang="en-US" sz="2000" dirty="0" err="1" smtClean="0"/>
+              <a:t>System.out.println</a:t>
+            </a:r>
+            <a:r>
+              <a:rPr lang="en-US" sz="2000" dirty="0" smtClean="0"/>
+              <a:t>(</a:t>
+            </a:r>
+            <a:r>
+              <a:rPr lang="en-US" sz="2000" dirty="0" err="1" smtClean="0"/>
+              <a:t>rs.getString</a:t>
+            </a:r>
+            <a:r>
+              <a:rPr lang="en-US" sz="2000" dirty="0" smtClean="0"/>
+              <a:t>(1));  </a:t>
+            </a:r>
+          </a:p>
+          <a:p>
+            <a:pPr>
+              <a:spcBef>
+                <a:spcPts val="0"/>
+              </a:spcBef>
+              <a:buNone/>
+            </a:pPr>
+            <a:r>
+              <a:rPr lang="en-US" sz="2000" dirty="0" smtClean="0"/>
+              <a:t>   }  </a:t>
+            </a:r>
+          </a:p>
+          <a:p>
+            <a:pPr>
+              <a:spcBef>
+                <a:spcPts val="0"/>
+              </a:spcBef>
+              <a:buNone/>
+            </a:pPr>
+            <a:r>
+              <a:rPr lang="en-US" sz="2000" dirty="0" smtClean="0"/>
+              <a:t>  </a:t>
+            </a:r>
+          </a:p>
+          <a:p>
+            <a:pPr>
+              <a:spcBef>
+                <a:spcPts val="0"/>
+              </a:spcBef>
+              <a:buNone/>
+            </a:pPr>
+            <a:r>
+              <a:rPr lang="en-US" sz="2000" dirty="0" smtClean="0"/>
+              <a:t>}</a:t>
+            </a:r>
+            <a:r>
+              <a:rPr lang="en-US" sz="2000" b="1" dirty="0" smtClean="0"/>
+              <a:t>catch</a:t>
+            </a:r>
+            <a:r>
+              <a:rPr lang="en-US" sz="2000" dirty="0" smtClean="0"/>
+              <a:t>(Exception </a:t>
+            </a:r>
+            <a:r>
+              <a:rPr lang="en-US" sz="2000" dirty="0" err="1" smtClean="0"/>
+              <a:t>ee</a:t>
+            </a:r>
+            <a:r>
+              <a:rPr lang="en-US" sz="2000" dirty="0" smtClean="0"/>
+              <a:t>){</a:t>
+            </a:r>
+            <a:r>
+              <a:rPr lang="en-US" sz="2000" dirty="0" err="1" smtClean="0"/>
+              <a:t>System.out.println</a:t>
+            </a:r>
+            <a:r>
+              <a:rPr lang="en-US" sz="2000" dirty="0" smtClean="0"/>
+              <a:t>(</a:t>
+            </a:r>
+            <a:r>
+              <a:rPr lang="en-US" sz="2000" dirty="0" err="1" smtClean="0"/>
+              <a:t>ee</a:t>
+            </a:r>
+            <a:r>
+              <a:rPr lang="en-US" sz="2000" dirty="0" smtClean="0"/>
+              <a:t>);}  </a:t>
+            </a:r>
+          </a:p>
+          <a:p>
+            <a:pPr>
+              <a:spcBef>
+                <a:spcPts val="0"/>
+              </a:spcBef>
+              <a:buNone/>
+            </a:pPr>
+            <a:r>
+              <a:rPr lang="en-US" sz="2000" dirty="0" smtClean="0"/>
+              <a:t>  </a:t>
+            </a:r>
+          </a:p>
+          <a:p>
+            <a:pPr>
+              <a:spcBef>
+                <a:spcPts val="0"/>
+              </a:spcBef>
+              <a:buNone/>
+            </a:pPr>
+            <a:r>
+              <a:rPr lang="en-US" sz="2000" dirty="0" smtClean="0"/>
+              <a:t>}}  </a:t>
+            </a:r>
+          </a:p>
+          <a:p>
+            <a:pPr>
+              <a:spcBef>
+                <a:spcPts val="0"/>
+              </a:spcBef>
+              <a:buNone/>
+            </a:pPr>
+            <a:endParaRPr lang="en-US" sz="2000" dirty="0"/>
           </a:p>
         </p:txBody>
       </p:sp>
@@ -43703,6 +44300,105 @@
         </p:txBody>
       </p:sp>
     </p:spTree>
+  </p:cSld>
+  <p:clrMapOvr>
+    <a:masterClrMapping/>
+  </p:clrMapOvr>
+  <p:timing>
+    <p:tnLst>
+      <p:par>
+        <p:cTn id="1" dur="indefinite" restart="never" nodeType="tmRoot"/>
+      </p:par>
+    </p:tnLst>
+  </p:timing>
+</p:sld>
+</file>
+
+<file path=ppt/slides/slide86.xml><?xml version="1.0" encoding="utf-8"?>
+<p:sld xmlns:a="http://schemas.openxmlformats.org/drawingml/2006/main" xmlns:r="http://schemas.openxmlformats.org/officeDocument/2006/relationships" xmlns:p="http://schemas.openxmlformats.org/presentationml/2006/main">
+  <p:cSld>
+    <p:spTree>
+      <p:nvGrpSpPr>
+        <p:cNvPr id="1" name=""/>
+        <p:cNvGrpSpPr/>
+        <p:nvPr/>
+      </p:nvGrpSpPr>
+      <p:grpSpPr>
+        <a:xfrm>
+          <a:off x="0" y="0"/>
+          <a:ext cx="0" cy="0"/>
+          <a:chOff x="0" y="0"/>
+          <a:chExt cx="0" cy="0"/>
+        </a:xfrm>
+      </p:grpSpPr>
+      <p:sp>
+        <p:nvSpPr>
+          <p:cNvPr id="2" name="Title 1"/>
+          <p:cNvSpPr>
+            <a:spLocks noGrp="1"/>
+          </p:cNvSpPr>
+          <p:nvPr>
+            <p:ph type="title"/>
+          </p:nvPr>
+        </p:nvSpPr>
+        <p:spPr/>
+        <p:txBody>
+          <a:bodyPr/>
+          <a:lstStyle/>
+          <a:p>
+            <a:endParaRPr lang="en-US"/>
+          </a:p>
+        </p:txBody>
+      </p:sp>
+      <p:sp>
+        <p:nvSpPr>
+          <p:cNvPr id="3" name="Content Placeholder 2"/>
+          <p:cNvSpPr>
+            <a:spLocks noGrp="1"/>
+          </p:cNvSpPr>
+          <p:nvPr>
+            <p:ph idx="1"/>
+          </p:nvPr>
+        </p:nvSpPr>
+        <p:spPr/>
+        <p:txBody>
+          <a:bodyPr/>
+          <a:lstStyle/>
+          <a:p>
+            <a:endParaRPr lang="en-US"/>
+          </a:p>
+        </p:txBody>
+      </p:sp>
+      <p:sp>
+        <p:nvSpPr>
+          <p:cNvPr id="4" name="Slide Number Placeholder 3"/>
+          <p:cNvSpPr>
+            <a:spLocks noGrp="1"/>
+          </p:cNvSpPr>
+          <p:nvPr>
+            <p:ph type="sldNum" sz="quarter" idx="12"/>
+          </p:nvPr>
+        </p:nvSpPr>
+        <p:spPr/>
+        <p:txBody>
+          <a:bodyPr/>
+          <a:lstStyle/>
+          <a:p>
+            <a:pPr>
+              <a:defRPr/>
+            </a:pPr>
+            <a:fld id="{A01CA5F2-CD08-4EF5-BAD9-872B7BB27165}" type="slidenum">
+              <a:rPr lang="en-US" altLang="en-US" smtClean="0"/>
+              <a:pPr>
+                <a:defRPr/>
+              </a:pPr>
+              <a:t>86</a:t>
+            </a:fld>
+            <a:endParaRPr lang="en-US" altLang="en-US"/>
+          </a:p>
+        </p:txBody>
+      </p:sp>
+    </p:spTree>
     <p:extLst>
       <p:ext uri="{BB962C8B-B14F-4D97-AF65-F5344CB8AC3E}">
         <p14:creationId xmlns:p14="http://schemas.microsoft.com/office/powerpoint/2010/main" val="279621596"/>
@@ -43712,6 +44408,13 @@
   <p:clrMapOvr>
     <a:masterClrMapping/>
   </p:clrMapOvr>
+  <p:timing>
+    <p:tnLst>
+      <p:par>
+        <p:cTn id="1" dur="indefinite" restart="never" nodeType="tmRoot"/>
+      </p:par>
+    </p:tnLst>
+  </p:timing>
 </p:sld>
 </file>
 
